--- a/Kenna/presentation/Kenna_FYP_Defense.pptx
+++ b/Kenna/presentation/Kenna_FYP_Defense.pptx
@@ -5,13 +5,13 @@
     <p:sldMasterId id="2147483648" r:id="rId1"/>
   </p:sldMasterIdLst>
   <p:notesMasterIdLst>
-    <p:notesMasterId r:id="rId21"/>
+    <p:notesMasterId r:id="rId20"/>
   </p:notesMasterIdLst>
   <p:sldIdLst>
     <p:sldId id="256" r:id="rId2"/>
-    <p:sldId id="257" r:id="rId3"/>
+    <p:sldId id="259" r:id="rId3"/>
     <p:sldId id="258" r:id="rId4"/>
-    <p:sldId id="259" r:id="rId5"/>
+    <p:sldId id="257" r:id="rId5"/>
     <p:sldId id="260" r:id="rId6"/>
     <p:sldId id="261" r:id="rId7"/>
     <p:sldId id="262" r:id="rId8"/>
@@ -24,9 +24,8 @@
     <p:sldId id="269" r:id="rId15"/>
     <p:sldId id="270" r:id="rId16"/>
     <p:sldId id="271" r:id="rId17"/>
-    <p:sldId id="272" r:id="rId18"/>
-    <p:sldId id="273" r:id="rId19"/>
-    <p:sldId id="274" r:id="rId20"/>
+    <p:sldId id="273" r:id="rId18"/>
+    <p:sldId id="275" r:id="rId19"/>
   </p:sldIdLst>
   <p:sldSz cx="12192000" cy="6858000"/>
   <p:notesSz cx="6858000" cy="12192000"/>
@@ -125,29 +124,29 @@
   <p:extLst>
     <p:ext uri="{521415D9-36F7-43E2-AB2F-B90AF26B5E84}">
       <p14:sectionLst xmlns:p14="http://schemas.microsoft.com/office/powerpoint/2010/main">
-        <p14:section name="Opening" id="{0D9037AF-95F6-B7B0-661B-6B0CCCD89E72}">
+        <p14:section name="Opening" id="{7027E065-F244-20ED-677E-854693595A70}">
           <p14:sldIdLst>
             <p14:sldId id="256"/>
           </p14:sldIdLst>
         </p14:section>
-        <p14:section name="Problem" id="{E15E63CA-53C8-7885-726D-B873F1E4BC00}">
-          <p14:sldIdLst>
-            <p14:sldId id="257"/>
-            <p14:sldId id="258"/>
-          </p14:sldIdLst>
-        </p14:section>
-        <p14:section name="Context" id="{71C6E2A4-ADAF-FE01-C618-2F8C1474B490}">
+        <p14:section name="Context" id="{C0CCA438-5154-34E7-B879-D9A567CB624C}">
           <p14:sldIdLst>
             <p14:sldId id="259"/>
           </p14:sldIdLst>
         </p14:section>
-        <p14:section name="Approach" id="{0A7D4B36-D164-BC2B-BF29-30918F1DE8D1}">
+        <p14:section name="Problem" id="{7E34D634-7F62-ABBB-637C-A248F048168B}">
+          <p14:sldIdLst>
+            <p14:sldId id="258"/>
+            <p14:sldId id="257"/>
+          </p14:sldIdLst>
+        </p14:section>
+        <p14:section name="Approach" id="{D34D3335-9848-10A7-3EBC-5325999F39AD}">
           <p14:sldIdLst>
             <p14:sldId id="260"/>
             <p14:sldId id="261"/>
           </p14:sldIdLst>
         </p14:section>
-        <p14:section name="Evidence" id="{A6BD0F4A-8E8E-096E-6E10-93D95D5C13A2}">
+        <p14:section name="Evidence" id="{7F43FF2E-96EB-9E05-B6EE-F8F8827679FC}">
           <p14:sldIdLst>
             <p14:sldId id="262"/>
             <p14:sldId id="263"/>
@@ -155,25 +154,28 @@
             <p14:sldId id="265"/>
           </p14:sldIdLst>
         </p14:section>
-        <p14:section name="Demo" id="{776019F2-CBCC-8348-B7DF-9A2AB172908C}">
+        <p14:section name="Demo" id="{56E7347D-DFB3-7258-7152-FD6EE84AD8F5}">
           <p14:sldIdLst>
             <p14:sldId id="266"/>
           </p14:sldIdLst>
         </p14:section>
-        <p14:section name="Close" id="{2DC09EFE-B3EB-E9E9-5FD3-23D156B760F6}">
+        <p14:section name="Close" id="{328603B4-0F72-DF4F-5EE7-7117B6E43670}">
           <p14:sldIdLst>
             <p14:sldId id="267"/>
             <p14:sldId id="268"/>
             <p14:sldId id="269"/>
           </p14:sldIdLst>
         </p14:section>
-        <p14:section name="FAQ" id="{95FECD38-20FC-3AFC-E6EF-4A7454AC1BC8}">
+        <p14:section name="FAQ" id="{CDE99DD5-6D51-F73D-D838-EB386E0A2E8B}">
           <p14:sldIdLst>
             <p14:sldId id="270"/>
             <p14:sldId id="271"/>
-            <p14:sldId id="272"/>
             <p14:sldId id="273"/>
-            <p14:sldId id="274"/>
+          </p14:sldIdLst>
+        </p14:section>
+        <p14:section name="Thank you" id="{F3687508-E8AA-4CC9-B86F-1A724D8D5DFF}">
+          <p14:sldIdLst>
+            <p14:sldId id="275"/>
           </p14:sldIdLst>
         </p14:section>
       </p14:sectionLst>
@@ -188,7 +190,8 @@
 <file path=ppt/revisionInfo.xml><?xml version="1.0" encoding="utf-8"?>
 <p1510:revInfo xmlns:a="http://schemas.openxmlformats.org/drawingml/2006/main" xmlns:r="http://schemas.openxmlformats.org/officeDocument/2006/relationships" xmlns:p1510="http://schemas.microsoft.com/office/powerpoint/2015/10/main">
   <p1510:revLst>
-    <p1510:client id="{1F02DD5D-03D1-4FB6-8936-03F0EF6AE5A3}" v="5" dt="2026-10-29T13:37:01.297"/>
+    <p1510:client id="{1F02DD5D-03D1-4FB6-8936-03F0EF6AE5A3}" v="1" dt="2026-10-30T03:16:36.657"/>
+    <p1510:client id="{CC642543-AF96-4316-AC76-9C78B6BCAB03}" v="7" dt="2026-10-29T19:11:28.897"/>
   </p1510:revLst>
 </p1510:revInfo>
 </file>
@@ -197,19 +200,19 @@
 <pc:chgInfo xmlns:a="http://schemas.openxmlformats.org/drawingml/2006/main" xmlns:r="http://schemas.openxmlformats.org/officeDocument/2006/relationships" xmlns:ac="http://schemas.microsoft.com/office/drawing/2013/main/command" xmlns:pc="http://schemas.microsoft.com/office/powerpoint/2013/main/command">
   <pc:docChgLst>
     <pc:chgData name="Muhammad Baig" userId="9e391c9c-4a86-4ccf-b1af-be7858601e98" providerId="ADAL" clId="{AF192224-BF7A-47DA-84FC-CD48B002FA0D}"/>
-    <pc:docChg chg="undo custSel modSld">
-      <pc:chgData name="Muhammad Baig" userId="9e391c9c-4a86-4ccf-b1af-be7858601e98" providerId="ADAL" clId="{AF192224-BF7A-47DA-84FC-CD48B002FA0D}" dt="2026-10-29T13:42:26.891" v="197" actId="1035"/>
+    <pc:docChg chg="custSel addSld delSld modSld sldOrd addSection modSection">
+      <pc:chgData name="Muhammad Baig" userId="9e391c9c-4a86-4ccf-b1af-be7858601e98" providerId="ADAL" clId="{AF192224-BF7A-47DA-84FC-CD48B002FA0D}" dt="2026-10-30T04:32:23.188" v="232" actId="20577"/>
       <pc:docMkLst>
         <pc:docMk/>
       </pc:docMkLst>
       <pc:sldChg chg="addSp delSp modSp mod">
-        <pc:chgData name="Muhammad Baig" userId="9e391c9c-4a86-4ccf-b1af-be7858601e98" providerId="ADAL" clId="{AF192224-BF7A-47DA-84FC-CD48B002FA0D}" dt="2026-10-29T13:41:34.703" v="196" actId="1035"/>
+        <pc:chgData name="Muhammad Baig" userId="9e391c9c-4a86-4ccf-b1af-be7858601e98" providerId="ADAL" clId="{AF192224-BF7A-47DA-84FC-CD48B002FA0D}" dt="2026-10-30T04:32:23.188" v="232" actId="20577"/>
         <pc:sldMkLst>
           <pc:docMk/>
           <pc:sldMk cId="0" sldId="256"/>
         </pc:sldMkLst>
         <pc:spChg chg="del">
-          <ac:chgData name="Muhammad Baig" userId="9e391c9c-4a86-4ccf-b1af-be7858601e98" providerId="ADAL" clId="{AF192224-BF7A-47DA-84FC-CD48B002FA0D}" dt="2026-10-29T13:26:46.406" v="3" actId="478"/>
+          <ac:chgData name="Muhammad Baig" userId="9e391c9c-4a86-4ccf-b1af-be7858601e98" providerId="ADAL" clId="{AF192224-BF7A-47DA-84FC-CD48B002FA0D}" dt="2026-10-29T13:40:53.198" v="10" actId="478"/>
           <ac:spMkLst>
             <pc:docMk/>
             <pc:sldMk cId="0" sldId="256"/>
@@ -217,7 +220,7 @@
           </ac:spMkLst>
         </pc:spChg>
         <pc:spChg chg="del">
-          <ac:chgData name="Muhammad Baig" userId="9e391c9c-4a86-4ccf-b1af-be7858601e98" providerId="ADAL" clId="{AF192224-BF7A-47DA-84FC-CD48B002FA0D}" dt="2026-10-29T13:26:44.219" v="2" actId="478"/>
+          <ac:chgData name="Muhammad Baig" userId="9e391c9c-4a86-4ccf-b1af-be7858601e98" providerId="ADAL" clId="{AF192224-BF7A-47DA-84FC-CD48B002FA0D}" dt="2026-10-29T13:40:51.935" v="9" actId="478"/>
           <ac:spMkLst>
             <pc:docMk/>
             <pc:sldMk cId="0" sldId="256"/>
@@ -225,7 +228,7 @@
           </ac:spMkLst>
         </pc:spChg>
         <pc:spChg chg="del">
-          <ac:chgData name="Muhammad Baig" userId="9e391c9c-4a86-4ccf-b1af-be7858601e98" providerId="ADAL" clId="{AF192224-BF7A-47DA-84FC-CD48B002FA0D}" dt="2026-10-29T13:28:45.458" v="12" actId="478"/>
+          <ac:chgData name="Muhammad Baig" userId="9e391c9c-4a86-4ccf-b1af-be7858601e98" providerId="ADAL" clId="{AF192224-BF7A-47DA-84FC-CD48B002FA0D}" dt="2026-10-29T13:40:57.416" v="12" actId="478"/>
           <ac:spMkLst>
             <pc:docMk/>
             <pc:sldMk cId="0" sldId="256"/>
@@ -233,7 +236,7 @@
           </ac:spMkLst>
         </pc:spChg>
         <pc:spChg chg="del">
-          <ac:chgData name="Muhammad Baig" userId="9e391c9c-4a86-4ccf-b1af-be7858601e98" providerId="ADAL" clId="{AF192224-BF7A-47DA-84FC-CD48B002FA0D}" dt="2026-10-29T13:28:43.542" v="11" actId="478"/>
+          <ac:chgData name="Muhammad Baig" userId="9e391c9c-4a86-4ccf-b1af-be7858601e98" providerId="ADAL" clId="{AF192224-BF7A-47DA-84FC-CD48B002FA0D}" dt="2026-10-29T13:40:55.339" v="11" actId="478"/>
           <ac:spMkLst>
             <pc:docMk/>
             <pc:sldMk cId="0" sldId="256"/>
@@ -241,100 +244,108 @@
           </ac:spMkLst>
         </pc:spChg>
         <pc:spChg chg="mod">
-          <ac:chgData name="Muhammad Baig" userId="9e391c9c-4a86-4ccf-b1af-be7858601e98" providerId="ADAL" clId="{AF192224-BF7A-47DA-84FC-CD48B002FA0D}" dt="2026-10-29T13:32:46.115" v="156" actId="20577"/>
+          <ac:chgData name="Muhammad Baig" userId="9e391c9c-4a86-4ccf-b1af-be7858601e98" providerId="ADAL" clId="{AF192224-BF7A-47DA-84FC-CD48B002FA0D}" dt="2026-10-30T04:32:23.188" v="232" actId="20577"/>
+          <ac:spMkLst>
+            <pc:docMk/>
+            <pc:sldMk cId="0" sldId="256"/>
+            <ac:spMk id="7" creationId="{00000000-0000-0000-0000-000000000000}"/>
+          </ac:spMkLst>
+        </pc:spChg>
+        <pc:spChg chg="mod">
+          <ac:chgData name="Muhammad Baig" userId="9e391c9c-4a86-4ccf-b1af-be7858601e98" providerId="ADAL" clId="{AF192224-BF7A-47DA-84FC-CD48B002FA0D}" dt="2026-10-29T13:41:19.140" v="50" actId="20577"/>
           <ac:spMkLst>
             <pc:docMk/>
             <pc:sldMk cId="0" sldId="256"/>
             <ac:spMk id="12" creationId="{00000000-0000-0000-0000-000000000000}"/>
           </ac:spMkLst>
         </pc:spChg>
-        <pc:spChg chg="add mod ord">
-          <ac:chgData name="Muhammad Baig" userId="9e391c9c-4a86-4ccf-b1af-be7858601e98" providerId="ADAL" clId="{AF192224-BF7A-47DA-84FC-CD48B002FA0D}" dt="2026-10-29T13:41:34.703" v="196" actId="1035"/>
+        <pc:spChg chg="add">
+          <ac:chgData name="Muhammad Baig" userId="9e391c9c-4a86-4ccf-b1af-be7858601e98" providerId="ADAL" clId="{AF192224-BF7A-47DA-84FC-CD48B002FA0D}" dt="2026-10-29T13:40:48.152" v="8" actId="22"/>
           <ac:spMkLst>
             <pc:docMk/>
             <pc:sldMk cId="0" sldId="256"/>
-            <ac:spMk id="17" creationId="{333BEC9B-6A31-EA8A-051D-C032C5B804B7}"/>
+            <ac:spMk id="16" creationId="{CF8A7000-D50C-DD71-22BD-187EE8FAB1E3}"/>
           </ac:spMkLst>
         </pc:spChg>
-        <pc:picChg chg="add mod">
-          <ac:chgData name="Muhammad Baig" userId="9e391c9c-4a86-4ccf-b1af-be7858601e98" providerId="ADAL" clId="{AF192224-BF7A-47DA-84FC-CD48B002FA0D}" dt="2026-10-29T13:41:34.703" v="196" actId="1035"/>
+        <pc:picChg chg="add">
+          <ac:chgData name="Muhammad Baig" userId="9e391c9c-4a86-4ccf-b1af-be7858601e98" providerId="ADAL" clId="{AF192224-BF7A-47DA-84FC-CD48B002FA0D}" dt="2026-10-29T13:40:48.152" v="8" actId="22"/>
           <ac:picMkLst>
             <pc:docMk/>
             <pc:sldMk cId="0" sldId="256"/>
-            <ac:picMk id="14" creationId="{86917E86-0BF3-AD16-A6C7-301C9611AE56}"/>
+            <ac:picMk id="14" creationId="{2D9F7546-AB5A-E088-94E8-350926585F49}"/>
           </ac:picMkLst>
         </pc:picChg>
-        <pc:picChg chg="add mod">
-          <ac:chgData name="Muhammad Baig" userId="9e391c9c-4a86-4ccf-b1af-be7858601e98" providerId="ADAL" clId="{AF192224-BF7A-47DA-84FC-CD48B002FA0D}" dt="2026-10-29T13:41:34.703" v="196" actId="1035"/>
+        <pc:picChg chg="add">
+          <ac:chgData name="Muhammad Baig" userId="9e391c9c-4a86-4ccf-b1af-be7858601e98" providerId="ADAL" clId="{AF192224-BF7A-47DA-84FC-CD48B002FA0D}" dt="2026-10-29T13:40:48.152" v="8" actId="22"/>
           <ac:picMkLst>
             <pc:docMk/>
             <pc:sldMk cId="0" sldId="256"/>
-            <ac:picMk id="16" creationId="{5C73AF20-D7B0-D30B-72A2-AE2E980CC268}"/>
+            <ac:picMk id="18" creationId="{68251667-0112-B6D1-17CF-8C1FAF2756A7}"/>
           </ac:picMkLst>
         </pc:picChg>
       </pc:sldChg>
-      <pc:sldChg chg="addSp delSp modSp mod">
-        <pc:chgData name="Muhammad Baig" userId="9e391c9c-4a86-4ccf-b1af-be7858601e98" providerId="ADAL" clId="{AF192224-BF7A-47DA-84FC-CD48B002FA0D}" dt="2026-10-29T13:37:01.925" v="192"/>
+      <pc:sldChg chg="addSp delSp modSp mod chgLayout">
+        <pc:chgData name="Muhammad Baig" userId="9e391c9c-4a86-4ccf-b1af-be7858601e98" providerId="ADAL" clId="{AF192224-BF7A-47DA-84FC-CD48B002FA0D}" dt="2026-10-29T13:40:31.423" v="7" actId="700"/>
         <pc:sldMkLst>
           <pc:docMk/>
           <pc:sldMk cId="0" sldId="257"/>
         </pc:sldMkLst>
-        <pc:spChg chg="add del mod">
-          <ac:chgData name="Muhammad Baig" userId="9e391c9c-4a86-4ccf-b1af-be7858601e98" providerId="ADAL" clId="{AF192224-BF7A-47DA-84FC-CD48B002FA0D}" dt="2026-10-29T13:36:59.994" v="186"/>
+        <pc:spChg chg="mod ord">
+          <ac:chgData name="Muhammad Baig" userId="9e391c9c-4a86-4ccf-b1af-be7858601e98" providerId="ADAL" clId="{AF192224-BF7A-47DA-84FC-CD48B002FA0D}" dt="2026-10-29T13:40:31.423" v="7" actId="700"/>
           <ac:spMkLst>
             <pc:docMk/>
             <pc:sldMk cId="0" sldId="257"/>
-            <ac:spMk id="22" creationId="{26E1BDBA-72E1-2F10-144D-9D95F9195095}"/>
+            <ac:spMk id="2" creationId="{00000000-0000-0000-0000-000000000000}"/>
           </ac:spMkLst>
         </pc:spChg>
         <pc:spChg chg="add del mod">
-          <ac:chgData name="Muhammad Baig" userId="9e391c9c-4a86-4ccf-b1af-be7858601e98" providerId="ADAL" clId="{AF192224-BF7A-47DA-84FC-CD48B002FA0D}" dt="2026-10-29T13:37:00.728" v="189"/>
+          <ac:chgData name="Muhammad Baig" userId="9e391c9c-4a86-4ccf-b1af-be7858601e98" providerId="ADAL" clId="{AF192224-BF7A-47DA-84FC-CD48B002FA0D}" dt="2026-10-29T13:40:10.114" v="2"/>
           <ac:spMkLst>
             <pc:docMk/>
             <pc:sldMk cId="0" sldId="257"/>
-            <ac:spMk id="23" creationId="{6F0B1CED-5C1C-7E5C-9C8C-0F49DDE0F53F}"/>
+            <ac:spMk id="22" creationId="{896026D0-ACB1-0B77-EBDD-46C3F0510F0D}"/>
           </ac:spMkLst>
         </pc:spChg>
         <pc:spChg chg="add del mod">
-          <ac:chgData name="Muhammad Baig" userId="9e391c9c-4a86-4ccf-b1af-be7858601e98" providerId="ADAL" clId="{AF192224-BF7A-47DA-84FC-CD48B002FA0D}" dt="2026-10-29T13:37:01.925" v="192"/>
+          <ac:chgData name="Muhammad Baig" userId="9e391c9c-4a86-4ccf-b1af-be7858601e98" providerId="ADAL" clId="{AF192224-BF7A-47DA-84FC-CD48B002FA0D}" dt="2026-10-29T13:40:11.628" v="5"/>
           <ac:spMkLst>
             <pc:docMk/>
             <pc:sldMk cId="0" sldId="257"/>
-            <ac:spMk id="24" creationId="{CDC44D51-1BAB-B33C-7189-76BDBAD9A6D5}"/>
+            <ac:spMk id="23" creationId="{22ACB6F5-602A-C267-15B0-E9B7A4829DA3}"/>
+          </ac:spMkLst>
+        </pc:spChg>
+        <pc:spChg chg="mod ord">
+          <ac:chgData name="Muhammad Baig" userId="9e391c9c-4a86-4ccf-b1af-be7858601e98" providerId="ADAL" clId="{AF192224-BF7A-47DA-84FC-CD48B002FA0D}" dt="2026-10-29T13:40:31.423" v="7" actId="700"/>
+          <ac:spMkLst>
+            <pc:docMk/>
+            <pc:sldMk cId="0" sldId="257"/>
+            <ac:spMk id="25" creationId="{00000000-0000-0000-0000-000000000000}"/>
           </ac:spMkLst>
         </pc:spChg>
       </pc:sldChg>
-      <pc:sldChg chg="addSp delSp modSp mod">
-        <pc:chgData name="Muhammad Baig" userId="9e391c9c-4a86-4ccf-b1af-be7858601e98" providerId="ADAL" clId="{AF192224-BF7A-47DA-84FC-CD48B002FA0D}" dt="2026-10-29T13:36:53.358" v="183"/>
+      <pc:sldChg chg="addSp delSp modSp mod ord">
+        <pc:chgData name="Muhammad Baig" userId="9e391c9c-4a86-4ccf-b1af-be7858601e98" providerId="ADAL" clId="{AF192224-BF7A-47DA-84FC-CD48B002FA0D}" dt="2026-10-30T04:00:04.276" v="214"/>
         <pc:sldMkLst>
           <pc:docMk/>
           <pc:sldMk cId="0" sldId="258"/>
         </pc:sldMkLst>
         <pc:spChg chg="add del mod">
-          <ac:chgData name="Muhammad Baig" userId="9e391c9c-4a86-4ccf-b1af-be7858601e98" providerId="ADAL" clId="{AF192224-BF7A-47DA-84FC-CD48B002FA0D}" dt="2026-10-29T13:36:51.887" v="180"/>
+          <ac:chgData name="Muhammad Baig" userId="9e391c9c-4a86-4ccf-b1af-be7858601e98" providerId="ADAL" clId="{AF192224-BF7A-47DA-84FC-CD48B002FA0D}" dt="2026-10-30T03:16:37.615" v="210"/>
           <ac:spMkLst>
             <pc:docMk/>
             <pc:sldMk cId="0" sldId="258"/>
-            <ac:spMk id="24" creationId="{C4880531-36AF-A989-CEB2-189E33444E9C}"/>
-          </ac:spMkLst>
-        </pc:spChg>
-        <pc:spChg chg="add del mod">
-          <ac:chgData name="Muhammad Baig" userId="9e391c9c-4a86-4ccf-b1af-be7858601e98" providerId="ADAL" clId="{AF192224-BF7A-47DA-84FC-CD48B002FA0D}" dt="2026-10-29T13:36:53.358" v="183"/>
-          <ac:spMkLst>
-            <pc:docMk/>
-            <pc:sldMk cId="0" sldId="258"/>
-            <ac:spMk id="26" creationId="{CBE18A23-3C01-EFCB-47DF-6EBB79C0053B}"/>
+            <ac:spMk id="24" creationId="{03AE2988-96E4-C5D8-24AE-43E33989241C}"/>
           </ac:spMkLst>
         </pc:spChg>
       </pc:sldChg>
-      <pc:sldChg chg="addSp delSp modSp mod">
-        <pc:chgData name="Muhammad Baig" userId="9e391c9c-4a86-4ccf-b1af-be7858601e98" providerId="ADAL" clId="{AF192224-BF7A-47DA-84FC-CD48B002FA0D}" dt="2026-10-29T13:42:26.891" v="197" actId="1035"/>
+      <pc:sldChg chg="addSp delSp modSp mod ord">
+        <pc:chgData name="Muhammad Baig" userId="9e391c9c-4a86-4ccf-b1af-be7858601e98" providerId="ADAL" clId="{AF192224-BF7A-47DA-84FC-CD48B002FA0D}" dt="2026-10-30T03:59:59.710" v="212"/>
         <pc:sldMkLst>
           <pc:docMk/>
           <pc:sldMk cId="0" sldId="259"/>
         </pc:sldMkLst>
         <pc:spChg chg="del">
-          <ac:chgData name="Muhammad Baig" userId="9e391c9c-4a86-4ccf-b1af-be7858601e98" providerId="ADAL" clId="{AF192224-BF7A-47DA-84FC-CD48B002FA0D}" dt="2026-10-29T13:33:20.790" v="158" actId="478"/>
+          <ac:chgData name="Muhammad Baig" userId="9e391c9c-4a86-4ccf-b1af-be7858601e98" providerId="ADAL" clId="{AF192224-BF7A-47DA-84FC-CD48B002FA0D}" dt="2026-10-29T13:41:45.773" v="53" actId="478"/>
           <ac:spMkLst>
             <pc:docMk/>
             <pc:sldMk cId="0" sldId="259"/>
@@ -342,34 +353,505 @@
           </ac:spMkLst>
         </pc:spChg>
         <pc:spChg chg="del">
-          <ac:chgData name="Muhammad Baig" userId="9e391c9c-4a86-4ccf-b1af-be7858601e98" providerId="ADAL" clId="{AF192224-BF7A-47DA-84FC-CD48B002FA0D}" dt="2026-10-29T13:33:16.593" v="157" actId="478"/>
+          <ac:chgData name="Muhammad Baig" userId="9e391c9c-4a86-4ccf-b1af-be7858601e98" providerId="ADAL" clId="{AF192224-BF7A-47DA-84FC-CD48B002FA0D}" dt="2026-10-29T13:41:44.448" v="52" actId="478"/>
           <ac:spMkLst>
             <pc:docMk/>
             <pc:sldMk cId="0" sldId="259"/>
             <ac:spMk id="6" creationId="{00000000-0000-0000-0000-000000000000}"/>
           </ac:spMkLst>
         </pc:spChg>
-        <pc:picChg chg="add mod">
-          <ac:chgData name="Muhammad Baig" userId="9e391c9c-4a86-4ccf-b1af-be7858601e98" providerId="ADAL" clId="{AF192224-BF7A-47DA-84FC-CD48B002FA0D}" dt="2026-10-29T13:42:26.891" v="197" actId="1035"/>
+        <pc:spChg chg="mod">
+          <ac:chgData name="Muhammad Baig" userId="9e391c9c-4a86-4ccf-b1af-be7858601e98" providerId="ADAL" clId="{AF192224-BF7A-47DA-84FC-CD48B002FA0D}" dt="2026-10-29T14:21:57.478" v="89"/>
+          <ac:spMkLst>
+            <pc:docMk/>
+            <pc:sldMk cId="0" sldId="259"/>
+            <ac:spMk id="9" creationId="{00000000-0000-0000-0000-000000000000}"/>
+          </ac:spMkLst>
+        </pc:spChg>
+        <pc:spChg chg="mod">
+          <ac:chgData name="Muhammad Baig" userId="9e391c9c-4a86-4ccf-b1af-be7858601e98" providerId="ADAL" clId="{AF192224-BF7A-47DA-84FC-CD48B002FA0D}" dt="2026-10-29T14:23:33.963" v="101" actId="20577"/>
+          <ac:spMkLst>
+            <pc:docMk/>
+            <pc:sldMk cId="0" sldId="259"/>
+            <ac:spMk id="20" creationId="{00000000-0000-0000-0000-000000000000}"/>
+          </ac:spMkLst>
+        </pc:spChg>
+        <pc:picChg chg="add">
+          <ac:chgData name="Muhammad Baig" userId="9e391c9c-4a86-4ccf-b1af-be7858601e98" providerId="ADAL" clId="{AF192224-BF7A-47DA-84FC-CD48B002FA0D}" dt="2026-10-29T13:41:42.254" v="51" actId="22"/>
           <ac:picMkLst>
             <pc:docMk/>
             <pc:sldMk cId="0" sldId="259"/>
-            <ac:picMk id="26" creationId="{7C46508A-7C20-87C5-E252-AA4FBE1E5F49}"/>
+            <ac:picMk id="26" creationId="{CD0AAE67-1E16-70BA-D6D2-2FC2FC25F47D}"/>
           </ac:picMkLst>
         </pc:picChg>
       </pc:sldChg>
       <pc:sldChg chg="modSp mod">
-        <pc:chgData name="Muhammad Baig" userId="9e391c9c-4a86-4ccf-b1af-be7858601e98" providerId="ADAL" clId="{AF192224-BF7A-47DA-84FC-CD48B002FA0D}" dt="2026-10-29T13:36:17.917" v="177" actId="20577"/>
+        <pc:chgData name="Muhammad Baig" userId="9e391c9c-4a86-4ccf-b1af-be7858601e98" providerId="ADAL" clId="{AF192224-BF7A-47DA-84FC-CD48B002FA0D}" dt="2026-10-29T14:23:42.981" v="112" actId="20577"/>
         <pc:sldMkLst>
           <pc:docMk/>
           <pc:sldMk cId="0" sldId="260"/>
         </pc:sldMkLst>
         <pc:spChg chg="mod">
-          <ac:chgData name="Muhammad Baig" userId="9e391c9c-4a86-4ccf-b1af-be7858601e98" providerId="ADAL" clId="{AF192224-BF7A-47DA-84FC-CD48B002FA0D}" dt="2026-10-29T13:36:17.917" v="177" actId="20577"/>
+          <ac:chgData name="Muhammad Baig" userId="9e391c9c-4a86-4ccf-b1af-be7858601e98" providerId="ADAL" clId="{AF192224-BF7A-47DA-84FC-CD48B002FA0D}" dt="2026-10-29T14:23:42.981" v="112" actId="20577"/>
           <ac:spMkLst>
             <pc:docMk/>
             <pc:sldMk cId="0" sldId="260"/>
             <ac:spMk id="2" creationId="{00000000-0000-0000-0000-000000000000}"/>
+          </ac:spMkLst>
+        </pc:spChg>
+      </pc:sldChg>
+      <pc:sldChg chg="delSp mod">
+        <pc:chgData name="Muhammad Baig" userId="9e391c9c-4a86-4ccf-b1af-be7858601e98" providerId="ADAL" clId="{AF192224-BF7A-47DA-84FC-CD48B002FA0D}" dt="2026-10-30T03:13:34.562" v="201" actId="478"/>
+        <pc:sldMkLst>
+          <pc:docMk/>
+          <pc:sldMk cId="0" sldId="262"/>
+        </pc:sldMkLst>
+        <pc:spChg chg="del">
+          <ac:chgData name="Muhammad Baig" userId="9e391c9c-4a86-4ccf-b1af-be7858601e98" providerId="ADAL" clId="{AF192224-BF7A-47DA-84FC-CD48B002FA0D}" dt="2026-10-30T03:13:34.562" v="201" actId="478"/>
+          <ac:spMkLst>
+            <pc:docMk/>
+            <pc:sldMk cId="0" sldId="262"/>
+            <ac:spMk id="36" creationId="{00000000-0000-0000-0000-000000000000}"/>
+          </ac:spMkLst>
+        </pc:spChg>
+      </pc:sldChg>
+      <pc:sldChg chg="addSp delSp modSp mod">
+        <pc:chgData name="Muhammad Baig" userId="9e391c9c-4a86-4ccf-b1af-be7858601e98" providerId="ADAL" clId="{AF192224-BF7A-47DA-84FC-CD48B002FA0D}" dt="2026-10-30T04:30:36.480" v="217" actId="1036"/>
+        <pc:sldMkLst>
+          <pc:docMk/>
+          <pc:sldMk cId="0" sldId="264"/>
+        </pc:sldMkLst>
+        <pc:spChg chg="mod">
+          <ac:chgData name="Muhammad Baig" userId="9e391c9c-4a86-4ccf-b1af-be7858601e98" providerId="ADAL" clId="{AF192224-BF7A-47DA-84FC-CD48B002FA0D}" dt="2026-10-30T04:30:36.480" v="217" actId="1036"/>
+          <ac:spMkLst>
+            <pc:docMk/>
+            <pc:sldMk cId="0" sldId="264"/>
+            <ac:spMk id="6" creationId="{00000000-0000-0000-0000-000000000000}"/>
+          </ac:spMkLst>
+        </pc:spChg>
+        <pc:spChg chg="mod">
+          <ac:chgData name="Muhammad Baig" userId="9e391c9c-4a86-4ccf-b1af-be7858601e98" providerId="ADAL" clId="{AF192224-BF7A-47DA-84FC-CD48B002FA0D}" dt="2026-10-29T19:11:28.896" v="195"/>
+          <ac:spMkLst>
+            <pc:docMk/>
+            <pc:sldMk cId="0" sldId="264"/>
+            <ac:spMk id="8" creationId="{00000000-0000-0000-0000-000000000000}"/>
+          </ac:spMkLst>
+        </pc:spChg>
+        <pc:spChg chg="del">
+          <ac:chgData name="Muhammad Baig" userId="9e391c9c-4a86-4ccf-b1af-be7858601e98" providerId="ADAL" clId="{AF192224-BF7A-47DA-84FC-CD48B002FA0D}" dt="2026-10-30T03:13:46.444" v="203" actId="478"/>
+          <ac:spMkLst>
+            <pc:docMk/>
+            <pc:sldMk cId="0" sldId="264"/>
+            <ac:spMk id="9" creationId="{00000000-0000-0000-0000-000000000000}"/>
+          </ac:spMkLst>
+        </pc:spChg>
+        <pc:spChg chg="del">
+          <ac:chgData name="Muhammad Baig" userId="9e391c9c-4a86-4ccf-b1af-be7858601e98" providerId="ADAL" clId="{AF192224-BF7A-47DA-84FC-CD48B002FA0D}" dt="2026-10-30T03:13:44.035" v="202" actId="478"/>
+          <ac:spMkLst>
+            <pc:docMk/>
+            <pc:sldMk cId="0" sldId="264"/>
+            <ac:spMk id="10" creationId="{00000000-0000-0000-0000-000000000000}"/>
+          </ac:spMkLst>
+        </pc:spChg>
+        <pc:graphicFrameChg chg="del">
+          <ac:chgData name="Muhammad Baig" userId="9e391c9c-4a86-4ccf-b1af-be7858601e98" providerId="ADAL" clId="{AF192224-BF7A-47DA-84FC-CD48B002FA0D}" dt="2026-10-29T19:11:15.335" v="193" actId="478"/>
+          <ac:graphicFrameMkLst>
+            <pc:docMk/>
+            <pc:sldMk cId="0" sldId="264"/>
+            <ac:graphicFrameMk id="4" creationId="{00000000-0000-0000-0000-000000000000}"/>
+          </ac:graphicFrameMkLst>
+        </pc:graphicFrameChg>
+        <pc:graphicFrameChg chg="add">
+          <ac:chgData name="Muhammad Baig" userId="9e391c9c-4a86-4ccf-b1af-be7858601e98" providerId="ADAL" clId="{AF192224-BF7A-47DA-84FC-CD48B002FA0D}" dt="2026-10-29T19:11:16.425" v="194" actId="22"/>
+          <ac:graphicFrameMkLst>
+            <pc:docMk/>
+            <pc:sldMk cId="0" sldId="264"/>
+            <ac:graphicFrameMk id="12" creationId="{DC4F2FBC-E37C-89B6-3D2D-719AC2DAE771}"/>
+          </ac:graphicFrameMkLst>
+        </pc:graphicFrameChg>
+      </pc:sldChg>
+      <pc:sldChg chg="addSp delSp modSp mod">
+        <pc:chgData name="Muhammad Baig" userId="9e391c9c-4a86-4ccf-b1af-be7858601e98" providerId="ADAL" clId="{AF192224-BF7A-47DA-84FC-CD48B002FA0D}" dt="2026-10-30T04:29:11.765" v="215" actId="478"/>
+        <pc:sldMkLst>
+          <pc:docMk/>
+          <pc:sldMk cId="0" sldId="265"/>
+        </pc:sldMkLst>
+        <pc:spChg chg="del">
+          <ac:chgData name="Muhammad Baig" userId="9e391c9c-4a86-4ccf-b1af-be7858601e98" providerId="ADAL" clId="{AF192224-BF7A-47DA-84FC-CD48B002FA0D}" dt="2026-10-29T19:11:49.338" v="200" actId="478"/>
+          <ac:spMkLst>
+            <pc:docMk/>
+            <pc:sldMk cId="0" sldId="265"/>
+            <ac:spMk id="8" creationId="{00000000-0000-0000-0000-000000000000}"/>
+          </ac:spMkLst>
+        </pc:spChg>
+        <pc:spChg chg="del mod">
+          <ac:chgData name="Muhammad Baig" userId="9e391c9c-4a86-4ccf-b1af-be7858601e98" providerId="ADAL" clId="{AF192224-BF7A-47DA-84FC-CD48B002FA0D}" dt="2026-10-29T19:11:47.884" v="199" actId="478"/>
+          <ac:spMkLst>
+            <pc:docMk/>
+            <pc:sldMk cId="0" sldId="265"/>
+            <ac:spMk id="9" creationId="{00000000-0000-0000-0000-000000000000}"/>
+          </ac:spMkLst>
+        </pc:spChg>
+        <pc:spChg chg="del">
+          <ac:chgData name="Muhammad Baig" userId="9e391c9c-4a86-4ccf-b1af-be7858601e98" providerId="ADAL" clId="{AF192224-BF7A-47DA-84FC-CD48B002FA0D}" dt="2026-10-30T04:29:11.765" v="215" actId="478"/>
+          <ac:spMkLst>
+            <pc:docMk/>
+            <pc:sldMk cId="0" sldId="265"/>
+            <ac:spMk id="10" creationId="{00000000-0000-0000-0000-000000000000}"/>
+          </ac:spMkLst>
+        </pc:spChg>
+        <pc:graphicFrameChg chg="del">
+          <ac:chgData name="Muhammad Baig" userId="9e391c9c-4a86-4ccf-b1af-be7858601e98" providerId="ADAL" clId="{AF192224-BF7A-47DA-84FC-CD48B002FA0D}" dt="2026-10-29T19:11:43.497" v="196" actId="478"/>
+          <ac:graphicFrameMkLst>
+            <pc:docMk/>
+            <pc:sldMk cId="0" sldId="265"/>
+            <ac:graphicFrameMk id="4" creationId="{00000000-0000-0000-0000-000000000000}"/>
+          </ac:graphicFrameMkLst>
+        </pc:graphicFrameChg>
+        <pc:graphicFrameChg chg="add">
+          <ac:chgData name="Muhammad Baig" userId="9e391c9c-4a86-4ccf-b1af-be7858601e98" providerId="ADAL" clId="{AF192224-BF7A-47DA-84FC-CD48B002FA0D}" dt="2026-10-29T19:11:44.374" v="197" actId="22"/>
+          <ac:graphicFrameMkLst>
+            <pc:docMk/>
+            <pc:sldMk cId="0" sldId="265"/>
+            <ac:graphicFrameMk id="12" creationId="{6510A8D3-21B1-DC6C-4F48-6D43F8FF6503}"/>
+          </ac:graphicFrameMkLst>
+        </pc:graphicFrameChg>
+      </pc:sldChg>
+      <pc:sldChg chg="delSp modSp mod">
+        <pc:chgData name="Muhammad Baig" userId="9e391c9c-4a86-4ccf-b1af-be7858601e98" providerId="ADAL" clId="{AF192224-BF7A-47DA-84FC-CD48B002FA0D}" dt="2026-10-29T14:33:45.049" v="144" actId="478"/>
+        <pc:sldMkLst>
+          <pc:docMk/>
+          <pc:sldMk cId="0" sldId="268"/>
+        </pc:sldMkLst>
+        <pc:spChg chg="mod">
+          <ac:chgData name="Muhammad Baig" userId="9e391c9c-4a86-4ccf-b1af-be7858601e98" providerId="ADAL" clId="{AF192224-BF7A-47DA-84FC-CD48B002FA0D}" dt="2026-10-29T14:33:28.965" v="137"/>
+          <ac:spMkLst>
+            <pc:docMk/>
+            <pc:sldMk cId="0" sldId="268"/>
+            <ac:spMk id="15" creationId="{00000000-0000-0000-0000-000000000000}"/>
+          </ac:spMkLst>
+        </pc:spChg>
+        <pc:spChg chg="mod">
+          <ac:chgData name="Muhammad Baig" userId="9e391c9c-4a86-4ccf-b1af-be7858601e98" providerId="ADAL" clId="{AF192224-BF7A-47DA-84FC-CD48B002FA0D}" dt="2026-10-29T14:33:42.198" v="142"/>
+          <ac:spMkLst>
+            <pc:docMk/>
+            <pc:sldMk cId="0" sldId="268"/>
+            <ac:spMk id="17" creationId="{00000000-0000-0000-0000-000000000000}"/>
+          </ac:spMkLst>
+        </pc:spChg>
+        <pc:spChg chg="del">
+          <ac:chgData name="Muhammad Baig" userId="9e391c9c-4a86-4ccf-b1af-be7858601e98" providerId="ADAL" clId="{AF192224-BF7A-47DA-84FC-CD48B002FA0D}" dt="2026-10-29T14:33:45.049" v="144" actId="478"/>
+          <ac:spMkLst>
+            <pc:docMk/>
+            <pc:sldMk cId="0" sldId="268"/>
+            <ac:spMk id="18" creationId="{00000000-0000-0000-0000-000000000000}"/>
+          </ac:spMkLst>
+        </pc:spChg>
+        <pc:spChg chg="del mod">
+          <ac:chgData name="Muhammad Baig" userId="9e391c9c-4a86-4ccf-b1af-be7858601e98" providerId="ADAL" clId="{AF192224-BF7A-47DA-84FC-CD48B002FA0D}" dt="2026-10-29T14:33:44.091" v="143" actId="478"/>
+          <ac:spMkLst>
+            <pc:docMk/>
+            <pc:sldMk cId="0" sldId="268"/>
+            <ac:spMk id="19" creationId="{00000000-0000-0000-0000-000000000000}"/>
+          </ac:spMkLst>
+        </pc:spChg>
+        <pc:spChg chg="del">
+          <ac:chgData name="Muhammad Baig" userId="9e391c9c-4a86-4ccf-b1af-be7858601e98" providerId="ADAL" clId="{AF192224-BF7A-47DA-84FC-CD48B002FA0D}" dt="2026-10-29T14:33:31.383" v="138" actId="478"/>
+          <ac:spMkLst>
+            <pc:docMk/>
+            <pc:sldMk cId="0" sldId="268"/>
+            <ac:spMk id="20" creationId="{00000000-0000-0000-0000-000000000000}"/>
+          </ac:spMkLst>
+        </pc:spChg>
+        <pc:spChg chg="del mod">
+          <ac:chgData name="Muhammad Baig" userId="9e391c9c-4a86-4ccf-b1af-be7858601e98" providerId="ADAL" clId="{AF192224-BF7A-47DA-84FC-CD48B002FA0D}" dt="2026-10-29T14:33:32.253" v="139" actId="478"/>
+          <ac:spMkLst>
+            <pc:docMk/>
+            <pc:sldMk cId="0" sldId="268"/>
+            <ac:spMk id="21" creationId="{00000000-0000-0000-0000-000000000000}"/>
+          </ac:spMkLst>
+        </pc:spChg>
+        <pc:spChg chg="del">
+          <ac:chgData name="Muhammad Baig" userId="9e391c9c-4a86-4ccf-b1af-be7858601e98" providerId="ADAL" clId="{AF192224-BF7A-47DA-84FC-CD48B002FA0D}" dt="2026-10-29T14:33:22.405" v="134" actId="478"/>
+          <ac:spMkLst>
+            <pc:docMk/>
+            <pc:sldMk cId="0" sldId="268"/>
+            <ac:spMk id="22" creationId="{00000000-0000-0000-0000-000000000000}"/>
+          </ac:spMkLst>
+        </pc:spChg>
+        <pc:spChg chg="del">
+          <ac:chgData name="Muhammad Baig" userId="9e391c9c-4a86-4ccf-b1af-be7858601e98" providerId="ADAL" clId="{AF192224-BF7A-47DA-84FC-CD48B002FA0D}" dt="2026-10-29T14:33:24.624" v="135" actId="478"/>
+          <ac:spMkLst>
+            <pc:docMk/>
+            <pc:sldMk cId="0" sldId="268"/>
+            <ac:spMk id="23" creationId="{00000000-0000-0000-0000-000000000000}"/>
+          </ac:spMkLst>
+        </pc:spChg>
+      </pc:sldChg>
+      <pc:sldChg chg="addSp delSp modSp mod">
+        <pc:chgData name="Muhammad Baig" userId="9e391c9c-4a86-4ccf-b1af-be7858601e98" providerId="ADAL" clId="{AF192224-BF7A-47DA-84FC-CD48B002FA0D}" dt="2026-10-29T13:42:39.131" v="88" actId="22"/>
+        <pc:sldMkLst>
+          <pc:docMk/>
+          <pc:sldMk cId="0" sldId="269"/>
+        </pc:sldMkLst>
+        <pc:spChg chg="del">
+          <ac:chgData name="Muhammad Baig" userId="9e391c9c-4a86-4ccf-b1af-be7858601e98" providerId="ADAL" clId="{AF192224-BF7A-47DA-84FC-CD48B002FA0D}" dt="2026-10-29T13:42:13.011" v="55" actId="478"/>
+          <ac:spMkLst>
+            <pc:docMk/>
+            <pc:sldMk cId="0" sldId="269"/>
+            <ac:spMk id="2" creationId="{00000000-0000-0000-0000-000000000000}"/>
+          </ac:spMkLst>
+        </pc:spChg>
+        <pc:spChg chg="del">
+          <ac:chgData name="Muhammad Baig" userId="9e391c9c-4a86-4ccf-b1af-be7858601e98" providerId="ADAL" clId="{AF192224-BF7A-47DA-84FC-CD48B002FA0D}" dt="2026-10-29T13:42:12.121" v="54" actId="478"/>
+          <ac:spMkLst>
+            <pc:docMk/>
+            <pc:sldMk cId="0" sldId="269"/>
+            <ac:spMk id="3" creationId="{00000000-0000-0000-0000-000000000000}"/>
+          </ac:spMkLst>
+        </pc:spChg>
+        <pc:spChg chg="del">
+          <ac:chgData name="Muhammad Baig" userId="9e391c9c-4a86-4ccf-b1af-be7858601e98" providerId="ADAL" clId="{AF192224-BF7A-47DA-84FC-CD48B002FA0D}" dt="2026-10-29T13:42:16.672" v="57" actId="478"/>
+          <ac:spMkLst>
+            <pc:docMk/>
+            <pc:sldMk cId="0" sldId="269"/>
+            <ac:spMk id="4" creationId="{00000000-0000-0000-0000-000000000000}"/>
+          </ac:spMkLst>
+        </pc:spChg>
+        <pc:spChg chg="del">
+          <ac:chgData name="Muhammad Baig" userId="9e391c9c-4a86-4ccf-b1af-be7858601e98" providerId="ADAL" clId="{AF192224-BF7A-47DA-84FC-CD48B002FA0D}" dt="2026-10-29T13:42:15.992" v="56" actId="478"/>
+          <ac:spMkLst>
+            <pc:docMk/>
+            <pc:sldMk cId="0" sldId="269"/>
+            <ac:spMk id="5" creationId="{00000000-0000-0000-0000-000000000000}"/>
+          </ac:spMkLst>
+        </pc:spChg>
+        <pc:spChg chg="add">
+          <ac:chgData name="Muhammad Baig" userId="9e391c9c-4a86-4ccf-b1af-be7858601e98" providerId="ADAL" clId="{AF192224-BF7A-47DA-84FC-CD48B002FA0D}" dt="2026-10-29T13:42:39.131" v="88" actId="22"/>
+          <ac:spMkLst>
+            <pc:docMk/>
+            <pc:sldMk cId="0" sldId="269"/>
+            <ac:spMk id="14" creationId="{85B3ADAD-EBED-23CA-F756-44DF9FDF7B3D}"/>
+          </ac:spMkLst>
+        </pc:spChg>
+        <pc:picChg chg="add del mod">
+          <ac:chgData name="Muhammad Baig" userId="9e391c9c-4a86-4ccf-b1af-be7858601e98" providerId="ADAL" clId="{AF192224-BF7A-47DA-84FC-CD48B002FA0D}" dt="2026-10-29T13:42:22.398" v="87" actId="478"/>
+          <ac:picMkLst>
+            <pc:docMk/>
+            <pc:sldMk cId="0" sldId="269"/>
+            <ac:picMk id="10" creationId="{05953BDD-3BDF-839C-ECE2-B60A4AEC5030}"/>
+          </ac:picMkLst>
+        </pc:picChg>
+        <pc:picChg chg="add">
+          <ac:chgData name="Muhammad Baig" userId="9e391c9c-4a86-4ccf-b1af-be7858601e98" providerId="ADAL" clId="{AF192224-BF7A-47DA-84FC-CD48B002FA0D}" dt="2026-10-29T13:42:39.131" v="88" actId="22"/>
+          <ac:picMkLst>
+            <pc:docMk/>
+            <pc:sldMk cId="0" sldId="269"/>
+            <ac:picMk id="12" creationId="{98CF3F0F-7877-B6E9-9D3C-733E39CC09A6}"/>
+          </ac:picMkLst>
+        </pc:picChg>
+        <pc:picChg chg="add">
+          <ac:chgData name="Muhammad Baig" userId="9e391c9c-4a86-4ccf-b1af-be7858601e98" providerId="ADAL" clId="{AF192224-BF7A-47DA-84FC-CD48B002FA0D}" dt="2026-10-29T13:42:39.131" v="88" actId="22"/>
+          <ac:picMkLst>
+            <pc:docMk/>
+            <pc:sldMk cId="0" sldId="269"/>
+            <ac:picMk id="16" creationId="{B0CD0FF0-7B44-F8FC-0FA2-293B19FFCA93}"/>
+          </ac:picMkLst>
+        </pc:picChg>
+      </pc:sldChg>
+      <pc:sldChg chg="del">
+        <pc:chgData name="Muhammad Baig" userId="9e391c9c-4a86-4ccf-b1af-be7858601e98" providerId="ADAL" clId="{AF192224-BF7A-47DA-84FC-CD48B002FA0D}" dt="2026-10-29T14:26:50.278" v="113" actId="2696"/>
+        <pc:sldMkLst>
+          <pc:docMk/>
+          <pc:sldMk cId="0" sldId="272"/>
+        </pc:sldMkLst>
+      </pc:sldChg>
+      <pc:sldChg chg="addSp delSp modSp mod">
+        <pc:chgData name="Muhammad Baig" userId="9e391c9c-4a86-4ccf-b1af-be7858601e98" providerId="ADAL" clId="{AF192224-BF7A-47DA-84FC-CD48B002FA0D}" dt="2026-10-30T03:15:45.945" v="206" actId="22"/>
+        <pc:sldMkLst>
+          <pc:docMk/>
+          <pc:sldMk cId="0" sldId="273"/>
+        </pc:sldMkLst>
+        <pc:spChg chg="mod">
+          <ac:chgData name="Muhammad Baig" userId="9e391c9c-4a86-4ccf-b1af-be7858601e98" providerId="ADAL" clId="{AF192224-BF7A-47DA-84FC-CD48B002FA0D}" dt="2026-10-29T14:27:00.990" v="120" actId="1037"/>
+          <ac:spMkLst>
+            <pc:docMk/>
+            <pc:sldMk cId="0" sldId="273"/>
+            <ac:spMk id="2" creationId="{00000000-0000-0000-0000-000000000000}"/>
+          </ac:spMkLst>
+        </pc:spChg>
+        <pc:spChg chg="del">
+          <ac:chgData name="Muhammad Baig" userId="9e391c9c-4a86-4ccf-b1af-be7858601e98" providerId="ADAL" clId="{AF192224-BF7A-47DA-84FC-CD48B002FA0D}" dt="2026-10-30T03:15:44.903" v="205" actId="478"/>
+          <ac:spMkLst>
+            <pc:docMk/>
+            <pc:sldMk cId="0" sldId="273"/>
+            <ac:spMk id="4" creationId="{00000000-0000-0000-0000-000000000000}"/>
+          </ac:spMkLst>
+        </pc:spChg>
+        <pc:spChg chg="del">
+          <ac:chgData name="Muhammad Baig" userId="9e391c9c-4a86-4ccf-b1af-be7858601e98" providerId="ADAL" clId="{AF192224-BF7A-47DA-84FC-CD48B002FA0D}" dt="2026-10-30T03:15:44.903" v="205" actId="478"/>
+          <ac:spMkLst>
+            <pc:docMk/>
+            <pc:sldMk cId="0" sldId="273"/>
+            <ac:spMk id="5" creationId="{00000000-0000-0000-0000-000000000000}"/>
+          </ac:spMkLst>
+        </pc:spChg>
+        <pc:spChg chg="del">
+          <ac:chgData name="Muhammad Baig" userId="9e391c9c-4a86-4ccf-b1af-be7858601e98" providerId="ADAL" clId="{AF192224-BF7A-47DA-84FC-CD48B002FA0D}" dt="2026-10-30T03:15:44.903" v="205" actId="478"/>
+          <ac:spMkLst>
+            <pc:docMk/>
+            <pc:sldMk cId="0" sldId="273"/>
+            <ac:spMk id="6" creationId="{00000000-0000-0000-0000-000000000000}"/>
+          </ac:spMkLst>
+        </pc:spChg>
+        <pc:spChg chg="del">
+          <ac:chgData name="Muhammad Baig" userId="9e391c9c-4a86-4ccf-b1af-be7858601e98" providerId="ADAL" clId="{AF192224-BF7A-47DA-84FC-CD48B002FA0D}" dt="2026-10-30T03:15:44.903" v="205" actId="478"/>
+          <ac:spMkLst>
+            <pc:docMk/>
+            <pc:sldMk cId="0" sldId="273"/>
+            <ac:spMk id="7" creationId="{00000000-0000-0000-0000-000000000000}"/>
+          </ac:spMkLst>
+        </pc:spChg>
+        <pc:spChg chg="add">
+          <ac:chgData name="Muhammad Baig" userId="9e391c9c-4a86-4ccf-b1af-be7858601e98" providerId="ADAL" clId="{AF192224-BF7A-47DA-84FC-CD48B002FA0D}" dt="2026-10-30T03:15:45.945" v="206" actId="22"/>
+          <ac:spMkLst>
+            <pc:docMk/>
+            <pc:sldMk cId="0" sldId="273"/>
+            <ac:spMk id="13" creationId="{EB3D0950-D3C3-0617-ADB4-7285BA522F9E}"/>
+          </ac:spMkLst>
+        </pc:spChg>
+        <pc:spChg chg="add">
+          <ac:chgData name="Muhammad Baig" userId="9e391c9c-4a86-4ccf-b1af-be7858601e98" providerId="ADAL" clId="{AF192224-BF7A-47DA-84FC-CD48B002FA0D}" dt="2026-10-30T03:15:45.945" v="206" actId="22"/>
+          <ac:spMkLst>
+            <pc:docMk/>
+            <pc:sldMk cId="0" sldId="273"/>
+            <ac:spMk id="15" creationId="{CBEE8DC2-CBC6-EED9-27FA-18CCFB795C66}"/>
+          </ac:spMkLst>
+        </pc:spChg>
+        <pc:spChg chg="add">
+          <ac:chgData name="Muhammad Baig" userId="9e391c9c-4a86-4ccf-b1af-be7858601e98" providerId="ADAL" clId="{AF192224-BF7A-47DA-84FC-CD48B002FA0D}" dt="2026-10-30T03:15:45.945" v="206" actId="22"/>
+          <ac:spMkLst>
+            <pc:docMk/>
+            <pc:sldMk cId="0" sldId="273"/>
+            <ac:spMk id="17" creationId="{70C1A7D1-7BDE-9BBF-9946-68D50DBEA76B}"/>
+          </ac:spMkLst>
+        </pc:spChg>
+        <pc:spChg chg="add">
+          <ac:chgData name="Muhammad Baig" userId="9e391c9c-4a86-4ccf-b1af-be7858601e98" providerId="ADAL" clId="{AF192224-BF7A-47DA-84FC-CD48B002FA0D}" dt="2026-10-30T03:15:45.945" v="206" actId="22"/>
+          <ac:spMkLst>
+            <pc:docMk/>
+            <pc:sldMk cId="0" sldId="273"/>
+            <ac:spMk id="19" creationId="{AEDDC5C5-C47C-BE51-C382-22D0FE41AF13}"/>
+          </ac:spMkLst>
+        </pc:spChg>
+      </pc:sldChg>
+      <pc:sldChg chg="delSp modSp del mod">
+        <pc:chgData name="Muhammad Baig" userId="9e391c9c-4a86-4ccf-b1af-be7858601e98" providerId="ADAL" clId="{AF192224-BF7A-47DA-84FC-CD48B002FA0D}" dt="2026-10-30T03:15:54.443" v="207" actId="2696"/>
+        <pc:sldMkLst>
+          <pc:docMk/>
+          <pc:sldMk cId="0" sldId="274"/>
+        </pc:sldMkLst>
+        <pc:spChg chg="mod">
+          <ac:chgData name="Muhammad Baig" userId="9e391c9c-4a86-4ccf-b1af-be7858601e98" providerId="ADAL" clId="{AF192224-BF7A-47DA-84FC-CD48B002FA0D}" dt="2026-10-29T14:28:03.328" v="132" actId="20577"/>
+          <ac:spMkLst>
+            <pc:docMk/>
+            <pc:sldMk cId="0" sldId="274"/>
+            <ac:spMk id="2" creationId="{00000000-0000-0000-0000-000000000000}"/>
+          </ac:spMkLst>
+        </pc:spChg>
+        <pc:spChg chg="del">
+          <ac:chgData name="Muhammad Baig" userId="9e391c9c-4a86-4ccf-b1af-be7858601e98" providerId="ADAL" clId="{AF192224-BF7A-47DA-84FC-CD48B002FA0D}" dt="2026-10-30T03:15:39.463" v="204" actId="21"/>
+          <ac:spMkLst>
+            <pc:docMk/>
+            <pc:sldMk cId="0" sldId="274"/>
+            <ac:spMk id="4" creationId="{00000000-0000-0000-0000-000000000000}"/>
+          </ac:spMkLst>
+        </pc:spChg>
+        <pc:spChg chg="del">
+          <ac:chgData name="Muhammad Baig" userId="9e391c9c-4a86-4ccf-b1af-be7858601e98" providerId="ADAL" clId="{AF192224-BF7A-47DA-84FC-CD48B002FA0D}" dt="2026-10-30T03:15:39.463" v="204" actId="21"/>
+          <ac:spMkLst>
+            <pc:docMk/>
+            <pc:sldMk cId="0" sldId="274"/>
+            <ac:spMk id="5" creationId="{00000000-0000-0000-0000-000000000000}"/>
+          </ac:spMkLst>
+        </pc:spChg>
+        <pc:spChg chg="del">
+          <ac:chgData name="Muhammad Baig" userId="9e391c9c-4a86-4ccf-b1af-be7858601e98" providerId="ADAL" clId="{AF192224-BF7A-47DA-84FC-CD48B002FA0D}" dt="2026-10-30T03:15:39.463" v="204" actId="21"/>
+          <ac:spMkLst>
+            <pc:docMk/>
+            <pc:sldMk cId="0" sldId="274"/>
+            <ac:spMk id="6" creationId="{00000000-0000-0000-0000-000000000000}"/>
+          </ac:spMkLst>
+        </pc:spChg>
+        <pc:spChg chg="del">
+          <ac:chgData name="Muhammad Baig" userId="9e391c9c-4a86-4ccf-b1af-be7858601e98" providerId="ADAL" clId="{AF192224-BF7A-47DA-84FC-CD48B002FA0D}" dt="2026-10-30T03:15:39.463" v="204" actId="21"/>
+          <ac:spMkLst>
+            <pc:docMk/>
+            <pc:sldMk cId="0" sldId="274"/>
+            <ac:spMk id="7" creationId="{00000000-0000-0000-0000-000000000000}"/>
+          </ac:spMkLst>
+        </pc:spChg>
+        <pc:spChg chg="del">
+          <ac:chgData name="Muhammad Baig" userId="9e391c9c-4a86-4ccf-b1af-be7858601e98" providerId="ADAL" clId="{AF192224-BF7A-47DA-84FC-CD48B002FA0D}" dt="2026-10-29T14:27:55.533" v="127" actId="478"/>
+          <ac:spMkLst>
+            <pc:docMk/>
+            <pc:sldMk cId="0" sldId="274"/>
+            <ac:spMk id="8" creationId="{00000000-0000-0000-0000-000000000000}"/>
+          </ac:spMkLst>
+        </pc:spChg>
+        <pc:spChg chg="mod">
+          <ac:chgData name="Muhammad Baig" userId="9e391c9c-4a86-4ccf-b1af-be7858601e98" providerId="ADAL" clId="{AF192224-BF7A-47DA-84FC-CD48B002FA0D}" dt="2026-10-29T14:27:57.660" v="128" actId="6549"/>
+          <ac:spMkLst>
+            <pc:docMk/>
+            <pc:sldMk cId="0" sldId="274"/>
+            <ac:spMk id="9" creationId="{00000000-0000-0000-0000-000000000000}"/>
+          </ac:spMkLst>
+        </pc:spChg>
+        <pc:spChg chg="del mod">
+          <ac:chgData name="Muhammad Baig" userId="9e391c9c-4a86-4ccf-b1af-be7858601e98" providerId="ADAL" clId="{AF192224-BF7A-47DA-84FC-CD48B002FA0D}" dt="2026-10-29T14:28:00.651" v="130" actId="478"/>
+          <ac:spMkLst>
+            <pc:docMk/>
+            <pc:sldMk cId="0" sldId="274"/>
+            <ac:spMk id="10" creationId="{00000000-0000-0000-0000-000000000000}"/>
+          </ac:spMkLst>
+        </pc:spChg>
+        <pc:spChg chg="del mod">
+          <ac:chgData name="Muhammad Baig" userId="9e391c9c-4a86-4ccf-b1af-be7858601e98" providerId="ADAL" clId="{AF192224-BF7A-47DA-84FC-CD48B002FA0D}" dt="2026-10-29T14:28:05.949" v="133" actId="478"/>
+          <ac:spMkLst>
+            <pc:docMk/>
+            <pc:sldMk cId="0" sldId="274"/>
+            <ac:spMk id="11" creationId="{00000000-0000-0000-0000-000000000000}"/>
+          </ac:spMkLst>
+        </pc:spChg>
+      </pc:sldChg>
+      <pc:sldChg chg="delSp modSp add mod ord">
+        <pc:chgData name="Muhammad Baig" userId="9e391c9c-4a86-4ccf-b1af-be7858601e98" providerId="ADAL" clId="{AF192224-BF7A-47DA-84FC-CD48B002FA0D}" dt="2026-10-29T14:45:20.714" v="192" actId="1076"/>
+        <pc:sldMkLst>
+          <pc:docMk/>
+          <pc:sldMk cId="2336891204" sldId="275"/>
+        </pc:sldMkLst>
+        <pc:spChg chg="mod">
+          <ac:chgData name="Muhammad Baig" userId="9e391c9c-4a86-4ccf-b1af-be7858601e98" providerId="ADAL" clId="{AF192224-BF7A-47DA-84FC-CD48B002FA0D}" dt="2026-10-29T14:45:13.019" v="191" actId="1076"/>
+          <ac:spMkLst>
+            <pc:docMk/>
+            <pc:sldMk cId="2336891204" sldId="275"/>
+            <ac:spMk id="6" creationId="{1E9B82B9-48EC-35F2-63F1-900C791C32C0}"/>
+          </ac:spMkLst>
+        </pc:spChg>
+        <pc:spChg chg="mod">
+          <ac:chgData name="Muhammad Baig" userId="9e391c9c-4a86-4ccf-b1af-be7858601e98" providerId="ADAL" clId="{AF192224-BF7A-47DA-84FC-CD48B002FA0D}" dt="2026-10-29T14:45:20.714" v="192" actId="1076"/>
+          <ac:spMkLst>
+            <pc:docMk/>
+            <pc:sldMk cId="2336891204" sldId="275"/>
+            <ac:spMk id="7" creationId="{5DA1B7CA-60AA-8C4A-6376-A4734F280C7E}"/>
+          </ac:spMkLst>
+        </pc:spChg>
+        <pc:spChg chg="del">
+          <ac:chgData name="Muhammad Baig" userId="9e391c9c-4a86-4ccf-b1af-be7858601e98" providerId="ADAL" clId="{AF192224-BF7A-47DA-84FC-CD48B002FA0D}" dt="2026-10-29T14:44:38.913" v="161" actId="478"/>
+          <ac:spMkLst>
+            <pc:docMk/>
+            <pc:sldMk cId="2336891204" sldId="275"/>
+            <ac:spMk id="8" creationId="{82DA3272-B496-4D6C-BE09-AA8D317EDE4E}"/>
           </ac:spMkLst>
         </pc:spChg>
       </pc:sldChg>
@@ -383,7 +865,14 @@
   <c:date1904 val="0"/>
   <c:lang val="en-US"/>
   <c:roundedCorners val="1"/>
-  <c:style val="2"/>
+  <mc:AlternateContent xmlns:mc="http://schemas.openxmlformats.org/markup-compatibility/2006">
+    <mc:Choice xmlns:c14="http://schemas.microsoft.com/office/drawing/2007/8/2/chart" Requires="c14">
+      <c14:style val="102"/>
+    </mc:Choice>
+    <mc:Fallback>
+      <c:style val="2"/>
+    </mc:Fallback>
+  </mc:AlternateContent>
   <c:chart>
     <c:autoTitleDeleted val="1"/>
     <c:plotArea>
@@ -427,7 +916,7 @@
               <a:lstStyle/>
               <a:p>
                 <a:pPr>
-                  <a:defRPr sz="1200" b="0" i="0" u="none" strike="noStrike">
+                  <a:defRPr sz="1100" b="0" i="0" u="none" strike="noStrike">
                     <a:solidFill>
                       <a:srgbClr val="2B2124"/>
                     </a:solidFill>
@@ -487,7 +976,7 @@
           </c:val>
           <c:extLst>
             <c:ext xmlns:c16="http://schemas.microsoft.com/office/drawing/2014/chart" uri="{C3380CC4-5D6E-409C-BE32-E72D297353CC}">
-              <c16:uniqueId val="{00000000-0BF8-401B-B3BC-E43A6E5E3389}"/>
+              <c16:uniqueId val="{00000000-9CDD-4448-BA98-AC78C313EEF3}"/>
             </c:ext>
           </c:extLst>
         </c:ser>
@@ -526,7 +1015,7 @@
               <a:lstStyle/>
               <a:p>
                 <a:pPr>
-                  <a:defRPr sz="1200" b="0" i="0" u="none" strike="noStrike">
+                  <a:defRPr sz="1100" b="0" i="0" u="none" strike="noStrike">
                     <a:solidFill>
                       <a:srgbClr val="2B2124"/>
                     </a:solidFill>
@@ -576,7 +1065,7 @@
                   <c:v>100</c:v>
                 </c:pt>
                 <c:pt idx="1">
-                  <c:v>100</c:v>
+                  <c:v>70</c:v>
                 </c:pt>
                 <c:pt idx="2">
                   <c:v>0</c:v>
@@ -586,7 +1075,7 @@
           </c:val>
           <c:extLst>
             <c:ext xmlns:c16="http://schemas.microsoft.com/office/drawing/2014/chart" uri="{C3380CC4-5D6E-409C-BE32-E72D297353CC}">
-              <c16:uniqueId val="{00000001-0BF8-401B-B3BC-E43A6E5E3389}"/>
+              <c16:uniqueId val="{00000001-9CDD-4448-BA98-AC78C313EEF3}"/>
             </c:ext>
           </c:extLst>
         </c:ser>
@@ -599,14 +1088,14 @@
               <c:strCache>
                 <c:ptCount val="1"/>
                 <c:pt idx="0">
-                  <c:v>Ladder + model + check</c:v>
+                  <c:v>Model + check, no rules</c:v>
                 </c:pt>
               </c:strCache>
             </c:strRef>
           </c:tx>
           <c:spPr>
             <a:solidFill>
-              <a:srgbClr val="6B1A2A"/>
+              <a:srgbClr val="8A8F98"/>
             </a:solidFill>
             <a:effectLst/>
           </c:spPr>
@@ -625,7 +1114,7 @@
               <a:lstStyle/>
               <a:p>
                 <a:pPr>
-                  <a:defRPr sz="1200" b="0" i="0" u="none" strike="noStrike">
+                  <a:defRPr sz="1100" b="0" i="0" u="none" strike="noStrike">
                     <a:solidFill>
                       <a:srgbClr val="2B2124"/>
                     </a:solidFill>
@@ -678,277 +1167,6 @@
                   <c:v>100</c:v>
                 </c:pt>
                 <c:pt idx="2">
-                  <c:v>100</c:v>
-                </c:pt>
-              </c:numCache>
-            </c:numRef>
-          </c:val>
-          <c:extLst>
-            <c:ext xmlns:c16="http://schemas.microsoft.com/office/drawing/2014/chart" uri="{C3380CC4-5D6E-409C-BE32-E72D297353CC}">
-              <c16:uniqueId val="{00000002-0BF8-401B-B3BC-E43A6E5E3389}"/>
-            </c:ext>
-          </c:extLst>
-        </c:ser>
-        <c:dLbls>
-          <c:showLegendKey val="0"/>
-          <c:showVal val="1"/>
-          <c:showCatName val="0"/>
-          <c:showSerName val="0"/>
-          <c:showPercent val="0"/>
-          <c:showBubbleSize val="0"/>
-        </c:dLbls>
-        <c:gapWidth val="60"/>
-        <c:axId val="2094734554"/>
-        <c:axId val="2094734552"/>
-      </c:barChart>
-      <c:catAx>
-        <c:axId val="2094734554"/>
-        <c:scaling>
-          <c:orientation val="minMax"/>
-        </c:scaling>
-        <c:delete val="0"/>
-        <c:axPos val="b"/>
-        <c:numFmt formatCode="General" sourceLinked="1"/>
-        <c:majorTickMark val="out"/>
-        <c:minorTickMark val="none"/>
-        <c:tickLblPos val="low"/>
-        <c:spPr>
-          <a:ln w="12700" cap="flat">
-            <a:solidFill>
-              <a:srgbClr val="888888"/>
-            </a:solidFill>
-            <a:prstDash val="solid"/>
-            <a:round/>
-          </a:ln>
-        </c:spPr>
-        <c:txPr>
-          <a:bodyPr/>
-          <a:lstStyle/>
-          <a:p>
-            <a:pPr>
-              <a:defRPr sz="1200" b="0" i="0" u="none" strike="noStrike">
-                <a:solidFill>
-                  <a:srgbClr val="2B2124"/>
-                </a:solidFill>
-                <a:latin typeface="+mn-lt"/>
-              </a:defRPr>
-            </a:pPr>
-            <a:endParaRPr lang="en-US"/>
-          </a:p>
-        </c:txPr>
-        <c:crossAx val="2094734552"/>
-        <c:crosses val="autoZero"/>
-        <c:auto val="1"/>
-        <c:lblAlgn val="ctr"/>
-        <c:lblOffset val="100"/>
-        <c:noMultiLvlLbl val="1"/>
-      </c:catAx>
-      <c:valAx>
-        <c:axId val="2094734552"/>
-        <c:scaling>
-          <c:orientation val="minMax"/>
-          <c:max val="100"/>
-          <c:min val="0"/>
-        </c:scaling>
-        <c:delete val="0"/>
-        <c:axPos val="l"/>
-        <c:majorGridlines>
-          <c:spPr>
-            <a:ln w="9525" cap="flat">
-              <a:solidFill>
-                <a:srgbClr val="E1E6EE"/>
-              </a:solidFill>
-              <a:prstDash val="solid"/>
-              <a:round/>
-            </a:ln>
-          </c:spPr>
-        </c:majorGridlines>
-        <c:numFmt formatCode="0&quot;%&quot;" sourceLinked="0"/>
-        <c:majorTickMark val="out"/>
-        <c:minorTickMark val="none"/>
-        <c:tickLblPos val="nextTo"/>
-        <c:spPr>
-          <a:ln w="12700" cap="flat">
-            <a:solidFill>
-              <a:srgbClr val="888888"/>
-            </a:solidFill>
-            <a:prstDash val="solid"/>
-            <a:round/>
-          </a:ln>
-        </c:spPr>
-        <c:txPr>
-          <a:bodyPr/>
-          <a:lstStyle/>
-          <a:p>
-            <a:pPr>
-              <a:defRPr sz="1200" b="0" i="0" u="none" strike="noStrike">
-                <a:solidFill>
-                  <a:srgbClr val="8A8F98"/>
-                </a:solidFill>
-                <a:latin typeface="+mn-lt"/>
-              </a:defRPr>
-            </a:pPr>
-            <a:endParaRPr lang="en-US"/>
-          </a:p>
-        </c:txPr>
-        <c:crossAx val="2094734554"/>
-        <c:crosses val="autoZero"/>
-        <c:crossBetween val="between"/>
-        <c:majorUnit val="25"/>
-      </c:valAx>
-      <c:spPr>
-        <a:noFill/>
-        <a:ln>
-          <a:noFill/>
-        </a:ln>
-        <a:effectLst/>
-      </c:spPr>
-    </c:plotArea>
-    <c:legend>
-      <c:legendPos val="b"/>
-      <c:overlay val="0"/>
-      <c:txPr>
-        <a:bodyPr/>
-        <a:lstStyle/>
-        <a:p>
-          <a:pPr>
-            <a:defRPr sz="1200">
-              <a:solidFill>
-                <a:srgbClr val="2B2124"/>
-              </a:solidFill>
-              <a:latin typeface="+mn-lt"/>
-              <a:cs typeface="+mn-lt"/>
-            </a:defRPr>
-          </a:pPr>
-          <a:endParaRPr lang="en-US"/>
-        </a:p>
-      </c:txPr>
-    </c:legend>
-    <c:plotVisOnly val="1"/>
-    <c:dispBlanksAs val="span"/>
-    <c:showDLblsOverMax val="1"/>
-  </c:chart>
-  <c:spPr>
-    <a:noFill/>
-    <a:ln>
-      <a:noFill/>
-    </a:ln>
-    <a:effectLst/>
-  </c:spPr>
-  <c:externalData r:id="rId1">
-    <c:autoUpdate val="0"/>
-  </c:externalData>
-</c:chartSpace>
-</file>
-
-<file path=ppt/charts/chart2.xml><?xml version="1.0" encoding="utf-8"?>
-<c:chartSpace xmlns:c="http://schemas.openxmlformats.org/drawingml/2006/chart" xmlns:a="http://schemas.openxmlformats.org/drawingml/2006/main" xmlns:r="http://schemas.openxmlformats.org/officeDocument/2006/relationships" xmlns:c16r2="http://schemas.microsoft.com/office/drawing/2015/06/chart">
-  <c:date1904 val="0"/>
-  <c:lang val="en-US"/>
-  <c:roundedCorners val="1"/>
-  <c:style val="2"/>
-  <c:chart>
-    <c:autoTitleDeleted val="1"/>
-    <c:plotArea>
-      <c:layout/>
-      <c:barChart>
-        <c:barDir val="col"/>
-        <c:grouping val="clustered"/>
-        <c:varyColors val="0"/>
-        <c:ser>
-          <c:idx val="0"/>
-          <c:order val="0"/>
-          <c:tx>
-            <c:strRef>
-              <c:f>Sheet1!$B$1</c:f>
-              <c:strCache>
-                <c:ptCount val="1"/>
-                <c:pt idx="0">
-                  <c:v>Recorded script</c:v>
-                </c:pt>
-              </c:strCache>
-            </c:strRef>
-          </c:tx>
-          <c:spPr>
-            <a:solidFill>
-              <a:srgbClr val="8A8F98"/>
-            </a:solidFill>
-            <a:effectLst/>
-          </c:spPr>
-          <c:invertIfNegative val="0"/>
-          <c:dLbls>
-            <c:numFmt formatCode="0&quot;%&quot;" sourceLinked="0"/>
-            <c:spPr>
-              <a:noFill/>
-              <a:ln>
-                <a:noFill/>
-              </a:ln>
-              <a:effectLst/>
-            </c:spPr>
-            <c:txPr>
-              <a:bodyPr/>
-              <a:lstStyle/>
-              <a:p>
-                <a:pPr>
-                  <a:defRPr sz="1100" b="0" i="0" u="none" strike="noStrike">
-                    <a:solidFill>
-                      <a:srgbClr val="2B2124"/>
-                    </a:solidFill>
-                    <a:latin typeface="+mn-lt"/>
-                  </a:defRPr>
-                </a:pPr>
-                <a:endParaRPr lang="en-US"/>
-              </a:p>
-            </c:txPr>
-            <c:showLegendKey val="0"/>
-            <c:showVal val="1"/>
-            <c:showCatName val="0"/>
-            <c:showSerName val="0"/>
-            <c:showPercent val="0"/>
-            <c:showBubbleSize val="0"/>
-            <c:showLeaderLines val="0"/>
-            <c:extLst>
-              <c:ext xmlns:c15="http://schemas.microsoft.com/office/drawing/2012/chart" uri="{CE6537A1-D6FC-4f65-9D91-7224C49458BB}">
-                <c15:showLeaderLines val="0"/>
-              </c:ext>
-            </c:extLst>
-          </c:dLbls>
-          <c:cat>
-            <c:strRef>
-              <c:f>Sheet1!$A$2:$A$5</c:f>
-              <c:strCache>
-                <c:ptCount val="4"/>
-                <c:pt idx="0">
-                  <c:v>Clean</c:v>
-                </c:pt>
-                <c:pt idx="1">
-                  <c:v>Reworded</c:v>
-                </c:pt>
-                <c:pt idx="2">
-                  <c:v>+ ids rotated</c:v>
-                </c:pt>
-                <c:pt idx="3">
-                  <c:v>+ control moved</c:v>
-                </c:pt>
-              </c:strCache>
-            </c:strRef>
-          </c:cat>
-          <c:val>
-            <c:numRef>
-              <c:f>Sheet1!$B$2:$B$5</c:f>
-              <c:numCache>
-                <c:formatCode>General</c:formatCode>
-                <c:ptCount val="4"/>
-                <c:pt idx="0">
-                  <c:v>100</c:v>
-                </c:pt>
-                <c:pt idx="1">
-                  <c:v>100</c:v>
-                </c:pt>
-                <c:pt idx="2">
-                  <c:v>0</c:v>
-                </c:pt>
-                <c:pt idx="3">
                   <c:v>0</c:v>
                 </c:pt>
               </c:numCache>
@@ -956,121 +1174,16 @@
           </c:val>
           <c:extLst>
             <c:ext xmlns:c16="http://schemas.microsoft.com/office/drawing/2014/chart" uri="{C3380CC4-5D6E-409C-BE32-E72D297353CC}">
-              <c16:uniqueId val="{00000000-79AB-49A5-9D77-73DC6C67EDA9}"/>
+              <c16:uniqueId val="{00000002-9CDD-4448-BA98-AC78C313EEF3}"/>
             </c:ext>
           </c:extLst>
         </c:ser>
         <c:ser>
-          <c:idx val="1"/>
-          <c:order val="1"/>
+          <c:idx val="3"/>
+          <c:order val="3"/>
           <c:tx>
             <c:strRef>
-              <c:f>Sheet1!$C$1</c:f>
-              <c:strCache>
-                <c:ptCount val="1"/>
-                <c:pt idx="0">
-                  <c:v>Rules ladder</c:v>
-                </c:pt>
-              </c:strCache>
-            </c:strRef>
-          </c:tx>
-          <c:spPr>
-            <a:solidFill>
-              <a:srgbClr val="B8862F"/>
-            </a:solidFill>
-            <a:effectLst/>
-          </c:spPr>
-          <c:invertIfNegative val="0"/>
-          <c:dLbls>
-            <c:numFmt formatCode="0&quot;%&quot;" sourceLinked="0"/>
-            <c:spPr>
-              <a:noFill/>
-              <a:ln>
-                <a:noFill/>
-              </a:ln>
-              <a:effectLst/>
-            </c:spPr>
-            <c:txPr>
-              <a:bodyPr/>
-              <a:lstStyle/>
-              <a:p>
-                <a:pPr>
-                  <a:defRPr sz="1100" b="0" i="0" u="none" strike="noStrike">
-                    <a:solidFill>
-                      <a:srgbClr val="2B2124"/>
-                    </a:solidFill>
-                    <a:latin typeface="+mn-lt"/>
-                  </a:defRPr>
-                </a:pPr>
-                <a:endParaRPr lang="en-US"/>
-              </a:p>
-            </c:txPr>
-            <c:showLegendKey val="0"/>
-            <c:showVal val="1"/>
-            <c:showCatName val="0"/>
-            <c:showSerName val="0"/>
-            <c:showPercent val="0"/>
-            <c:showBubbleSize val="0"/>
-            <c:showLeaderLines val="0"/>
-            <c:extLst>
-              <c:ext xmlns:c15="http://schemas.microsoft.com/office/drawing/2012/chart" uri="{CE6537A1-D6FC-4f65-9D91-7224C49458BB}">
-                <c15:showLeaderLines val="0"/>
-              </c:ext>
-            </c:extLst>
-          </c:dLbls>
-          <c:cat>
-            <c:strRef>
-              <c:f>Sheet1!$A$2:$A$5</c:f>
-              <c:strCache>
-                <c:ptCount val="4"/>
-                <c:pt idx="0">
-                  <c:v>Clean</c:v>
-                </c:pt>
-                <c:pt idx="1">
-                  <c:v>Reworded</c:v>
-                </c:pt>
-                <c:pt idx="2">
-                  <c:v>+ ids rotated</c:v>
-                </c:pt>
-                <c:pt idx="3">
-                  <c:v>+ control moved</c:v>
-                </c:pt>
-              </c:strCache>
-            </c:strRef>
-          </c:cat>
-          <c:val>
-            <c:numRef>
-              <c:f>Sheet1!$C$2:$C$5</c:f>
-              <c:numCache>
-                <c:formatCode>General</c:formatCode>
-                <c:ptCount val="4"/>
-                <c:pt idx="0">
-                  <c:v>100</c:v>
-                </c:pt>
-                <c:pt idx="1">
-                  <c:v>100</c:v>
-                </c:pt>
-                <c:pt idx="2">
-                  <c:v>100</c:v>
-                </c:pt>
-                <c:pt idx="3">
-                  <c:v>0</c:v>
-                </c:pt>
-              </c:numCache>
-            </c:numRef>
-          </c:val>
-          <c:extLst>
-            <c:ext xmlns:c16="http://schemas.microsoft.com/office/drawing/2014/chart" uri="{C3380CC4-5D6E-409C-BE32-E72D297353CC}">
-              <c16:uniqueId val="{00000001-79AB-49A5-9D77-73DC6C67EDA9}"/>
-            </c:ext>
-          </c:extLst>
-        </c:ser>
-        <c:ser>
-          <c:idx val="2"/>
-          <c:order val="2"/>
-          <c:tx>
-            <c:strRef>
-              <c:f>Sheet1!$D$1</c:f>
+              <c:f>Sheet1!$E$1</c:f>
               <c:strCache>
                 <c:ptCount val="1"/>
                 <c:pt idx="0">
@@ -1125,30 +1238,27 @@
           </c:dLbls>
           <c:cat>
             <c:strRef>
-              <c:f>Sheet1!$A$2:$A$5</c:f>
+              <c:f>Sheet1!$A$2:$A$4</c:f>
               <c:strCache>
-                <c:ptCount val="4"/>
+                <c:ptCount val="3"/>
                 <c:pt idx="0">
-                  <c:v>Clean</c:v>
+                  <c:v>Planted labels</c:v>
                 </c:pt>
                 <c:pt idx="1">
-                  <c:v>Reworded</c:v>
+                  <c:v>+ reworded text</c:v>
                 </c:pt>
                 <c:pt idx="2">
-                  <c:v>+ ids rotated</c:v>
-                </c:pt>
-                <c:pt idx="3">
-                  <c:v>+ control moved</c:v>
+                  <c:v>+ ids rotated + control moved</c:v>
                 </c:pt>
               </c:strCache>
             </c:strRef>
           </c:cat>
           <c:val>
             <c:numRef>
-              <c:f>Sheet1!$D$2:$D$5</c:f>
+              <c:f>Sheet1!$E$2:$E$4</c:f>
               <c:numCache>
                 <c:formatCode>General</c:formatCode>
-                <c:ptCount val="4"/>
+                <c:ptCount val="3"/>
                 <c:pt idx="0">
                   <c:v>100</c:v>
                 </c:pt>
@@ -1158,15 +1268,12 @@
                 <c:pt idx="2">
                   <c:v>100</c:v>
                 </c:pt>
-                <c:pt idx="3">
-                  <c:v>100</c:v>
-                </c:pt>
               </c:numCache>
             </c:numRef>
           </c:val>
           <c:extLst>
             <c:ext xmlns:c16="http://schemas.microsoft.com/office/drawing/2014/chart" uri="{C3380CC4-5D6E-409C-BE32-E72D297353CC}">
-              <c16:uniqueId val="{00000002-79AB-49A5-9D77-73DC6C67EDA9}"/>
+              <c16:uniqueId val="{00000003-9CDD-4448-BA98-AC78C313EEF3}"/>
             </c:ext>
           </c:extLst>
         </c:ser>
@@ -1322,7 +1429,7 @@
 </c:chartSpace>
 </file>
 
-<file path=ppt/charts/chart3.xml><?xml version="1.0" encoding="utf-8"?>
+<file path=ppt/charts/chart2.xml><?xml version="1.0" encoding="utf-8"?>
 <c:chartSpace xmlns:c="http://schemas.openxmlformats.org/drawingml/2006/chart" xmlns:a="http://schemas.openxmlformats.org/drawingml/2006/main" xmlns:r="http://schemas.openxmlformats.org/officeDocument/2006/relationships" xmlns:c16r2="http://schemas.microsoft.com/office/drawing/2015/06/chart">
   <c:date1904 val="0"/>
   <c:lang val="en-US"/>
@@ -1431,7 +1538,7 @@
           </c:val>
           <c:extLst>
             <c:ext xmlns:c16="http://schemas.microsoft.com/office/drawing/2014/chart" uri="{C3380CC4-5D6E-409C-BE32-E72D297353CC}">
-              <c16:uniqueId val="{00000000-D356-4EA5-A779-DE3817A3F935}"/>
+              <c16:uniqueId val="{00000000-3BEE-4636-A119-8B4D58DEF926}"/>
             </c:ext>
           </c:extLst>
         </c:ser>
@@ -1530,7 +1637,495 @@
           </c:val>
           <c:extLst>
             <c:ext xmlns:c16="http://schemas.microsoft.com/office/drawing/2014/chart" uri="{C3380CC4-5D6E-409C-BE32-E72D297353CC}">
-              <c16:uniqueId val="{00000001-D356-4EA5-A779-DE3817A3F935}"/>
+              <c16:uniqueId val="{00000001-3BEE-4636-A119-8B4D58DEF926}"/>
+            </c:ext>
+          </c:extLst>
+        </c:ser>
+        <c:dLbls>
+          <c:showLegendKey val="0"/>
+          <c:showVal val="1"/>
+          <c:showCatName val="0"/>
+          <c:showSerName val="0"/>
+          <c:showPercent val="0"/>
+          <c:showBubbleSize val="0"/>
+        </c:dLbls>
+        <c:gapWidth val="60"/>
+        <c:axId val="2094734554"/>
+        <c:axId val="2094734552"/>
+      </c:barChart>
+      <c:catAx>
+        <c:axId val="2094734554"/>
+        <c:scaling>
+          <c:orientation val="minMax"/>
+        </c:scaling>
+        <c:delete val="0"/>
+        <c:axPos val="b"/>
+        <c:numFmt formatCode="General" sourceLinked="1"/>
+        <c:majorTickMark val="out"/>
+        <c:minorTickMark val="none"/>
+        <c:tickLblPos val="low"/>
+        <c:spPr>
+          <a:ln w="12700" cap="flat">
+            <a:solidFill>
+              <a:srgbClr val="888888"/>
+            </a:solidFill>
+            <a:prstDash val="solid"/>
+            <a:round/>
+          </a:ln>
+        </c:spPr>
+        <c:txPr>
+          <a:bodyPr/>
+          <a:lstStyle/>
+          <a:p>
+            <a:pPr>
+              <a:defRPr sz="1200" b="0" i="0" u="none" strike="noStrike">
+                <a:solidFill>
+                  <a:srgbClr val="2B2124"/>
+                </a:solidFill>
+                <a:latin typeface="+mn-lt"/>
+              </a:defRPr>
+            </a:pPr>
+            <a:endParaRPr lang="en-US"/>
+          </a:p>
+        </c:txPr>
+        <c:crossAx val="2094734552"/>
+        <c:crosses val="autoZero"/>
+        <c:auto val="1"/>
+        <c:lblAlgn val="ctr"/>
+        <c:lblOffset val="100"/>
+        <c:noMultiLvlLbl val="1"/>
+      </c:catAx>
+      <c:valAx>
+        <c:axId val="2094734552"/>
+        <c:scaling>
+          <c:orientation val="minMax"/>
+          <c:max val="100"/>
+          <c:min val="0"/>
+        </c:scaling>
+        <c:delete val="0"/>
+        <c:axPos val="l"/>
+        <c:majorGridlines>
+          <c:spPr>
+            <a:ln w="9525" cap="flat">
+              <a:solidFill>
+                <a:srgbClr val="E1E6EE"/>
+              </a:solidFill>
+              <a:prstDash val="solid"/>
+              <a:round/>
+            </a:ln>
+          </c:spPr>
+        </c:majorGridlines>
+        <c:numFmt formatCode="0&quot;%&quot;" sourceLinked="0"/>
+        <c:majorTickMark val="out"/>
+        <c:minorTickMark val="none"/>
+        <c:tickLblPos val="nextTo"/>
+        <c:spPr>
+          <a:ln w="12700" cap="flat">
+            <a:solidFill>
+              <a:srgbClr val="888888"/>
+            </a:solidFill>
+            <a:prstDash val="solid"/>
+            <a:round/>
+          </a:ln>
+        </c:spPr>
+        <c:txPr>
+          <a:bodyPr/>
+          <a:lstStyle/>
+          <a:p>
+            <a:pPr>
+              <a:defRPr sz="1200" b="0" i="0" u="none" strike="noStrike">
+                <a:solidFill>
+                  <a:srgbClr val="8A8F98"/>
+                </a:solidFill>
+                <a:latin typeface="+mn-lt"/>
+              </a:defRPr>
+            </a:pPr>
+            <a:endParaRPr lang="en-US"/>
+          </a:p>
+        </c:txPr>
+        <c:crossAx val="2094734554"/>
+        <c:crosses val="autoZero"/>
+        <c:crossBetween val="between"/>
+        <c:majorUnit val="25"/>
+      </c:valAx>
+      <c:spPr>
+        <a:noFill/>
+        <a:ln>
+          <a:noFill/>
+        </a:ln>
+        <a:effectLst/>
+      </c:spPr>
+    </c:plotArea>
+    <c:legend>
+      <c:legendPos val="b"/>
+      <c:overlay val="0"/>
+      <c:txPr>
+        <a:bodyPr/>
+        <a:lstStyle/>
+        <a:p>
+          <a:pPr>
+            <a:defRPr sz="1200">
+              <a:solidFill>
+                <a:srgbClr val="2B2124"/>
+              </a:solidFill>
+              <a:latin typeface="+mn-lt"/>
+              <a:cs typeface="+mn-lt"/>
+            </a:defRPr>
+          </a:pPr>
+          <a:endParaRPr lang="en-US"/>
+        </a:p>
+      </c:txPr>
+    </c:legend>
+    <c:plotVisOnly val="1"/>
+    <c:dispBlanksAs val="span"/>
+    <c:showDLblsOverMax val="1"/>
+  </c:chart>
+  <c:spPr>
+    <a:noFill/>
+    <a:ln>
+      <a:noFill/>
+    </a:ln>
+    <a:effectLst/>
+  </c:spPr>
+  <c:externalData r:id="rId1">
+    <c:autoUpdate val="0"/>
+  </c:externalData>
+</c:chartSpace>
+</file>
+
+<file path=ppt/charts/chart3.xml><?xml version="1.0" encoding="utf-8"?>
+<c:chartSpace xmlns:c="http://schemas.openxmlformats.org/drawingml/2006/chart" xmlns:a="http://schemas.openxmlformats.org/drawingml/2006/main" xmlns:r="http://schemas.openxmlformats.org/officeDocument/2006/relationships" xmlns:c16r2="http://schemas.microsoft.com/office/drawing/2015/06/chart">
+  <c:date1904 val="0"/>
+  <c:lang val="en-US"/>
+  <c:roundedCorners val="1"/>
+  <mc:AlternateContent xmlns:mc="http://schemas.openxmlformats.org/markup-compatibility/2006">
+    <mc:Choice xmlns:c14="http://schemas.microsoft.com/office/drawing/2007/8/2/chart" Requires="c14">
+      <c14:style val="102"/>
+    </mc:Choice>
+    <mc:Fallback>
+      <c:style val="2"/>
+    </mc:Fallback>
+  </mc:AlternateContent>
+  <c:chart>
+    <c:autoTitleDeleted val="1"/>
+    <c:plotArea>
+      <c:layout/>
+      <c:barChart>
+        <c:barDir val="col"/>
+        <c:grouping val="clustered"/>
+        <c:varyColors val="0"/>
+        <c:ser>
+          <c:idx val="0"/>
+          <c:order val="0"/>
+          <c:tx>
+            <c:strRef>
+              <c:f>Sheet1!$B$1</c:f>
+              <c:strCache>
+                <c:ptCount val="1"/>
+                <c:pt idx="0">
+                  <c:v>Recorded script</c:v>
+                </c:pt>
+              </c:strCache>
+            </c:strRef>
+          </c:tx>
+          <c:spPr>
+            <a:solidFill>
+              <a:srgbClr val="8A8F98"/>
+            </a:solidFill>
+            <a:effectLst/>
+          </c:spPr>
+          <c:invertIfNegative val="0"/>
+          <c:dLbls>
+            <c:numFmt formatCode="0&quot;%&quot;" sourceLinked="0"/>
+            <c:spPr>
+              <a:noFill/>
+              <a:ln>
+                <a:noFill/>
+              </a:ln>
+              <a:effectLst/>
+            </c:spPr>
+            <c:txPr>
+              <a:bodyPr/>
+              <a:lstStyle/>
+              <a:p>
+                <a:pPr>
+                  <a:defRPr sz="1100" b="0" i="0" u="none" strike="noStrike">
+                    <a:solidFill>
+                      <a:srgbClr val="2B2124"/>
+                    </a:solidFill>
+                    <a:latin typeface="+mn-lt"/>
+                  </a:defRPr>
+                </a:pPr>
+                <a:endParaRPr lang="en-US"/>
+              </a:p>
+            </c:txPr>
+            <c:showLegendKey val="0"/>
+            <c:showVal val="1"/>
+            <c:showCatName val="0"/>
+            <c:showSerName val="0"/>
+            <c:showPercent val="0"/>
+            <c:showBubbleSize val="0"/>
+            <c:showLeaderLines val="0"/>
+            <c:extLst>
+              <c:ext xmlns:c15="http://schemas.microsoft.com/office/drawing/2012/chart" uri="{CE6537A1-D6FC-4f65-9D91-7224C49458BB}">
+                <c15:showLeaderLines val="0"/>
+              </c:ext>
+            </c:extLst>
+          </c:dLbls>
+          <c:cat>
+            <c:strRef>
+              <c:f>Sheet1!$A$2:$A$5</c:f>
+              <c:strCache>
+                <c:ptCount val="4"/>
+                <c:pt idx="0">
+                  <c:v>Clean</c:v>
+                </c:pt>
+                <c:pt idx="1">
+                  <c:v>Reworded</c:v>
+                </c:pt>
+                <c:pt idx="2">
+                  <c:v>+ ids rotated</c:v>
+                </c:pt>
+                <c:pt idx="3">
+                  <c:v>+ control moved</c:v>
+                </c:pt>
+              </c:strCache>
+            </c:strRef>
+          </c:cat>
+          <c:val>
+            <c:numRef>
+              <c:f>Sheet1!$B$2:$B$5</c:f>
+              <c:numCache>
+                <c:formatCode>General</c:formatCode>
+                <c:ptCount val="4"/>
+                <c:pt idx="0">
+                  <c:v>100</c:v>
+                </c:pt>
+                <c:pt idx="1">
+                  <c:v>0</c:v>
+                </c:pt>
+                <c:pt idx="2">
+                  <c:v>0</c:v>
+                </c:pt>
+                <c:pt idx="3">
+                  <c:v>0</c:v>
+                </c:pt>
+              </c:numCache>
+            </c:numRef>
+          </c:val>
+          <c:extLst>
+            <c:ext xmlns:c16="http://schemas.microsoft.com/office/drawing/2014/chart" uri="{C3380CC4-5D6E-409C-BE32-E72D297353CC}">
+              <c16:uniqueId val="{00000000-A1EC-4BED-B238-5E9041D49271}"/>
+            </c:ext>
+          </c:extLst>
+        </c:ser>
+        <c:ser>
+          <c:idx val="1"/>
+          <c:order val="1"/>
+          <c:tx>
+            <c:strRef>
+              <c:f>Sheet1!$C$1</c:f>
+              <c:strCache>
+                <c:ptCount val="1"/>
+                <c:pt idx="0">
+                  <c:v>Rules ladder</c:v>
+                </c:pt>
+              </c:strCache>
+            </c:strRef>
+          </c:tx>
+          <c:spPr>
+            <a:solidFill>
+              <a:srgbClr val="B8862F"/>
+            </a:solidFill>
+            <a:effectLst/>
+          </c:spPr>
+          <c:invertIfNegative val="0"/>
+          <c:dLbls>
+            <c:numFmt formatCode="0&quot;%&quot;" sourceLinked="0"/>
+            <c:spPr>
+              <a:noFill/>
+              <a:ln>
+                <a:noFill/>
+              </a:ln>
+              <a:effectLst/>
+            </c:spPr>
+            <c:txPr>
+              <a:bodyPr/>
+              <a:lstStyle/>
+              <a:p>
+                <a:pPr>
+                  <a:defRPr sz="1100" b="0" i="0" u="none" strike="noStrike">
+                    <a:solidFill>
+                      <a:srgbClr val="2B2124"/>
+                    </a:solidFill>
+                    <a:latin typeface="+mn-lt"/>
+                  </a:defRPr>
+                </a:pPr>
+                <a:endParaRPr lang="en-US"/>
+              </a:p>
+            </c:txPr>
+            <c:showLegendKey val="0"/>
+            <c:showVal val="1"/>
+            <c:showCatName val="0"/>
+            <c:showSerName val="0"/>
+            <c:showPercent val="0"/>
+            <c:showBubbleSize val="0"/>
+            <c:showLeaderLines val="0"/>
+            <c:extLst>
+              <c:ext xmlns:c15="http://schemas.microsoft.com/office/drawing/2012/chart" uri="{CE6537A1-D6FC-4f65-9D91-7224C49458BB}">
+                <c15:showLeaderLines val="0"/>
+              </c:ext>
+            </c:extLst>
+          </c:dLbls>
+          <c:cat>
+            <c:strRef>
+              <c:f>Sheet1!$A$2:$A$5</c:f>
+              <c:strCache>
+                <c:ptCount val="4"/>
+                <c:pt idx="0">
+                  <c:v>Clean</c:v>
+                </c:pt>
+                <c:pt idx="1">
+                  <c:v>Reworded</c:v>
+                </c:pt>
+                <c:pt idx="2">
+                  <c:v>+ ids rotated</c:v>
+                </c:pt>
+                <c:pt idx="3">
+                  <c:v>+ control moved</c:v>
+                </c:pt>
+              </c:strCache>
+            </c:strRef>
+          </c:cat>
+          <c:val>
+            <c:numRef>
+              <c:f>Sheet1!$C$2:$C$5</c:f>
+              <c:numCache>
+                <c:formatCode>General</c:formatCode>
+                <c:ptCount val="4"/>
+                <c:pt idx="0">
+                  <c:v>100</c:v>
+                </c:pt>
+                <c:pt idx="1">
+                  <c:v>100</c:v>
+                </c:pt>
+                <c:pt idx="2">
+                  <c:v>0</c:v>
+                </c:pt>
+                <c:pt idx="3">
+                  <c:v>0</c:v>
+                </c:pt>
+              </c:numCache>
+            </c:numRef>
+          </c:val>
+          <c:extLst>
+            <c:ext xmlns:c16="http://schemas.microsoft.com/office/drawing/2014/chart" uri="{C3380CC4-5D6E-409C-BE32-E72D297353CC}">
+              <c16:uniqueId val="{00000001-A1EC-4BED-B238-5E9041D49271}"/>
+            </c:ext>
+          </c:extLst>
+        </c:ser>
+        <c:ser>
+          <c:idx val="2"/>
+          <c:order val="2"/>
+          <c:tx>
+            <c:strRef>
+              <c:f>Sheet1!$D$1</c:f>
+              <c:strCache>
+                <c:ptCount val="1"/>
+                <c:pt idx="0">
+                  <c:v>Ladder + model + check</c:v>
+                </c:pt>
+              </c:strCache>
+            </c:strRef>
+          </c:tx>
+          <c:spPr>
+            <a:solidFill>
+              <a:srgbClr val="6B1A2A"/>
+            </a:solidFill>
+            <a:effectLst/>
+          </c:spPr>
+          <c:invertIfNegative val="0"/>
+          <c:dLbls>
+            <c:numFmt formatCode="0&quot;%&quot;" sourceLinked="0"/>
+            <c:spPr>
+              <a:noFill/>
+              <a:ln>
+                <a:noFill/>
+              </a:ln>
+              <a:effectLst/>
+            </c:spPr>
+            <c:txPr>
+              <a:bodyPr/>
+              <a:lstStyle/>
+              <a:p>
+                <a:pPr>
+                  <a:defRPr sz="1100" b="0" i="0" u="none" strike="noStrike">
+                    <a:solidFill>
+                      <a:srgbClr val="2B2124"/>
+                    </a:solidFill>
+                    <a:latin typeface="+mn-lt"/>
+                  </a:defRPr>
+                </a:pPr>
+                <a:endParaRPr lang="en-US"/>
+              </a:p>
+            </c:txPr>
+            <c:showLegendKey val="0"/>
+            <c:showVal val="1"/>
+            <c:showCatName val="0"/>
+            <c:showSerName val="0"/>
+            <c:showPercent val="0"/>
+            <c:showBubbleSize val="0"/>
+            <c:showLeaderLines val="0"/>
+            <c:extLst>
+              <c:ext xmlns:c15="http://schemas.microsoft.com/office/drawing/2012/chart" uri="{CE6537A1-D6FC-4f65-9D91-7224C49458BB}">
+                <c15:showLeaderLines val="0"/>
+              </c:ext>
+            </c:extLst>
+          </c:dLbls>
+          <c:cat>
+            <c:strRef>
+              <c:f>Sheet1!$A$2:$A$5</c:f>
+              <c:strCache>
+                <c:ptCount val="4"/>
+                <c:pt idx="0">
+                  <c:v>Clean</c:v>
+                </c:pt>
+                <c:pt idx="1">
+                  <c:v>Reworded</c:v>
+                </c:pt>
+                <c:pt idx="2">
+                  <c:v>+ ids rotated</c:v>
+                </c:pt>
+                <c:pt idx="3">
+                  <c:v>+ control moved</c:v>
+                </c:pt>
+              </c:strCache>
+            </c:strRef>
+          </c:cat>
+          <c:val>
+            <c:numRef>
+              <c:f>Sheet1!$D$2:$D$5</c:f>
+              <c:numCache>
+                <c:formatCode>General</c:formatCode>
+                <c:ptCount val="4"/>
+                <c:pt idx="0">
+                  <c:v>100</c:v>
+                </c:pt>
+                <c:pt idx="1">
+                  <c:v>100</c:v>
+                </c:pt>
+                <c:pt idx="2">
+                  <c:v>100</c:v>
+                </c:pt>
+                <c:pt idx="3">
+                  <c:v>100</c:v>
+                </c:pt>
+              </c:numCache>
+            </c:numRef>
+          </c:val>
+          <c:extLst>
+            <c:ext xmlns:c16="http://schemas.microsoft.com/office/drawing/2014/chart" uri="{C3380CC4-5D6E-409C-BE32-E72D297353CC}">
+              <c16:uniqueId val="{00000002-A1EC-4BED-B238-5E9041D49271}"/>
             </c:ext>
           </c:extLst>
         </c:ser>
@@ -1711,7 +2306,7 @@
     </p:spTree>
     <p:extLst>
       <p:ext uri="{BB962C8B-B14F-4D97-AF65-F5344CB8AC3E}">
-        <p14:creationId xmlns:p14="http://schemas.microsoft.com/office/powerpoint/2010/main" val="3943947233"/>
+        <p14:creationId xmlns:p14="http://schemas.microsoft.com/office/powerpoint/2010/main" val="3145715584"/>
       </p:ext>
     </p:extLst>
   </p:cSld>
@@ -2587,7 +3182,13 @@
   <p:cSld>
     <p:spTree>
       <p:nvGrpSpPr>
-        <p:cNvPr id="1" name=""/>
+        <p:cNvPr id="1" name="">
+          <a:extLst>
+            <a:ext uri="{FF2B5EF4-FFF2-40B4-BE49-F238E27FC236}">
+              <a16:creationId xmlns:a16="http://schemas.microsoft.com/office/drawing/2014/main" id="{B336A2E3-7C76-3EF0-8299-2474239F1130}"/>
+            </a:ext>
+          </a:extLst>
+        </p:cNvPr>
         <p:cNvGrpSpPr/>
         <p:nvPr/>
       </p:nvGrpSpPr>
@@ -2601,7 +3202,13 @@
       </p:grpSpPr>
       <p:sp>
         <p:nvSpPr>
-          <p:cNvPr id="2" name="Slide Image Placeholder 1"/>
+          <p:cNvPr id="2" name="Slide Image Placeholder 1">
+            <a:extLst>
+              <a:ext uri="{FF2B5EF4-FFF2-40B4-BE49-F238E27FC236}">
+                <a16:creationId xmlns:a16="http://schemas.microsoft.com/office/drawing/2014/main" id="{9B878DAB-19BD-948B-4B0C-21B56FAD0F53}"/>
+              </a:ext>
+            </a:extLst>
+          </p:cNvPr>
           <p:cNvSpPr>
             <a:spLocks noGrp="1" noRot="1" noChangeAspect="1"/>
           </p:cNvSpPr>
@@ -2613,7 +3220,13 @@
       </p:sp>
       <p:sp>
         <p:nvSpPr>
-          <p:cNvPr id="3" name="Notes Placeholder 2"/>
+          <p:cNvPr id="3" name="Notes Placeholder 2">
+            <a:extLst>
+              <a:ext uri="{FF2B5EF4-FFF2-40B4-BE49-F238E27FC236}">
+                <a16:creationId xmlns:a16="http://schemas.microsoft.com/office/drawing/2014/main" id="{35DBEBE1-2398-7329-924B-C5A9922C8508}"/>
+              </a:ext>
+            </a:extLst>
+          </p:cNvPr>
           <p:cNvSpPr>
             <a:spLocks noGrp="1"/>
           </p:cNvSpPr>
@@ -2632,7 +3245,13 @@
       </p:sp>
       <p:sp>
         <p:nvSpPr>
-          <p:cNvPr id="4" name="Slide Number Placeholder 3"/>
+          <p:cNvPr id="4" name="Slide Number Placeholder 3">
+            <a:extLst>
+              <a:ext uri="{FF2B5EF4-FFF2-40B4-BE49-F238E27FC236}">
+                <a16:creationId xmlns:a16="http://schemas.microsoft.com/office/drawing/2014/main" id="{046A0095-B578-EC13-193B-9B0F8EE002B6}"/>
+              </a:ext>
+            </a:extLst>
+          </p:cNvPr>
           <p:cNvSpPr>
             <a:spLocks noGrp="1"/>
           </p:cNvSpPr>
@@ -2656,91 +3275,7 @@
     </p:spTree>
     <p:extLst>
       <p:ext uri="{BB962C8B-B14F-4D97-AF65-F5344CB8AC3E}">
-        <p14:creationId xmlns:p14="http://schemas.microsoft.com/office/powerpoint/2010/main" val="1024086991"/>
-      </p:ext>
-    </p:extLst>
-  </p:cSld>
-  <p:clrMapOvr>
-    <a:masterClrMapping/>
-  </p:clrMapOvr>
-</p:notes>
-</file>
-
-<file path=ppt/notesSlides/notesSlide19.xml><?xml version="1.0" encoding="utf-8"?>
-<p:notes xmlns:a="http://schemas.openxmlformats.org/drawingml/2006/main" xmlns:r="http://schemas.openxmlformats.org/officeDocument/2006/relationships" xmlns:p="http://schemas.openxmlformats.org/presentationml/2006/main">
-  <p:cSld>
-    <p:spTree>
-      <p:nvGrpSpPr>
-        <p:cNvPr id="1" name=""/>
-        <p:cNvGrpSpPr/>
-        <p:nvPr/>
-      </p:nvGrpSpPr>
-      <p:grpSpPr>
-        <a:xfrm>
-          <a:off x="0" y="0"/>
-          <a:ext cx="0" cy="0"/>
-          <a:chOff x="0" y="0"/>
-          <a:chExt cx="0" cy="0"/>
-        </a:xfrm>
-      </p:grpSpPr>
-      <p:sp>
-        <p:nvSpPr>
-          <p:cNvPr id="2" name="Slide Image Placeholder 1"/>
-          <p:cNvSpPr>
-            <a:spLocks noGrp="1" noRot="1" noChangeAspect="1"/>
-          </p:cNvSpPr>
-          <p:nvPr>
-            <p:ph type="sldImg"/>
-          </p:nvPr>
-        </p:nvSpPr>
-        <p:spPr/>
-      </p:sp>
-      <p:sp>
-        <p:nvSpPr>
-          <p:cNvPr id="3" name="Notes Placeholder 2"/>
-          <p:cNvSpPr>
-            <a:spLocks noGrp="1"/>
-          </p:cNvSpPr>
-          <p:nvPr>
-            <p:ph type="body" idx="1"/>
-          </p:nvPr>
-        </p:nvSpPr>
-        <p:spPr/>
-        <p:txBody>
-          <a:bodyPr/>
-          <a:lstStyle/>
-          <a:p>
-            <a:endParaRPr lang="en-US" dirty="0"/>
-          </a:p>
-        </p:txBody>
-      </p:sp>
-      <p:sp>
-        <p:nvSpPr>
-          <p:cNvPr id="4" name="Slide Number Placeholder 3"/>
-          <p:cNvSpPr>
-            <a:spLocks noGrp="1"/>
-          </p:cNvSpPr>
-          <p:nvPr>
-            <p:ph type="sldNum" sz="quarter" idx="10"/>
-          </p:nvPr>
-        </p:nvSpPr>
-        <p:spPr/>
-        <p:txBody>
-          <a:bodyPr/>
-          <a:lstStyle/>
-          <a:p>
-            <a:fld id="{F7021451-1387-4CA6-816F-3879F97B5CBC}" type="slidenum">
-              <a:rPr lang="en-US"/>
-              <a:t>19</a:t>
-            </a:fld>
-            <a:endParaRPr lang="en-US"/>
-          </a:p>
-        </p:txBody>
-      </p:sp>
-    </p:spTree>
-    <p:extLst>
-      <p:ext uri="{BB962C8B-B14F-4D97-AF65-F5344CB8AC3E}">
-        <p14:creationId xmlns:p14="http://schemas.microsoft.com/office/powerpoint/2010/main" val="1024086991"/>
+        <p14:creationId xmlns:p14="http://schemas.microsoft.com/office/powerpoint/2010/main" val="3371133849"/>
       </p:ext>
     </p:extLst>
   </p:cSld>
@@ -2796,7 +3331,7 @@
           <a:p>
             <a:r>
               <a:rPr lang="en-US" dirty="0"/>
-              <a:t>1:30. Motivation. Keep it human: the user who cannot take over. The 78% to 2% figure is from hierdump on stock Android Settings (name-aware figure is the one we quote).</a:t>
+              <a:t>2:00. Fill the ISECOM bullets from the team before presenting. Synthie description is from one instance's own account (Hematite); say so if asked. Flow: the synthie says a goal, the tool does the screen work, a plain-words result comes back.</a:t>
             </a:r>
           </a:p>
         </p:txBody>
@@ -2970,7 +3505,7 @@
           <a:p>
             <a:r>
               <a:rPr lang="en-US" dirty="0"/>
-              <a:t>2:00. Fill the ISECOM bullets from the team before presenting. Synthie description is from one instance's own account (Hematite); say so if asked. Flow: the synthie says a goal, the tool does the screen work, a plain-words result comes back.</a:t>
+              <a:t>1:30. Motivation. Keep it human: the user who cannot take over. The 78% to 2% figure is from hierdump on stock Android Settings (name-aware figure is the one we quote).</a:t>
             </a:r>
           </a:p>
         </p:txBody>
@@ -3572,7 +4107,7 @@
                   <a:schemeClr val="accent4"/>
                 </a:solidFill>
               </a:rPr>
-              <a:t>IBA Karachi  ·  Final Year Project  ·  Kenna</a:t>
+              <a:t>IBA Karachi  ·  Final Year Project  ·  Beyond MCPs</a:t>
             </a:r>
             <a:endParaRPr lang="en-US" sz="1000" dirty="0"/>
           </a:p>
@@ -3598,7 +4133,7 @@
           </a:prstGeom>
           <a:extLst>
             <a:ext uri="{C572A759-6A51-4108-AA02-DFA0A04FC94B}">
-              <ma14:wrappingTextBoxFlag xmlns="" xmlns:ma14="http://schemas.microsoft.com/office/mac/drawingml/2011/main" val="0"/>
+              <ma14:wrappingTextBoxFlag xmlns:ma14="http://schemas.microsoft.com/office/mac/drawingml/2011/main" xmlns="" val="0"/>
             </a:ext>
           </a:extLst>
         </p:spPr>
@@ -3747,7 +4282,7 @@
           </a:prstGeom>
           <a:extLst>
             <a:ext uri="{C572A759-6A51-4108-AA02-DFA0A04FC94B}">
-              <ma14:wrappingTextBoxFlag xmlns="" xmlns:ma14="http://schemas.microsoft.com/office/mac/drawingml/2011/main" val="0"/>
+              <ma14:wrappingTextBoxFlag xmlns:ma14="http://schemas.microsoft.com/office/mac/drawingml/2011/main" xmlns="" val="0"/>
             </a:ext>
           </a:extLst>
         </p:spPr>
@@ -4121,7 +4656,23 @@
                   <a:schemeClr val="bg1"/>
                 </a:solidFill>
               </a:rPr>
-              <a:t>Self-healing, verified GUI automation for accessible AI assistants</a:t>
+              <a:t>Beyond </a:t>
+            </a:r>
+            <a:r>
+              <a:rPr lang="en-US" sz="4000" b="1">
+                <a:solidFill>
+                  <a:schemeClr val="bg1"/>
+                </a:solidFill>
+              </a:rPr>
+              <a:t>MCPs: Self-healing</a:t>
+            </a:r>
+            <a:r>
+              <a:rPr lang="en-US" sz="4000" b="1" dirty="0">
+                <a:solidFill>
+                  <a:schemeClr val="bg1"/>
+                </a:solidFill>
+              </a:rPr>
+              <a:t>, verified GUI automation for accessible AI assistants</a:t>
             </a:r>
             <a:endParaRPr lang="en-US" sz="4000" dirty="0"/>
           </a:p>
@@ -4343,7 +4894,7 @@
                   <a:schemeClr val="accent5"/>
                 </a:solidFill>
               </a:rPr>
-              <a:t>Supervisor: Faisal </a:t>
+              <a:t>Supervisor: Dr. Faisal </a:t>
             </a:r>
             <a:r>
               <a:rPr lang="en-US" sz="1400" dirty="0" err="1">
@@ -4370,7 +4921,7 @@
           <p:cNvPr id="14" name="Picture 13">
             <a:extLst>
               <a:ext uri="{FF2B5EF4-FFF2-40B4-BE49-F238E27FC236}">
-                <a16:creationId xmlns:a16="http://schemas.microsoft.com/office/drawing/2014/main" id="{86917E86-0BF3-AD16-A6C7-301C9611AE56}"/>
+                <a16:creationId xmlns:a16="http://schemas.microsoft.com/office/drawing/2014/main" id="{2D9F7546-AB5A-E088-94E8-350926585F49}"/>
               </a:ext>
             </a:extLst>
           </p:cNvPr>
@@ -4397,10 +4948,10 @@
       </p:pic>
       <p:sp>
         <p:nvSpPr>
-          <p:cNvPr id="17" name="Rectangle 16">
+          <p:cNvPr id="16" name="Rectangle 15">
             <a:extLst>
               <a:ext uri="{FF2B5EF4-FFF2-40B4-BE49-F238E27FC236}">
-                <a16:creationId xmlns:a16="http://schemas.microsoft.com/office/drawing/2014/main" id="{333BEC9B-6A31-EA8A-051D-C032C5B804B7}"/>
+                <a16:creationId xmlns:a16="http://schemas.microsoft.com/office/drawing/2014/main" id="{CF8A7000-D50C-DD71-22BD-187EE8FAB1E3}"/>
               </a:ext>
             </a:extLst>
           </p:cNvPr>
@@ -4441,10 +4992,10 @@
       </p:sp>
       <p:pic>
         <p:nvPicPr>
-          <p:cNvPr id="16" name="Picture 15">
+          <p:cNvPr id="18" name="Picture 17">
             <a:extLst>
               <a:ext uri="{FF2B5EF4-FFF2-40B4-BE49-F238E27FC236}">
-                <a16:creationId xmlns:a16="http://schemas.microsoft.com/office/drawing/2014/main" id="{5C73AF20-D7B0-D30B-72A2-AE2E980CC268}"/>
+                <a16:creationId xmlns:a16="http://schemas.microsoft.com/office/drawing/2014/main" id="{68251667-0112-B6D1-17CF-8C1FAF2756A7}"/>
               </a:ext>
             </a:extLst>
           </p:cNvPr>
@@ -4573,9 +5124,148 @@
           </a:p>
         </p:txBody>
       </p:sp>
+      <p:sp>
+        <p:nvSpPr>
+          <p:cNvPr id="5" name="Text 2"/>
+          <p:cNvSpPr txBox="1"/>
+          <p:nvPr/>
+        </p:nvSpPr>
+        <p:spPr>
+          <a:xfrm>
+            <a:off x="548640" y="1645920"/>
+            <a:ext cx="5852160" cy="274320"/>
+          </a:xfrm>
+          <a:prstGeom prst="rect">
+            <a:avLst/>
+          </a:prstGeom>
+          <a:noFill/>
+          <a:ln/>
+        </p:spPr>
+        <p:txBody>
+          <a:bodyPr wrap="square" lIns="0" tIns="0" rIns="0" bIns="0" rtlCol="0" anchor="t"/>
+          <a:lstStyle/>
+          <a:p>
+            <a:pPr marL="0" indent="0">
+              <a:buNone/>
+            </a:pPr>
+            <a:r>
+              <a:rPr lang="en-US" sz="1400" b="1" dirty="0">
+                <a:solidFill>
+                  <a:schemeClr val="tx2"/>
+                </a:solidFill>
+              </a:rPr>
+              <a:t>Web: flows completed (N = 10)</a:t>
+            </a:r>
+            <a:endParaRPr lang="en-US" sz="1400" dirty="0"/>
+          </a:p>
+        </p:txBody>
+      </p:sp>
+      <p:sp>
+        <p:nvSpPr>
+          <p:cNvPr id="6" name="Text 3"/>
+          <p:cNvSpPr txBox="1"/>
+          <p:nvPr/>
+        </p:nvSpPr>
+        <p:spPr>
+          <a:xfrm>
+            <a:off x="6583680" y="1645920"/>
+            <a:ext cx="5056632" cy="274320"/>
+          </a:xfrm>
+          <a:prstGeom prst="rect">
+            <a:avLst/>
+          </a:prstGeom>
+          <a:noFill/>
+          <a:ln/>
+        </p:spPr>
+        <p:txBody>
+          <a:bodyPr wrap="square" lIns="0" tIns="0" rIns="0" bIns="0" rtlCol="0" anchor="t"/>
+          <a:lstStyle/>
+          <a:p>
+            <a:pPr marL="0" indent="0">
+              <a:buNone/>
+            </a:pPr>
+            <a:r>
+              <a:rPr lang="en-US" sz="1400" b="1" dirty="0">
+                <a:solidFill>
+                  <a:schemeClr val="tx2"/>
+                </a:solidFill>
+              </a:rPr>
+              <a:t>Android Settings: real drift (10 intents)</a:t>
+            </a:r>
+            <a:endParaRPr lang="en-US" sz="1400" dirty="0"/>
+          </a:p>
+        </p:txBody>
+      </p:sp>
       <p:graphicFrame>
         <p:nvGraphicFramePr>
-          <p:cNvPr id="4" name="Chart 0"/>
+          <p:cNvPr id="7" name="Chart 1"/>
+          <p:cNvGraphicFramePr/>
+          <p:nvPr/>
+        </p:nvGraphicFramePr>
+        <p:xfrm>
+          <a:off x="6583680" y="2011680"/>
+          <a:ext cx="5056632" cy="3886200"/>
+        </p:xfrm>
+        <a:graphic>
+          <a:graphicData uri="http://schemas.openxmlformats.org/drawingml/2006/chart">
+            <c:chart xmlns:c="http://schemas.openxmlformats.org/drawingml/2006/chart" xmlns:r="http://schemas.openxmlformats.org/officeDocument/2006/relationships" r:id="rId3"/>
+          </a:graphicData>
+        </a:graphic>
+      </p:graphicFrame>
+      <p:sp>
+        <p:nvSpPr>
+          <p:cNvPr id="25" name="Slide Number Placeholder 0"/>
+          <p:cNvSpPr>
+            <a:spLocks noGrp="1"/>
+          </p:cNvSpPr>
+          <p:nvPr>
+            <p:ph type="sldNum" sz="quarter" idx="4294967295"/>
+          </p:nvPr>
+        </p:nvSpPr>
+        <p:spPr>
+          <a:xfrm>
+            <a:off x="11094415" y="6419088"/>
+            <a:ext cx="548640" cy="274320"/>
+          </a:xfrm>
+          <a:prstGeom prst="rect">
+            <a:avLst/>
+          </a:prstGeom>
+          <a:extLst>
+            <a:ext uri="{C572A759-6A51-4108-AA02-DFA0A04FC94B}">
+              <ma14:wrappingTextBoxFlag xmlns:ma14="http://schemas.microsoft.com/office/mac/drawingml/2011/main" xmlns="" val="0"/>
+            </a:ext>
+          </a:extLst>
+        </p:spPr>
+        <p:txBody>
+          <a:bodyPr/>
+          <a:lstStyle>
+            <a:lvl1pPr>
+              <a:defRPr sz="1000">
+                <a:solidFill>
+                  <a:schemeClr val="accent4"/>
+                </a:solidFill>
+              </a:defRPr>
+            </a:lvl1pPr>
+          </a:lstStyle>
+          <a:p>
+            <a:pPr algn="r"/>
+            <a:fld id="{F7021451-1387-4CA6-816F-3879F97B5CBC}" type="slidenum">
+              <a:rPr lang="en-US" b="0"/>
+              <a:t>10</a:t>
+            </a:fld>
+            <a:endParaRPr lang="en-US"/>
+          </a:p>
+        </p:txBody>
+      </p:sp>
+      <p:graphicFrame>
+        <p:nvGraphicFramePr>
+          <p:cNvPr id="12" name="Chart 0">
+            <a:extLst>
+              <a:ext uri="{FF2B5EF4-FFF2-40B4-BE49-F238E27FC236}">
+                <a16:creationId xmlns:a16="http://schemas.microsoft.com/office/drawing/2014/main" id="{6510A8D3-21B1-DC6C-4F48-6D43F8FF6503}"/>
+              </a:ext>
+            </a:extLst>
+          </p:cNvPr>
           <p:cNvGraphicFramePr/>
           <p:nvPr/>
         </p:nvGraphicFramePr>
@@ -4585,244 +5275,10 @@
         </p:xfrm>
         <a:graphic>
           <a:graphicData uri="http://schemas.openxmlformats.org/drawingml/2006/chart">
-            <c:chart xmlns:c="http://schemas.openxmlformats.org/drawingml/2006/chart" xmlns:r="http://schemas.openxmlformats.org/officeDocument/2006/relationships" r:id="rId3"/>
-          </a:graphicData>
-        </a:graphic>
-      </p:graphicFrame>
-      <p:sp>
-        <p:nvSpPr>
-          <p:cNvPr id="5" name="Text 2"/>
-          <p:cNvSpPr txBox="1"/>
-          <p:nvPr/>
-        </p:nvSpPr>
-        <p:spPr>
-          <a:xfrm>
-            <a:off x="548640" y="1645920"/>
-            <a:ext cx="5852160" cy="274320"/>
-          </a:xfrm>
-          <a:prstGeom prst="rect">
-            <a:avLst/>
-          </a:prstGeom>
-          <a:noFill/>
-          <a:ln/>
-        </p:spPr>
-        <p:txBody>
-          <a:bodyPr wrap="square" lIns="0" tIns="0" rIns="0" bIns="0" rtlCol="0" anchor="t"/>
-          <a:lstStyle/>
-          <a:p>
-            <a:pPr marL="0" indent="0">
-              <a:buNone/>
-            </a:pPr>
-            <a:r>
-              <a:rPr lang="en-US" sz="1400" b="1" dirty="0">
-                <a:solidFill>
-                  <a:schemeClr val="tx2"/>
-                </a:solidFill>
-              </a:rPr>
-              <a:t>Web: flows completed (N = 10)</a:t>
-            </a:r>
-            <a:endParaRPr lang="en-US" sz="1400" dirty="0"/>
-          </a:p>
-        </p:txBody>
-      </p:sp>
-      <p:sp>
-        <p:nvSpPr>
-          <p:cNvPr id="6" name="Text 3"/>
-          <p:cNvSpPr txBox="1"/>
-          <p:nvPr/>
-        </p:nvSpPr>
-        <p:spPr>
-          <a:xfrm>
-            <a:off x="6583680" y="1645920"/>
-            <a:ext cx="5056632" cy="274320"/>
-          </a:xfrm>
-          <a:prstGeom prst="rect">
-            <a:avLst/>
-          </a:prstGeom>
-          <a:noFill/>
-          <a:ln/>
-        </p:spPr>
-        <p:txBody>
-          <a:bodyPr wrap="square" lIns="0" tIns="0" rIns="0" bIns="0" rtlCol="0" anchor="t"/>
-          <a:lstStyle/>
-          <a:p>
-            <a:pPr marL="0" indent="0">
-              <a:buNone/>
-            </a:pPr>
-            <a:r>
-              <a:rPr lang="en-US" sz="1400" b="1" dirty="0">
-                <a:solidFill>
-                  <a:schemeClr val="tx2"/>
-                </a:solidFill>
-              </a:rPr>
-              <a:t>Android Settings: real drift (10 intents)</a:t>
-            </a:r>
-            <a:endParaRPr lang="en-US" sz="1400" dirty="0"/>
-          </a:p>
-        </p:txBody>
-      </p:sp>
-      <p:graphicFrame>
-        <p:nvGraphicFramePr>
-          <p:cNvPr id="7" name="Chart 1"/>
-          <p:cNvGraphicFramePr/>
-          <p:nvPr/>
-        </p:nvGraphicFramePr>
-        <p:xfrm>
-          <a:off x="6583680" y="2011680"/>
-          <a:ext cx="5056632" cy="3886200"/>
-        </p:xfrm>
-        <a:graphic>
-          <a:graphicData uri="http://schemas.openxmlformats.org/drawingml/2006/chart">
             <c:chart xmlns:c="http://schemas.openxmlformats.org/drawingml/2006/chart" xmlns:r="http://schemas.openxmlformats.org/officeDocument/2006/relationships" r:id="rId4"/>
           </a:graphicData>
         </a:graphic>
       </p:graphicFrame>
-      <p:sp>
-        <p:nvSpPr>
-          <p:cNvPr id="8" name="Shape 4"/>
-          <p:cNvSpPr/>
-          <p:nvPr/>
-        </p:nvSpPr>
-        <p:spPr>
-          <a:xfrm>
-            <a:off x="548640" y="5989320"/>
-            <a:ext cx="3657600" cy="274320"/>
-          </a:xfrm>
-          <a:prstGeom prst="roundRect">
-            <a:avLst>
-              <a:gd name="adj" fmla="val 50000"/>
-            </a:avLst>
-          </a:prstGeom>
-          <a:solidFill>
-            <a:srgbClr val="FBEFD5"/>
-          </a:solidFill>
-          <a:ln/>
-        </p:spPr>
-        <p:txBody>
-          <a:bodyPr/>
-          <a:lstStyle/>
-          <a:p>
-            <a:endParaRPr lang="en-US"/>
-          </a:p>
-        </p:txBody>
-      </p:sp>
-      <p:sp>
-        <p:nvSpPr>
-          <p:cNvPr id="9" name="Text 5"/>
-          <p:cNvSpPr txBox="1"/>
-          <p:nvPr/>
-        </p:nvSpPr>
-        <p:spPr>
-          <a:xfrm>
-            <a:off x="548640" y="5989320"/>
-            <a:ext cx="3657600" cy="274320"/>
-          </a:xfrm>
-          <a:prstGeom prst="rect">
-            <a:avLst/>
-          </a:prstGeom>
-          <a:noFill/>
-          <a:ln/>
-        </p:spPr>
-        <p:txBody>
-          <a:bodyPr wrap="square" lIns="0" tIns="0" rIns="0" bIns="0" rtlCol="0" anchor="ctr"/>
-          <a:lstStyle/>
-          <a:p>
-            <a:pPr marL="0" indent="0" algn="ctr">
-              <a:buNone/>
-            </a:pPr>
-            <a:r>
-              <a:rPr lang="en-US" sz="1100" b="1" dirty="0">
-                <a:solidFill>
-                  <a:srgbClr val="8A5A00"/>
-                </a:solidFill>
-              </a:rPr>
-              <a:t>WEB CHART ILLUSTRATIVE – BEING RE-RUN</a:t>
-            </a:r>
-            <a:endParaRPr lang="en-US" sz="1100" dirty="0"/>
-          </a:p>
-        </p:txBody>
-      </p:sp>
-      <p:sp>
-        <p:nvSpPr>
-          <p:cNvPr id="10" name="Text 6"/>
-          <p:cNvSpPr txBox="1"/>
-          <p:nvPr/>
-        </p:nvSpPr>
-        <p:spPr>
-          <a:xfrm>
-            <a:off x="6583680" y="5989320"/>
-            <a:ext cx="5056632" cy="365760"/>
-          </a:xfrm>
-          <a:prstGeom prst="rect">
-            <a:avLst/>
-          </a:prstGeom>
-          <a:noFill/>
-          <a:ln/>
-        </p:spPr>
-        <p:txBody>
-          <a:bodyPr wrap="square" lIns="0" tIns="0" rIns="0" bIns="0" rtlCol="0" anchor="t"/>
-          <a:lstStyle/>
-          <a:p>
-            <a:pPr marL="0" indent="0">
-              <a:buNone/>
-            </a:pPr>
-            <a:r>
-              <a:rPr lang="en-US" sz="1100" dirty="0">
-                <a:solidFill>
-                  <a:schemeClr val="accent4"/>
-                </a:solidFill>
-              </a:rPr>
-              <a:t>Android bars are measured. Large font: two rows fall below the fold and no arm scrolls (known gap).</a:t>
-            </a:r>
-            <a:endParaRPr lang="en-US" sz="1100" dirty="0"/>
-          </a:p>
-        </p:txBody>
-      </p:sp>
-      <p:sp>
-        <p:nvSpPr>
-          <p:cNvPr id="25" name="Slide Number Placeholder 0"/>
-          <p:cNvSpPr>
-            <a:spLocks noGrp="1"/>
-          </p:cNvSpPr>
-          <p:nvPr>
-            <p:ph type="sldNum" sz="quarter" idx="4294967295"/>
-          </p:nvPr>
-        </p:nvSpPr>
-        <p:spPr>
-          <a:xfrm>
-            <a:off x="11094415" y="6419088"/>
-            <a:ext cx="548640" cy="274320"/>
-          </a:xfrm>
-          <a:prstGeom prst="rect">
-            <a:avLst/>
-          </a:prstGeom>
-          <a:extLst>
-            <a:ext uri="{C572A759-6A51-4108-AA02-DFA0A04FC94B}">
-              <ma14:wrappingTextBoxFlag xmlns="" xmlns:ma14="http://schemas.microsoft.com/office/mac/drawingml/2011/main" val="0"/>
-            </a:ext>
-          </a:extLst>
-        </p:spPr>
-        <p:txBody>
-          <a:bodyPr/>
-          <a:lstStyle>
-            <a:lvl1pPr>
-              <a:defRPr sz="1000">
-                <a:solidFill>
-                  <a:schemeClr val="accent4"/>
-                </a:solidFill>
-              </a:defRPr>
-            </a:lvl1pPr>
-          </a:lstStyle>
-          <a:p>
-            <a:pPr algn="r"/>
-            <a:fld id="{F7021451-1387-4CA6-816F-3879F97B5CBC}" type="slidenum">
-              <a:rPr lang="en-US" b="0"/>
-              <a:t>10</a:t>
-            </a:fld>
-            <a:endParaRPr lang="en-US"/>
-          </a:p>
-        </p:txBody>
-      </p:sp>
     </p:spTree>
   </p:cSld>
   <p:clrMapOvr>
@@ -6152,7 +6608,7 @@
           </a:prstGeom>
           <a:extLst>
             <a:ext uri="{C572A759-6A51-4108-AA02-DFA0A04FC94B}">
-              <ma14:wrappingTextBoxFlag xmlns="" xmlns:ma14="http://schemas.microsoft.com/office/mac/drawingml/2011/main" val="0"/>
+              <ma14:wrappingTextBoxFlag xmlns:ma14="http://schemas.microsoft.com/office/mac/drawingml/2011/main" xmlns="" val="0"/>
             </a:ext>
           </a:extLst>
         </p:spPr>
@@ -6689,7 +7145,7 @@
           </a:prstGeom>
           <a:extLst>
             <a:ext uri="{C572A759-6A51-4108-AA02-DFA0A04FC94B}">
-              <ma14:wrappingTextBoxFlag xmlns="" xmlns:ma14="http://schemas.microsoft.com/office/mac/drawingml/2011/main" val="0"/>
+              <ma14:wrappingTextBoxFlag xmlns:ma14="http://schemas.microsoft.com/office/mac/drawingml/2011/main" xmlns="" val="0"/>
             </a:ext>
           </a:extLst>
         </p:spPr>
@@ -7202,18 +7658,10 @@
           <a:bodyPr wrap="square" lIns="0" tIns="0" rIns="0" bIns="0" rtlCol="0" anchor="ctr"/>
           <a:lstStyle/>
           <a:p>
-            <a:pPr marL="0" indent="0">
-              <a:buNone/>
-            </a:pPr>
-            <a:r>
-              <a:rPr lang="en-US" sz="1600" dirty="0">
-                <a:solidFill>
-                  <a:schemeClr val="tx1"/>
-                </a:solidFill>
-              </a:rPr>
-              <a:t>Scrolling on Android</a:t>
-            </a:r>
-            <a:endParaRPr lang="en-US" sz="1600" dirty="0"/>
+            <a:r>
+              <a:rPr lang="en-US" sz="1600" dirty="0"/>
+              <a:t>A study with screen-reader users</a:t>
+            </a:r>
           </a:p>
         </p:txBody>
       </p:sp>
@@ -7265,207 +7713,10 @@
           <a:bodyPr wrap="square" lIns="0" tIns="0" rIns="0" bIns="0" rtlCol="0" anchor="ctr"/>
           <a:lstStyle/>
           <a:p>
-            <a:pPr marL="0" indent="0">
-              <a:buNone/>
-            </a:pPr>
-            <a:r>
-              <a:rPr lang="en-US" sz="1600" dirty="0">
-                <a:solidFill>
-                  <a:schemeClr val="tx1"/>
-                </a:solidFill>
-              </a:rPr>
-              <a:t>A second model</a:t>
-            </a:r>
-            <a:endParaRPr lang="en-US" sz="1600" dirty="0"/>
-          </a:p>
-        </p:txBody>
-      </p:sp>
-      <p:sp>
-        <p:nvSpPr>
-          <p:cNvPr id="18" name="next dot 3"/>
-          <p:cNvSpPr/>
-          <p:nvPr/>
-        </p:nvSpPr>
-        <p:spPr>
-          <a:xfrm>
-            <a:off x="8046720" y="4416552"/>
-            <a:ext cx="256032" cy="256032"/>
-          </a:xfrm>
-          <a:prstGeom prst="ellipse">
-            <a:avLst/>
-          </a:prstGeom>
-          <a:solidFill>
-            <a:schemeClr val="accent1"/>
-          </a:solidFill>
-          <a:ln/>
-        </p:spPr>
-        <p:txBody>
-          <a:bodyPr/>
-          <a:lstStyle/>
-          <a:p>
-            <a:endParaRPr lang="en-US"/>
-          </a:p>
-        </p:txBody>
-      </p:sp>
-      <p:sp>
-        <p:nvSpPr>
-          <p:cNvPr id="19" name="Text 17"/>
-          <p:cNvSpPr txBox="1"/>
-          <p:nvPr/>
-        </p:nvSpPr>
-        <p:spPr>
-          <a:xfrm>
-            <a:off x="8458200" y="4343400"/>
-            <a:ext cx="3108960" cy="411480"/>
-          </a:xfrm>
-          <a:prstGeom prst="rect">
-            <a:avLst/>
-          </a:prstGeom>
-          <a:noFill/>
-          <a:ln/>
-        </p:spPr>
-        <p:txBody>
-          <a:bodyPr wrap="square" lIns="0" tIns="0" rIns="0" bIns="0" rtlCol="0" anchor="ctr"/>
-          <a:lstStyle/>
-          <a:p>
-            <a:pPr marL="0" indent="0">
-              <a:buNone/>
-            </a:pPr>
-            <a:r>
-              <a:rPr lang="en-US" sz="1600" dirty="0">
-                <a:solidFill>
-                  <a:schemeClr val="tx1"/>
-                </a:solidFill>
-              </a:rPr>
+            <a:r>
+              <a:rPr lang="en-US" sz="1600" dirty="0"/>
               <a:t>More apps and intents</a:t>
             </a:r>
-            <a:endParaRPr lang="en-US" sz="1600" dirty="0"/>
-          </a:p>
-        </p:txBody>
-      </p:sp>
-      <p:sp>
-        <p:nvSpPr>
-          <p:cNvPr id="20" name="next dot 4"/>
-          <p:cNvSpPr/>
-          <p:nvPr/>
-        </p:nvSpPr>
-        <p:spPr>
-          <a:xfrm>
-            <a:off x="548640" y="5193792"/>
-            <a:ext cx="256032" cy="256032"/>
-          </a:xfrm>
-          <a:prstGeom prst="ellipse">
-            <a:avLst/>
-          </a:prstGeom>
-          <a:solidFill>
-            <a:schemeClr val="accent1"/>
-          </a:solidFill>
-          <a:ln/>
-        </p:spPr>
-        <p:txBody>
-          <a:bodyPr/>
-          <a:lstStyle/>
-          <a:p>
-            <a:endParaRPr lang="en-US"/>
-          </a:p>
-        </p:txBody>
-      </p:sp>
-      <p:sp>
-        <p:nvSpPr>
-          <p:cNvPr id="21" name="Text 19"/>
-          <p:cNvSpPr txBox="1"/>
-          <p:nvPr/>
-        </p:nvSpPr>
-        <p:spPr>
-          <a:xfrm>
-            <a:off x="960120" y="5120640"/>
-            <a:ext cx="3108960" cy="411480"/>
-          </a:xfrm>
-          <a:prstGeom prst="rect">
-            <a:avLst/>
-          </a:prstGeom>
-          <a:noFill/>
-          <a:ln/>
-        </p:spPr>
-        <p:txBody>
-          <a:bodyPr wrap="square" lIns="0" tIns="0" rIns="0" bIns="0" rtlCol="0" anchor="ctr"/>
-          <a:lstStyle/>
-          <a:p>
-            <a:pPr marL="0" indent="0">
-              <a:buNone/>
-            </a:pPr>
-            <a:r>
-              <a:rPr lang="en-US" sz="1600" dirty="0">
-                <a:solidFill>
-                  <a:schemeClr val="tx1"/>
-                </a:solidFill>
-              </a:rPr>
-              <a:t>A study with screen-reader users</a:t>
-            </a:r>
-            <a:endParaRPr lang="en-US" sz="1600" dirty="0"/>
-          </a:p>
-        </p:txBody>
-      </p:sp>
-      <p:sp>
-        <p:nvSpPr>
-          <p:cNvPr id="22" name="next dot 5"/>
-          <p:cNvSpPr/>
-          <p:nvPr/>
-        </p:nvSpPr>
-        <p:spPr>
-          <a:xfrm>
-            <a:off x="4297680" y="5193792"/>
-            <a:ext cx="256032" cy="256032"/>
-          </a:xfrm>
-          <a:prstGeom prst="ellipse">
-            <a:avLst/>
-          </a:prstGeom>
-          <a:solidFill>
-            <a:schemeClr val="accent1"/>
-          </a:solidFill>
-          <a:ln/>
-        </p:spPr>
-        <p:txBody>
-          <a:bodyPr/>
-          <a:lstStyle/>
-          <a:p>
-            <a:endParaRPr lang="en-US"/>
-          </a:p>
-        </p:txBody>
-      </p:sp>
-      <p:sp>
-        <p:nvSpPr>
-          <p:cNvPr id="23" name="Text 21"/>
-          <p:cNvSpPr txBox="1"/>
-          <p:nvPr/>
-        </p:nvSpPr>
-        <p:spPr>
-          <a:xfrm>
-            <a:off x="4709160" y="5120640"/>
-            <a:ext cx="3108960" cy="411480"/>
-          </a:xfrm>
-          <a:prstGeom prst="rect">
-            <a:avLst/>
-          </a:prstGeom>
-          <a:noFill/>
-          <a:ln/>
-        </p:spPr>
-        <p:txBody>
-          <a:bodyPr wrap="square" lIns="0" tIns="0" rIns="0" bIns="0" rtlCol="0" anchor="ctr"/>
-          <a:lstStyle/>
-          <a:p>
-            <a:pPr marL="0" indent="0">
-              <a:buNone/>
-            </a:pPr>
-            <a:r>
-              <a:rPr lang="en-US" sz="1600" dirty="0">
-                <a:solidFill>
-                  <a:schemeClr val="tx1"/>
-                </a:solidFill>
-              </a:rPr>
-              <a:t>A synthie using the tool end to end</a:t>
-            </a:r>
-            <a:endParaRPr lang="en-US" sz="1600" dirty="0"/>
           </a:p>
         </p:txBody>
       </p:sp>
@@ -7489,7 +7740,7 @@
           </a:prstGeom>
           <a:extLst>
             <a:ext uri="{C572A759-6A51-4108-AA02-DFA0A04FC94B}">
-              <ma14:wrappingTextBoxFlag xmlns="" xmlns:ma14="http://schemas.microsoft.com/office/mac/drawingml/2011/main" val="0"/>
+              <ma14:wrappingTextBoxFlag xmlns:ma14="http://schemas.microsoft.com/office/mac/drawingml/2011/main" xmlns="" val="0"/>
             </a:ext>
           </a:extLst>
         </p:spPr>
@@ -7541,174 +7792,6 @@
       </p:grpSpPr>
       <p:sp>
         <p:nvSpPr>
-          <p:cNvPr id="2" name="iba logo slot"/>
-          <p:cNvSpPr/>
-          <p:nvPr/>
-        </p:nvSpPr>
-        <p:spPr>
-          <a:xfrm>
-            <a:off x="548640" y="502920"/>
-            <a:ext cx="2377440" cy="914400"/>
-          </a:xfrm>
-          <a:prstGeom prst="roundRect">
-            <a:avLst>
-              <a:gd name="adj" fmla="val 6000"/>
-            </a:avLst>
-          </a:prstGeom>
-          <a:solidFill>
-            <a:schemeClr val="tx2"/>
-          </a:solidFill>
-          <a:ln w="12700">
-            <a:solidFill>
-              <a:srgbClr val="8A8F98"/>
-            </a:solidFill>
-            <a:prstDash val="dash"/>
-          </a:ln>
-        </p:spPr>
-        <p:txBody>
-          <a:bodyPr/>
-          <a:lstStyle/>
-          <a:p>
-            <a:endParaRPr lang="en-US"/>
-          </a:p>
-        </p:txBody>
-      </p:sp>
-      <p:sp>
-        <p:nvSpPr>
-          <p:cNvPr id="3" name="Text 1"/>
-          <p:cNvSpPr txBox="1"/>
-          <p:nvPr/>
-        </p:nvSpPr>
-        <p:spPr>
-          <a:xfrm>
-            <a:off x="548640" y="502920"/>
-            <a:ext cx="2377440" cy="914400"/>
-          </a:xfrm>
-          <a:prstGeom prst="rect">
-            <a:avLst/>
-          </a:prstGeom>
-          <a:noFill/>
-          <a:ln/>
-        </p:spPr>
-        <p:txBody>
-          <a:bodyPr wrap="square" lIns="0" tIns="0" rIns="0" bIns="0" rtlCol="0" anchor="ctr"/>
-          <a:lstStyle/>
-          <a:p>
-            <a:pPr marL="0" indent="0" algn="ctr">
-              <a:buNone/>
-            </a:pPr>
-            <a:r>
-              <a:rPr lang="en-US" sz="1000" dirty="0">
-                <a:solidFill>
-                  <a:schemeClr val="bg1"/>
-                </a:solidFill>
-              </a:rPr>
-              <a:t>IBA Karachi logo</a:t>
-            </a:r>
-            <a:endParaRPr lang="en-US" sz="1000" dirty="0"/>
-          </a:p>
-          <a:p>
-            <a:pPr marL="0" indent="0" algn="ctr">
-              <a:buNone/>
-            </a:pPr>
-            <a:r>
-              <a:rPr lang="en-US" sz="1000" dirty="0">
-                <a:solidFill>
-                  <a:schemeClr val="bg1"/>
-                </a:solidFill>
-              </a:rPr>
-              <a:t>(drop file in presentation/assets/logos/iba.png)</a:t>
-            </a:r>
-            <a:endParaRPr lang="en-US" sz="1000" dirty="0"/>
-          </a:p>
-        </p:txBody>
-      </p:sp>
-      <p:sp>
-        <p:nvSpPr>
-          <p:cNvPr id="4" name="isecom logo slot"/>
-          <p:cNvSpPr/>
-          <p:nvPr/>
-        </p:nvSpPr>
-        <p:spPr>
-          <a:xfrm>
-            <a:off x="9265615" y="502920"/>
-            <a:ext cx="2377440" cy="914400"/>
-          </a:xfrm>
-          <a:prstGeom prst="roundRect">
-            <a:avLst>
-              <a:gd name="adj" fmla="val 6000"/>
-            </a:avLst>
-          </a:prstGeom>
-          <a:solidFill>
-            <a:schemeClr val="tx2"/>
-          </a:solidFill>
-          <a:ln w="12700">
-            <a:solidFill>
-              <a:srgbClr val="8A8F98"/>
-            </a:solidFill>
-            <a:prstDash val="dash"/>
-          </a:ln>
-        </p:spPr>
-        <p:txBody>
-          <a:bodyPr/>
-          <a:lstStyle/>
-          <a:p>
-            <a:endParaRPr lang="en-US"/>
-          </a:p>
-        </p:txBody>
-      </p:sp>
-      <p:sp>
-        <p:nvSpPr>
-          <p:cNvPr id="5" name="Text 3"/>
-          <p:cNvSpPr txBox="1"/>
-          <p:nvPr/>
-        </p:nvSpPr>
-        <p:spPr>
-          <a:xfrm>
-            <a:off x="9265615" y="502920"/>
-            <a:ext cx="2377440" cy="914400"/>
-          </a:xfrm>
-          <a:prstGeom prst="rect">
-            <a:avLst/>
-          </a:prstGeom>
-          <a:noFill/>
-          <a:ln/>
-        </p:spPr>
-        <p:txBody>
-          <a:bodyPr wrap="square" lIns="0" tIns="0" rIns="0" bIns="0" rtlCol="0" anchor="ctr"/>
-          <a:lstStyle/>
-          <a:p>
-            <a:pPr marL="0" indent="0" algn="ctr">
-              <a:buNone/>
-            </a:pPr>
-            <a:r>
-              <a:rPr lang="en-US" sz="1000" dirty="0">
-                <a:solidFill>
-                  <a:schemeClr val="bg1"/>
-                </a:solidFill>
-              </a:rPr>
-              <a:t>ISECOM logo</a:t>
-            </a:r>
-            <a:endParaRPr lang="en-US" sz="1000" dirty="0"/>
-          </a:p>
-          <a:p>
-            <a:pPr marL="0" indent="0" algn="ctr">
-              <a:buNone/>
-            </a:pPr>
-            <a:r>
-              <a:rPr lang="en-US" sz="1000" dirty="0">
-                <a:solidFill>
-                  <a:schemeClr val="bg1"/>
-                </a:solidFill>
-              </a:rPr>
-              <a:t>(drop file in presentation/assets/logos/isecom.png)</a:t>
-            </a:r>
-            <a:endParaRPr lang="en-US" sz="1000" dirty="0"/>
-          </a:p>
-        </p:txBody>
-      </p:sp>
-      <p:sp>
-        <p:nvSpPr>
           <p:cNvPr id="6" name="Text 0"/>
           <p:cNvSpPr>
             <a:spLocks noGrp="1"/>
@@ -7819,6 +7902,113 @@
           </a:p>
         </p:txBody>
       </p:sp>
+      <p:pic>
+        <p:nvPicPr>
+          <p:cNvPr id="12" name="Picture 11">
+            <a:extLst>
+              <a:ext uri="{FF2B5EF4-FFF2-40B4-BE49-F238E27FC236}">
+                <a16:creationId xmlns:a16="http://schemas.microsoft.com/office/drawing/2014/main" id="{98CF3F0F-7877-B6E9-9D3C-733E39CC09A6}"/>
+              </a:ext>
+            </a:extLst>
+          </p:cNvPr>
+          <p:cNvPicPr>
+            <a:picLocks noChangeAspect="1"/>
+          </p:cNvPicPr>
+          <p:nvPr/>
+        </p:nvPicPr>
+        <p:blipFill>
+          <a:blip r:embed="rId3"/>
+          <a:stretch>
+            <a:fillRect/>
+          </a:stretch>
+        </p:blipFill>
+        <p:spPr>
+          <a:xfrm>
+            <a:off x="548640" y="320040"/>
+            <a:ext cx="1959970" cy="993228"/>
+          </a:xfrm>
+          <a:prstGeom prst="rect">
+            <a:avLst/>
+          </a:prstGeom>
+        </p:spPr>
+      </p:pic>
+      <p:sp>
+        <p:nvSpPr>
+          <p:cNvPr id="14" name="Rectangle 13">
+            <a:extLst>
+              <a:ext uri="{FF2B5EF4-FFF2-40B4-BE49-F238E27FC236}">
+                <a16:creationId xmlns:a16="http://schemas.microsoft.com/office/drawing/2014/main" id="{85B3ADAD-EBED-23CA-F756-44DF9FDF7B3D}"/>
+              </a:ext>
+            </a:extLst>
+          </p:cNvPr>
+          <p:cNvSpPr/>
+          <p:nvPr/>
+        </p:nvSpPr>
+        <p:spPr>
+          <a:xfrm>
+            <a:off x="8119240" y="402021"/>
+            <a:ext cx="3618187" cy="740979"/>
+          </a:xfrm>
+          <a:prstGeom prst="rect">
+            <a:avLst/>
+          </a:prstGeom>
+        </p:spPr>
+        <p:style>
+          <a:lnRef idx="2">
+            <a:schemeClr val="accent6"/>
+          </a:lnRef>
+          <a:fillRef idx="1">
+            <a:schemeClr val="lt1"/>
+          </a:fillRef>
+          <a:effectRef idx="0">
+            <a:schemeClr val="accent6"/>
+          </a:effectRef>
+          <a:fontRef idx="minor">
+            <a:schemeClr val="dk1"/>
+          </a:fontRef>
+        </p:style>
+        <p:txBody>
+          <a:bodyPr rtlCol="0" anchor="ctr"/>
+          <a:lstStyle/>
+          <a:p>
+            <a:pPr algn="ctr"/>
+            <a:endParaRPr lang="en-US"/>
+          </a:p>
+        </p:txBody>
+      </p:sp>
+      <p:pic>
+        <p:nvPicPr>
+          <p:cNvPr id="16" name="Picture 15">
+            <a:extLst>
+              <a:ext uri="{FF2B5EF4-FFF2-40B4-BE49-F238E27FC236}">
+                <a16:creationId xmlns:a16="http://schemas.microsoft.com/office/drawing/2014/main" id="{B0CD0FF0-7B44-F8FC-0FA2-293B19FFCA93}"/>
+              </a:ext>
+            </a:extLst>
+          </p:cNvPr>
+          <p:cNvPicPr>
+            <a:picLocks noChangeAspect="1"/>
+          </p:cNvPicPr>
+          <p:nvPr/>
+        </p:nvPicPr>
+        <p:blipFill>
+          <a:blip r:embed="rId4"/>
+          <a:stretch>
+            <a:fillRect/>
+          </a:stretch>
+        </p:blipFill>
+        <p:spPr>
+          <a:xfrm>
+            <a:off x="8245366" y="288294"/>
+            <a:ext cx="3329240" cy="969682"/>
+          </a:xfrm>
+          <a:prstGeom prst="rect">
+            <a:avLst/>
+          </a:prstGeom>
+          <a:ln>
+            <a:noFill/>
+          </a:ln>
+        </p:spPr>
+      </p:pic>
     </p:spTree>
   </p:cSld>
   <p:clrMapOvr>
@@ -8220,7 +8410,7 @@
           </a:prstGeom>
           <a:extLst>
             <a:ext uri="{C572A759-6A51-4108-AA02-DFA0A04FC94B}">
-              <ma14:wrappingTextBoxFlag xmlns="" xmlns:ma14="http://schemas.microsoft.com/office/mac/drawingml/2011/main" val="0"/>
+              <ma14:wrappingTextBoxFlag xmlns:ma14="http://schemas.microsoft.com/office/mac/drawingml/2011/main" xmlns="" val="0"/>
             </a:ext>
           </a:extLst>
         </p:spPr>
@@ -8646,7 +8836,7 @@
           </a:prstGeom>
           <a:extLst>
             <a:ext uri="{C572A759-6A51-4108-AA02-DFA0A04FC94B}">
-              <ma14:wrappingTextBoxFlag xmlns="" xmlns:ma14="http://schemas.microsoft.com/office/mac/drawingml/2011/main" val="0"/>
+              <ma14:wrappingTextBoxFlag xmlns:ma14="http://schemas.microsoft.com/office/mac/drawingml/2011/main" xmlns="" val="0"/>
             </a:ext>
           </a:extLst>
         </p:spPr>
@@ -8680,432 +8870,6 @@
 </file>
 
 <file path=ppt/slides/slide17.xml><?xml version="1.0" encoding="utf-8"?>
-<p:sld xmlns:a="http://schemas.openxmlformats.org/drawingml/2006/main" xmlns:r="http://schemas.openxmlformats.org/officeDocument/2006/relationships" xmlns:p="http://schemas.openxmlformats.org/presentationml/2006/main">
-  <p:cSld name="Slide 17">
-    <p:spTree>
-      <p:nvGrpSpPr>
-        <p:cNvPr id="1" name=""/>
-        <p:cNvGrpSpPr/>
-        <p:nvPr/>
-      </p:nvGrpSpPr>
-      <p:grpSpPr>
-        <a:xfrm>
-          <a:off x="0" y="0"/>
-          <a:ext cx="0" cy="0"/>
-          <a:chOff x="0" y="0"/>
-          <a:chExt cx="0" cy="0"/>
-        </a:xfrm>
-      </p:grpSpPr>
-      <p:sp>
-        <p:nvSpPr>
-          <p:cNvPr id="2" name="Text 0"/>
-          <p:cNvSpPr>
-            <a:spLocks noGrp="1"/>
-          </p:cNvSpPr>
-          <p:nvPr>
-            <p:ph type="title" idx="100" hasCustomPrompt="1"/>
-          </p:nvPr>
-        </p:nvSpPr>
-        <p:spPr>
-          <a:xfrm>
-            <a:off x="548640" y="347472"/>
-            <a:ext cx="11094415" cy="640080"/>
-          </a:xfrm>
-          <a:prstGeom prst="rect">
-            <a:avLst/>
-          </a:prstGeom>
-          <a:noFill/>
-          <a:ln/>
-        </p:spPr>
-        <p:txBody>
-          <a:bodyPr wrap="square" lIns="0" tIns="0" rIns="0" bIns="0" rtlCol="0" anchor="t"/>
-          <a:lstStyle/>
-          <a:p>
-            <a:pPr marL="0" indent="0" algn="l">
-              <a:buNone/>
-            </a:pPr>
-            <a:r>
-              <a:rPr lang="en-US" sz="3200" b="1" dirty="0">
-                <a:solidFill>
-                  <a:schemeClr val="tx2"/>
-                </a:solidFill>
-              </a:rPr>
-              <a:t>FAQ 5–6</a:t>
-            </a:r>
-            <a:endParaRPr lang="en-US" sz="3200" dirty="0"/>
-          </a:p>
-        </p:txBody>
-      </p:sp>
-      <p:sp>
-        <p:nvSpPr>
-          <p:cNvPr id="3" name="Text 1"/>
-          <p:cNvSpPr txBox="1"/>
-          <p:nvPr/>
-        </p:nvSpPr>
-        <p:spPr>
-          <a:xfrm>
-            <a:off x="548640" y="1024128"/>
-            <a:ext cx="11094415" cy="365760"/>
-          </a:xfrm>
-          <a:prstGeom prst="rect">
-            <a:avLst/>
-          </a:prstGeom>
-          <a:noFill/>
-          <a:ln/>
-        </p:spPr>
-        <p:txBody>
-          <a:bodyPr wrap="square" lIns="0" tIns="0" rIns="0" bIns="0" rtlCol="0" anchor="t"/>
-          <a:lstStyle/>
-          <a:p>
-            <a:pPr marL="0" indent="0">
-              <a:buNone/>
-            </a:pPr>
-            <a:r>
-              <a:rPr lang="en-US" sz="1800" dirty="0">
-                <a:solidFill>
-                  <a:schemeClr val="accent4"/>
-                </a:solidFill>
-              </a:rPr>
-              <a:t>Questions we expect, and our honest answers</a:t>
-            </a:r>
-            <a:endParaRPr lang="en-US" sz="1800" dirty="0"/>
-          </a:p>
-        </p:txBody>
-      </p:sp>
-      <p:sp>
-        <p:nvSpPr>
-          <p:cNvPr id="4" name="Shape 2"/>
-          <p:cNvSpPr/>
-          <p:nvPr/>
-        </p:nvSpPr>
-        <p:spPr>
-          <a:xfrm>
-            <a:off x="548640" y="1783080"/>
-            <a:ext cx="5422392" cy="3840480"/>
-          </a:xfrm>
-          <a:prstGeom prst="roundRect">
-            <a:avLst>
-              <a:gd name="adj" fmla="val 1905"/>
-            </a:avLst>
-          </a:prstGeom>
-          <a:solidFill>
-            <a:schemeClr val="bg2"/>
-          </a:solidFill>
-          <a:ln/>
-        </p:spPr>
-        <p:txBody>
-          <a:bodyPr/>
-          <a:lstStyle/>
-          <a:p>
-            <a:endParaRPr lang="en-US"/>
-          </a:p>
-        </p:txBody>
-      </p:sp>
-      <p:sp>
-        <p:nvSpPr>
-          <p:cNvPr id="5" name="Text 3"/>
-          <p:cNvSpPr txBox="1"/>
-          <p:nvPr/>
-        </p:nvSpPr>
-        <p:spPr>
-          <a:xfrm>
-            <a:off x="822960" y="1920240"/>
-            <a:ext cx="548640" cy="640080"/>
-          </a:xfrm>
-          <a:prstGeom prst="rect">
-            <a:avLst/>
-          </a:prstGeom>
-          <a:noFill/>
-          <a:ln/>
-        </p:spPr>
-        <p:txBody>
-          <a:bodyPr wrap="square" lIns="0" tIns="0" rIns="0" bIns="0" rtlCol="0" anchor="t"/>
-          <a:lstStyle/>
-          <a:p>
-            <a:pPr marL="0" indent="0">
-              <a:buNone/>
-            </a:pPr>
-            <a:r>
-              <a:rPr lang="en-US" sz="4000" b="1" dirty="0">
-                <a:solidFill>
-                  <a:schemeClr val="accent1"/>
-                </a:solidFill>
-                <a:latin typeface="Cambria" pitchFamily="34" charset="0"/>
-                <a:ea typeface="Cambria" pitchFamily="34" charset="-122"/>
-                <a:cs typeface="Cambria" pitchFamily="34" charset="-120"/>
-              </a:rPr>
-              <a:t>Q</a:t>
-            </a:r>
-            <a:endParaRPr lang="en-US" sz="4000" dirty="0"/>
-          </a:p>
-        </p:txBody>
-      </p:sp>
-      <p:sp>
-        <p:nvSpPr>
-          <p:cNvPr id="6" name="Text 4"/>
-          <p:cNvSpPr txBox="1"/>
-          <p:nvPr/>
-        </p:nvSpPr>
-        <p:spPr>
-          <a:xfrm>
-            <a:off x="822960" y="2606040"/>
-            <a:ext cx="4846320" cy="822960"/>
-          </a:xfrm>
-          <a:prstGeom prst="rect">
-            <a:avLst/>
-          </a:prstGeom>
-          <a:noFill/>
-          <a:ln/>
-        </p:spPr>
-        <p:txBody>
-          <a:bodyPr wrap="square" lIns="0" tIns="0" rIns="0" bIns="0" rtlCol="0" anchor="t"/>
-          <a:lstStyle/>
-          <a:p>
-            <a:pPr marL="0" indent="0">
-              <a:buNone/>
-            </a:pPr>
-            <a:r>
-              <a:rPr lang="en-US" sz="2000" b="1" dirty="0">
-                <a:solidFill>
-                  <a:schemeClr val="tx2"/>
-                </a:solidFill>
-              </a:rPr>
-              <a:t>Do you evade bot detection?</a:t>
-            </a:r>
-            <a:endParaRPr lang="en-US" sz="2000" dirty="0"/>
-          </a:p>
-        </p:txBody>
-      </p:sp>
-      <p:sp>
-        <p:nvSpPr>
-          <p:cNvPr id="7" name="Text 5"/>
-          <p:cNvSpPr txBox="1"/>
-          <p:nvPr/>
-        </p:nvSpPr>
-        <p:spPr>
-          <a:xfrm>
-            <a:off x="822960" y="3474720"/>
-            <a:ext cx="4846320" cy="2011680"/>
-          </a:xfrm>
-          <a:prstGeom prst="rect">
-            <a:avLst/>
-          </a:prstGeom>
-          <a:noFill/>
-          <a:ln/>
-        </p:spPr>
-        <p:txBody>
-          <a:bodyPr wrap="square" lIns="0" tIns="0" rIns="0" bIns="0" rtlCol="0" anchor="t"/>
-          <a:lstStyle/>
-          <a:p>
-            <a:pPr marL="0" indent="0">
-              <a:buNone/>
-            </a:pPr>
-            <a:r>
-              <a:rPr lang="en-US" sz="1700" dirty="0">
-                <a:solidFill>
-                  <a:schemeClr val="tx1"/>
-                </a:solidFill>
-              </a:rPr>
-              <a:t>No. It is out of scope by design. We measure how a protection layer treats the agent and report it. We do not spoof or bypass.</a:t>
-            </a:r>
-            <a:endParaRPr lang="en-US" sz="1700" dirty="0"/>
-          </a:p>
-        </p:txBody>
-      </p:sp>
-      <p:sp>
-        <p:nvSpPr>
-          <p:cNvPr id="8" name="Shape 6"/>
-          <p:cNvSpPr/>
-          <p:nvPr/>
-        </p:nvSpPr>
-        <p:spPr>
-          <a:xfrm>
-            <a:off x="6217920" y="1783080"/>
-            <a:ext cx="5422392" cy="3840480"/>
-          </a:xfrm>
-          <a:prstGeom prst="roundRect">
-            <a:avLst>
-              <a:gd name="adj" fmla="val 1905"/>
-            </a:avLst>
-          </a:prstGeom>
-          <a:solidFill>
-            <a:schemeClr val="bg2"/>
-          </a:solidFill>
-          <a:ln/>
-        </p:spPr>
-        <p:txBody>
-          <a:bodyPr/>
-          <a:lstStyle/>
-          <a:p>
-            <a:endParaRPr lang="en-US"/>
-          </a:p>
-        </p:txBody>
-      </p:sp>
-      <p:sp>
-        <p:nvSpPr>
-          <p:cNvPr id="9" name="Text 7"/>
-          <p:cNvSpPr txBox="1"/>
-          <p:nvPr/>
-        </p:nvSpPr>
-        <p:spPr>
-          <a:xfrm>
-            <a:off x="6492240" y="1920240"/>
-            <a:ext cx="548640" cy="640080"/>
-          </a:xfrm>
-          <a:prstGeom prst="rect">
-            <a:avLst/>
-          </a:prstGeom>
-          <a:noFill/>
-          <a:ln/>
-        </p:spPr>
-        <p:txBody>
-          <a:bodyPr wrap="square" lIns="0" tIns="0" rIns="0" bIns="0" rtlCol="0" anchor="t"/>
-          <a:lstStyle/>
-          <a:p>
-            <a:pPr marL="0" indent="0">
-              <a:buNone/>
-            </a:pPr>
-            <a:r>
-              <a:rPr lang="en-US" sz="4000" b="1" dirty="0">
-                <a:solidFill>
-                  <a:schemeClr val="accent1"/>
-                </a:solidFill>
-                <a:latin typeface="Cambria" pitchFamily="34" charset="0"/>
-                <a:ea typeface="Cambria" pitchFamily="34" charset="-122"/>
-                <a:cs typeface="Cambria" pitchFamily="34" charset="-120"/>
-              </a:rPr>
-              <a:t>Q</a:t>
-            </a:r>
-            <a:endParaRPr lang="en-US" sz="4000" dirty="0"/>
-          </a:p>
-        </p:txBody>
-      </p:sp>
-      <p:sp>
-        <p:nvSpPr>
-          <p:cNvPr id="10" name="Text 8"/>
-          <p:cNvSpPr txBox="1"/>
-          <p:nvPr/>
-        </p:nvSpPr>
-        <p:spPr>
-          <a:xfrm>
-            <a:off x="6492240" y="2606040"/>
-            <a:ext cx="4846320" cy="822960"/>
-          </a:xfrm>
-          <a:prstGeom prst="rect">
-            <a:avLst/>
-          </a:prstGeom>
-          <a:noFill/>
-          <a:ln/>
-        </p:spPr>
-        <p:txBody>
-          <a:bodyPr wrap="square" lIns="0" tIns="0" rIns="0" bIns="0" rtlCol="0" anchor="t"/>
-          <a:lstStyle/>
-          <a:p>
-            <a:pPr marL="0" indent="0">
-              <a:buNone/>
-            </a:pPr>
-            <a:r>
-              <a:rPr lang="en-US" sz="2000" b="1" dirty="0">
-                <a:solidFill>
-                  <a:schemeClr val="tx2"/>
-                </a:solidFill>
-              </a:rPr>
-              <a:t>Is this specific to one model?</a:t>
-            </a:r>
-            <a:endParaRPr lang="en-US" sz="2000" dirty="0"/>
-          </a:p>
-        </p:txBody>
-      </p:sp>
-      <p:sp>
-        <p:nvSpPr>
-          <p:cNvPr id="11" name="Text 9"/>
-          <p:cNvSpPr txBox="1"/>
-          <p:nvPr/>
-        </p:nvSpPr>
-        <p:spPr>
-          <a:xfrm>
-            <a:off x="6492240" y="3474720"/>
-            <a:ext cx="4846320" cy="2011680"/>
-          </a:xfrm>
-          <a:prstGeom prst="rect">
-            <a:avLst/>
-          </a:prstGeom>
-          <a:noFill/>
-          <a:ln/>
-        </p:spPr>
-        <p:txBody>
-          <a:bodyPr wrap="square" lIns="0" tIns="0" rIns="0" bIns="0" rtlCol="0" anchor="t"/>
-          <a:lstStyle/>
-          <a:p>
-            <a:pPr marL="0" indent="0">
-              <a:buNone/>
-            </a:pPr>
-            <a:r>
-              <a:rPr lang="en-US" sz="1700" dirty="0">
-                <a:solidFill>
-                  <a:schemeClr val="tx1"/>
-                </a:solidFill>
-              </a:rPr>
-              <a:t>So far we ran one model (qwen3.7-flash). A second model is the first planned follow-up. The rules-only results do not use a model.</a:t>
-            </a:r>
-            <a:endParaRPr lang="en-US" sz="1700" dirty="0"/>
-          </a:p>
-        </p:txBody>
-      </p:sp>
-      <p:sp>
-        <p:nvSpPr>
-          <p:cNvPr id="25" name="Slide Number Placeholder 0"/>
-          <p:cNvSpPr>
-            <a:spLocks noGrp="1"/>
-          </p:cNvSpPr>
-          <p:nvPr>
-            <p:ph type="sldNum" sz="quarter" idx="4294967295"/>
-          </p:nvPr>
-        </p:nvSpPr>
-        <p:spPr>
-          <a:xfrm>
-            <a:off x="11094415" y="6419088"/>
-            <a:ext cx="548640" cy="274320"/>
-          </a:xfrm>
-          <a:prstGeom prst="rect">
-            <a:avLst/>
-          </a:prstGeom>
-          <a:extLst>
-            <a:ext uri="{C572A759-6A51-4108-AA02-DFA0A04FC94B}">
-              <ma14:wrappingTextBoxFlag xmlns="" xmlns:ma14="http://schemas.microsoft.com/office/mac/drawingml/2011/main" val="0"/>
-            </a:ext>
-          </a:extLst>
-        </p:spPr>
-        <p:txBody>
-          <a:bodyPr/>
-          <a:lstStyle>
-            <a:lvl1pPr>
-              <a:defRPr sz="1000">
-                <a:solidFill>
-                  <a:schemeClr val="accent4"/>
-                </a:solidFill>
-              </a:defRPr>
-            </a:lvl1pPr>
-          </a:lstStyle>
-          <a:p>
-            <a:pPr algn="r"/>
-            <a:fld id="{F7021451-1387-4CA6-816F-3879F97B5CBC}" type="slidenum">
-              <a:rPr lang="en-US" b="0"/>
-              <a:t>17</a:t>
-            </a:fld>
-            <a:endParaRPr lang="en-US"/>
-          </a:p>
-        </p:txBody>
-      </p:sp>
-    </p:spTree>
-  </p:cSld>
-  <p:clrMapOvr>
-    <a:masterClrMapping/>
-  </p:clrMapOvr>
-</p:sld>
-</file>
-
-<file path=ppt/slides/slide18.xml><?xml version="1.0" encoding="utf-8"?>
 <p:sld xmlns:a="http://schemas.openxmlformats.org/drawingml/2006/main" xmlns:r="http://schemas.openxmlformats.org/officeDocument/2006/relationships" xmlns:p="http://schemas.openxmlformats.org/presentationml/2006/main">
   <p:cSld name="Slide 18">
     <p:spTree>
@@ -9156,8 +8920,15 @@
                   <a:schemeClr val="tx2"/>
                 </a:solidFill>
               </a:rPr>
-              <a:t>FAQ 7–8</a:t>
-            </a:r>
+              <a:t>FAQ 5–6</a:t>
+            </a:r>
+            <a:br>
+              <a:rPr lang="en-US" sz="3200" b="1" dirty="0">
+                <a:solidFill>
+                  <a:schemeClr val="tx2"/>
+                </a:solidFill>
+              </a:rPr>
+            </a:br>
             <a:endParaRPr lang="en-US" sz="3200" dirty="0"/>
           </a:p>
         </p:txBody>
@@ -9195,146 +8966,6 @@
               <a:t>Questions we expect, and our honest answers</a:t>
             </a:r>
             <a:endParaRPr lang="en-US" sz="1800" dirty="0"/>
-          </a:p>
-        </p:txBody>
-      </p:sp>
-      <p:sp>
-        <p:nvSpPr>
-          <p:cNvPr id="4" name="Shape 2"/>
-          <p:cNvSpPr/>
-          <p:nvPr/>
-        </p:nvSpPr>
-        <p:spPr>
-          <a:xfrm>
-            <a:off x="548640" y="1783080"/>
-            <a:ext cx="5422392" cy="3840480"/>
-          </a:xfrm>
-          <a:prstGeom prst="roundRect">
-            <a:avLst>
-              <a:gd name="adj" fmla="val 1905"/>
-            </a:avLst>
-          </a:prstGeom>
-          <a:solidFill>
-            <a:schemeClr val="bg2"/>
-          </a:solidFill>
-          <a:ln/>
-        </p:spPr>
-        <p:txBody>
-          <a:bodyPr/>
-          <a:lstStyle/>
-          <a:p>
-            <a:endParaRPr lang="en-US"/>
-          </a:p>
-        </p:txBody>
-      </p:sp>
-      <p:sp>
-        <p:nvSpPr>
-          <p:cNvPr id="5" name="Text 3"/>
-          <p:cNvSpPr txBox="1"/>
-          <p:nvPr/>
-        </p:nvSpPr>
-        <p:spPr>
-          <a:xfrm>
-            <a:off x="822960" y="1920240"/>
-            <a:ext cx="548640" cy="640080"/>
-          </a:xfrm>
-          <a:prstGeom prst="rect">
-            <a:avLst/>
-          </a:prstGeom>
-          <a:noFill/>
-          <a:ln/>
-        </p:spPr>
-        <p:txBody>
-          <a:bodyPr wrap="square" lIns="0" tIns="0" rIns="0" bIns="0" rtlCol="0" anchor="t"/>
-          <a:lstStyle/>
-          <a:p>
-            <a:pPr marL="0" indent="0">
-              <a:buNone/>
-            </a:pPr>
-            <a:r>
-              <a:rPr lang="en-US" sz="4000" b="1" dirty="0">
-                <a:solidFill>
-                  <a:schemeClr val="accent1"/>
-                </a:solidFill>
-                <a:latin typeface="Cambria" pitchFamily="34" charset="0"/>
-                <a:ea typeface="Cambria" pitchFamily="34" charset="-122"/>
-                <a:cs typeface="Cambria" pitchFamily="34" charset="-120"/>
-              </a:rPr>
-              <a:t>Q</a:t>
-            </a:r>
-            <a:endParaRPr lang="en-US" sz="4000" dirty="0"/>
-          </a:p>
-        </p:txBody>
-      </p:sp>
-      <p:sp>
-        <p:nvSpPr>
-          <p:cNvPr id="6" name="Text 4"/>
-          <p:cNvSpPr txBox="1"/>
-          <p:nvPr/>
-        </p:nvSpPr>
-        <p:spPr>
-          <a:xfrm>
-            <a:off x="822960" y="2606040"/>
-            <a:ext cx="4846320" cy="822960"/>
-          </a:xfrm>
-          <a:prstGeom prst="rect">
-            <a:avLst/>
-          </a:prstGeom>
-          <a:noFill/>
-          <a:ln/>
-        </p:spPr>
-        <p:txBody>
-          <a:bodyPr wrap="square" lIns="0" tIns="0" rIns="0" bIns="0" rtlCol="0" anchor="t"/>
-          <a:lstStyle/>
-          <a:p>
-            <a:pPr marL="0" indent="0">
-              <a:buNone/>
-            </a:pPr>
-            <a:r>
-              <a:rPr lang="en-US" sz="2000" b="1" dirty="0">
-                <a:solidFill>
-                  <a:schemeClr val="tx2"/>
-                </a:solidFill>
-              </a:rPr>
-              <a:t>What does N = 10 mean with a cache?</a:t>
-            </a:r>
-            <a:endParaRPr lang="en-US" sz="2000" dirty="0"/>
-          </a:p>
-        </p:txBody>
-      </p:sp>
-      <p:sp>
-        <p:nvSpPr>
-          <p:cNvPr id="7" name="Text 5"/>
-          <p:cNvSpPr txBox="1"/>
-          <p:nvPr/>
-        </p:nvSpPr>
-        <p:spPr>
-          <a:xfrm>
-            <a:off x="822960" y="3474720"/>
-            <a:ext cx="4846320" cy="2011680"/>
-          </a:xfrm>
-          <a:prstGeom prst="rect">
-            <a:avLst/>
-          </a:prstGeom>
-          <a:noFill/>
-          <a:ln/>
-        </p:spPr>
-        <p:txBody>
-          <a:bodyPr wrap="square" lIns="0" tIns="0" rIns="0" bIns="0" rtlCol="0" anchor="t"/>
-          <a:lstStyle/>
-          <a:p>
-            <a:pPr marL="0" indent="0">
-              <a:buNone/>
-            </a:pPr>
-            <a:r>
-              <a:rPr lang="en-US" sz="1700" dirty="0">
-                <a:solidFill>
-                  <a:schemeClr val="tx1"/>
-                </a:solidFill>
-              </a:rPr>
-              <a:t>Repeats at temperature 0 with cached answers show variation in the app and harness, not model sampling. We report 95% Wilson intervals: 10 of 10 is 72–100%.</a:t>
-            </a:r>
-            <a:endParaRPr lang="en-US" sz="1700" dirty="0"/>
           </a:p>
         </p:txBody>
       </p:sp>
@@ -9498,7 +9129,7 @@
           </a:prstGeom>
           <a:extLst>
             <a:ext uri="{C572A759-6A51-4108-AA02-DFA0A04FC94B}">
-              <ma14:wrappingTextBoxFlag xmlns="" xmlns:ma14="http://schemas.microsoft.com/office/mac/drawingml/2011/main" val="0"/>
+              <ma14:wrappingTextBoxFlag xmlns:ma14="http://schemas.microsoft.com/office/mac/drawingml/2011/main" xmlns="" val="0"/>
             </a:ext>
           </a:extLst>
         </p:spPr>
@@ -9517,9 +9148,173 @@
             <a:pPr algn="r"/>
             <a:fld id="{F7021451-1387-4CA6-816F-3879F97B5CBC}" type="slidenum">
               <a:rPr lang="en-US" b="0"/>
-              <a:t>18</a:t>
+              <a:t>17</a:t>
             </a:fld>
             <a:endParaRPr lang="en-US"/>
+          </a:p>
+        </p:txBody>
+      </p:sp>
+      <p:sp>
+        <p:nvSpPr>
+          <p:cNvPr id="13" name="Shape 2">
+            <a:extLst>
+              <a:ext uri="{FF2B5EF4-FFF2-40B4-BE49-F238E27FC236}">
+                <a16:creationId xmlns:a16="http://schemas.microsoft.com/office/drawing/2014/main" id="{EB3D0950-D3C3-0617-ADB4-7285BA522F9E}"/>
+              </a:ext>
+            </a:extLst>
+          </p:cNvPr>
+          <p:cNvSpPr/>
+          <p:nvPr/>
+        </p:nvSpPr>
+        <p:spPr>
+          <a:xfrm>
+            <a:off x="548640" y="1783080"/>
+            <a:ext cx="5422392" cy="3840480"/>
+          </a:xfrm>
+          <a:prstGeom prst="roundRect">
+            <a:avLst>
+              <a:gd name="adj" fmla="val 1905"/>
+            </a:avLst>
+          </a:prstGeom>
+          <a:solidFill>
+            <a:schemeClr val="bg2"/>
+          </a:solidFill>
+          <a:ln/>
+        </p:spPr>
+        <p:txBody>
+          <a:bodyPr/>
+          <a:lstStyle/>
+          <a:p>
+            <a:endParaRPr lang="en-US"/>
+          </a:p>
+        </p:txBody>
+      </p:sp>
+      <p:sp>
+        <p:nvSpPr>
+          <p:cNvPr id="15" name="Text 3">
+            <a:extLst>
+              <a:ext uri="{FF2B5EF4-FFF2-40B4-BE49-F238E27FC236}">
+                <a16:creationId xmlns:a16="http://schemas.microsoft.com/office/drawing/2014/main" id="{CBEE8DC2-CBC6-EED9-27FA-18CCFB795C66}"/>
+              </a:ext>
+            </a:extLst>
+          </p:cNvPr>
+          <p:cNvSpPr txBox="1"/>
+          <p:nvPr/>
+        </p:nvSpPr>
+        <p:spPr>
+          <a:xfrm>
+            <a:off x="822960" y="1920240"/>
+            <a:ext cx="548640" cy="640080"/>
+          </a:xfrm>
+          <a:prstGeom prst="rect">
+            <a:avLst/>
+          </a:prstGeom>
+          <a:noFill/>
+          <a:ln/>
+        </p:spPr>
+        <p:txBody>
+          <a:bodyPr wrap="square" lIns="0" tIns="0" rIns="0" bIns="0" rtlCol="0" anchor="t"/>
+          <a:lstStyle/>
+          <a:p>
+            <a:pPr marL="0" indent="0">
+              <a:buNone/>
+            </a:pPr>
+            <a:r>
+              <a:rPr lang="en-US" sz="4000" b="1" dirty="0">
+                <a:solidFill>
+                  <a:schemeClr val="accent1"/>
+                </a:solidFill>
+                <a:latin typeface="Cambria" pitchFamily="34" charset="0"/>
+                <a:ea typeface="Cambria" pitchFamily="34" charset="-122"/>
+                <a:cs typeface="Cambria" pitchFamily="34" charset="-120"/>
+              </a:rPr>
+              <a:t>Q</a:t>
+            </a:r>
+            <a:endParaRPr lang="en-US" sz="4000" dirty="0"/>
+          </a:p>
+        </p:txBody>
+      </p:sp>
+      <p:sp>
+        <p:nvSpPr>
+          <p:cNvPr id="17" name="Text 4">
+            <a:extLst>
+              <a:ext uri="{FF2B5EF4-FFF2-40B4-BE49-F238E27FC236}">
+                <a16:creationId xmlns:a16="http://schemas.microsoft.com/office/drawing/2014/main" id="{70C1A7D1-7BDE-9BBF-9946-68D50DBEA76B}"/>
+              </a:ext>
+            </a:extLst>
+          </p:cNvPr>
+          <p:cNvSpPr txBox="1"/>
+          <p:nvPr/>
+        </p:nvSpPr>
+        <p:spPr>
+          <a:xfrm>
+            <a:off x="822960" y="2606040"/>
+            <a:ext cx="4846320" cy="822960"/>
+          </a:xfrm>
+          <a:prstGeom prst="rect">
+            <a:avLst/>
+          </a:prstGeom>
+          <a:noFill/>
+          <a:ln/>
+        </p:spPr>
+        <p:txBody>
+          <a:bodyPr wrap="square" lIns="0" tIns="0" rIns="0" bIns="0" rtlCol="0" anchor="t"/>
+          <a:lstStyle/>
+          <a:p>
+            <a:pPr marL="0" indent="0">
+              <a:buNone/>
+            </a:pPr>
+            <a:r>
+              <a:rPr lang="en-US" sz="2000" b="1" dirty="0">
+                <a:solidFill>
+                  <a:schemeClr val="tx2"/>
+                </a:solidFill>
+              </a:rPr>
+              <a:t>What went wrong, and how did you fix it?</a:t>
+            </a:r>
+            <a:endParaRPr lang="en-US" sz="2000" dirty="0"/>
+          </a:p>
+        </p:txBody>
+      </p:sp>
+      <p:sp>
+        <p:nvSpPr>
+          <p:cNvPr id="19" name="Text 5">
+            <a:extLst>
+              <a:ext uri="{FF2B5EF4-FFF2-40B4-BE49-F238E27FC236}">
+                <a16:creationId xmlns:a16="http://schemas.microsoft.com/office/drawing/2014/main" id="{AEDDC5C5-C47C-BE51-C382-22D0FE41AF13}"/>
+              </a:ext>
+            </a:extLst>
+          </p:cNvPr>
+          <p:cNvSpPr txBox="1"/>
+          <p:nvPr/>
+        </p:nvSpPr>
+        <p:spPr>
+          <a:xfrm>
+            <a:off x="822960" y="3474720"/>
+            <a:ext cx="4846320" cy="2011680"/>
+          </a:xfrm>
+          <a:prstGeom prst="rect">
+            <a:avLst/>
+          </a:prstGeom>
+          <a:noFill/>
+          <a:ln/>
+        </p:spPr>
+        <p:txBody>
+          <a:bodyPr wrap="square" lIns="0" tIns="0" rIns="0" bIns="0" rtlCol="0" anchor="t"/>
+          <a:lstStyle/>
+          <a:p>
+            <a:pPr marL="0" indent="0">
+              <a:buNone/>
+            </a:pPr>
+            <a:r>
+              <a:rPr lang="en-US" sz="1700" dirty="0">
+                <a:solidFill>
+                  <a:schemeClr val="tx1"/>
+                </a:solidFill>
+              </a:rPr>
+              <a:t>A state leak between test arms made a bare model look broken on a clean app. We proved it on a fresh page, fixed the harness and re-ran every model result.</a:t>
+            </a:r>
+            <a:endParaRPr lang="en-US" sz="1700" dirty="0"/>
           </a:p>
         </p:txBody>
       </p:sp>
@@ -9531,9 +9326,240 @@
 </p:sld>
 </file>
 
-<file path=ppt/slides/slide19.xml><?xml version="1.0" encoding="utf-8"?>
+<file path=ppt/slides/slide18.xml><?xml version="1.0" encoding="utf-8"?>
 <p:sld xmlns:a="http://schemas.openxmlformats.org/drawingml/2006/main" xmlns:r="http://schemas.openxmlformats.org/officeDocument/2006/relationships" xmlns:p="http://schemas.openxmlformats.org/presentationml/2006/main">
-  <p:cSld name="Slide 19">
+  <p:cSld>
+    <p:spTree>
+      <p:nvGrpSpPr>
+        <p:cNvPr id="1" name="">
+          <a:extLst>
+            <a:ext uri="{FF2B5EF4-FFF2-40B4-BE49-F238E27FC236}">
+              <a16:creationId xmlns:a16="http://schemas.microsoft.com/office/drawing/2014/main" id="{A5974D2D-71AC-62DB-197A-5D9B8432D216}"/>
+            </a:ext>
+          </a:extLst>
+        </p:cNvPr>
+        <p:cNvGrpSpPr/>
+        <p:nvPr/>
+      </p:nvGrpSpPr>
+      <p:grpSpPr>
+        <a:xfrm>
+          <a:off x="0" y="0"/>
+          <a:ext cx="0" cy="0"/>
+          <a:chOff x="0" y="0"/>
+          <a:chExt cx="0" cy="0"/>
+        </a:xfrm>
+      </p:grpSpPr>
+      <p:sp>
+        <p:nvSpPr>
+          <p:cNvPr id="6" name="Text 0">
+            <a:extLst>
+              <a:ext uri="{FF2B5EF4-FFF2-40B4-BE49-F238E27FC236}">
+                <a16:creationId xmlns:a16="http://schemas.microsoft.com/office/drawing/2014/main" id="{1E9B82B9-48EC-35F2-63F1-900C791C32C0}"/>
+              </a:ext>
+            </a:extLst>
+          </p:cNvPr>
+          <p:cNvSpPr>
+            <a:spLocks noGrp="1"/>
+          </p:cNvSpPr>
+          <p:nvPr>
+            <p:ph type="title" idx="100" hasCustomPrompt="1"/>
+          </p:nvPr>
+        </p:nvSpPr>
+        <p:spPr>
+          <a:xfrm>
+            <a:off x="1371600" y="2057400"/>
+            <a:ext cx="8412480" cy="1737360"/>
+          </a:xfrm>
+          <a:prstGeom prst="rect">
+            <a:avLst/>
+          </a:prstGeom>
+          <a:noFill/>
+          <a:ln/>
+        </p:spPr>
+        <p:txBody>
+          <a:bodyPr wrap="square" lIns="0" tIns="0" rIns="0" bIns="0" rtlCol="0" anchor="t"/>
+          <a:lstStyle/>
+          <a:p>
+            <a:pPr marL="0" indent="0" algn="ctr">
+              <a:buNone/>
+            </a:pPr>
+            <a:r>
+              <a:rPr lang="en-US" sz="7200" b="1" dirty="0">
+                <a:solidFill>
+                  <a:schemeClr val="bg1"/>
+                </a:solidFill>
+              </a:rPr>
+              <a:t>Thank you </a:t>
+            </a:r>
+            <a:endParaRPr lang="en-US" sz="7200" dirty="0"/>
+          </a:p>
+        </p:txBody>
+      </p:sp>
+      <p:sp>
+        <p:nvSpPr>
+          <p:cNvPr id="7" name="Text 5">
+            <a:extLst>
+              <a:ext uri="{FF2B5EF4-FFF2-40B4-BE49-F238E27FC236}">
+                <a16:creationId xmlns:a16="http://schemas.microsoft.com/office/drawing/2014/main" id="{5DA1B7CA-60AA-8C4A-6376-A4734F280C7E}"/>
+              </a:ext>
+            </a:extLst>
+          </p:cNvPr>
+          <p:cNvSpPr txBox="1"/>
+          <p:nvPr/>
+        </p:nvSpPr>
+        <p:spPr>
+          <a:xfrm>
+            <a:off x="3513512" y="3794760"/>
+            <a:ext cx="10058400" cy="457200"/>
+          </a:xfrm>
+          <a:prstGeom prst="rect">
+            <a:avLst/>
+          </a:prstGeom>
+          <a:noFill/>
+          <a:ln/>
+        </p:spPr>
+        <p:txBody>
+          <a:bodyPr wrap="square" lIns="0" tIns="0" rIns="0" bIns="0" rtlCol="0" anchor="t"/>
+          <a:lstStyle/>
+          <a:p>
+            <a:pPr marL="0" indent="0">
+              <a:buNone/>
+            </a:pPr>
+            <a:r>
+              <a:rPr lang="en-US" sz="2000" dirty="0">
+                <a:solidFill>
+                  <a:schemeClr val="accent5"/>
+                </a:solidFill>
+              </a:rPr>
+              <a:t>Sharique Baig · Maira Aijaz · Barkhi Khan</a:t>
+            </a:r>
+            <a:endParaRPr lang="en-US" sz="2000" dirty="0"/>
+          </a:p>
+        </p:txBody>
+      </p:sp>
+      <p:pic>
+        <p:nvPicPr>
+          <p:cNvPr id="12" name="Picture 11">
+            <a:extLst>
+              <a:ext uri="{FF2B5EF4-FFF2-40B4-BE49-F238E27FC236}">
+                <a16:creationId xmlns:a16="http://schemas.microsoft.com/office/drawing/2014/main" id="{7DDCC234-F60A-BF83-ECF4-D6A911A7B2A4}"/>
+              </a:ext>
+            </a:extLst>
+          </p:cNvPr>
+          <p:cNvPicPr>
+            <a:picLocks noChangeAspect="1"/>
+          </p:cNvPicPr>
+          <p:nvPr/>
+        </p:nvPicPr>
+        <p:blipFill>
+          <a:blip r:embed="rId3"/>
+          <a:stretch>
+            <a:fillRect/>
+          </a:stretch>
+        </p:blipFill>
+        <p:spPr>
+          <a:xfrm>
+            <a:off x="548640" y="320040"/>
+            <a:ext cx="1959970" cy="993228"/>
+          </a:xfrm>
+          <a:prstGeom prst="rect">
+            <a:avLst/>
+          </a:prstGeom>
+        </p:spPr>
+      </p:pic>
+      <p:sp>
+        <p:nvSpPr>
+          <p:cNvPr id="14" name="Rectangle 13">
+            <a:extLst>
+              <a:ext uri="{FF2B5EF4-FFF2-40B4-BE49-F238E27FC236}">
+                <a16:creationId xmlns:a16="http://schemas.microsoft.com/office/drawing/2014/main" id="{D7678988-37D8-9412-9D5F-056684C51670}"/>
+              </a:ext>
+            </a:extLst>
+          </p:cNvPr>
+          <p:cNvSpPr/>
+          <p:nvPr/>
+        </p:nvSpPr>
+        <p:spPr>
+          <a:xfrm>
+            <a:off x="8119240" y="402021"/>
+            <a:ext cx="3618187" cy="740979"/>
+          </a:xfrm>
+          <a:prstGeom prst="rect">
+            <a:avLst/>
+          </a:prstGeom>
+        </p:spPr>
+        <p:style>
+          <a:lnRef idx="2">
+            <a:schemeClr val="accent6"/>
+          </a:lnRef>
+          <a:fillRef idx="1">
+            <a:schemeClr val="lt1"/>
+          </a:fillRef>
+          <a:effectRef idx="0">
+            <a:schemeClr val="accent6"/>
+          </a:effectRef>
+          <a:fontRef idx="minor">
+            <a:schemeClr val="dk1"/>
+          </a:fontRef>
+        </p:style>
+        <p:txBody>
+          <a:bodyPr rtlCol="0" anchor="ctr"/>
+          <a:lstStyle/>
+          <a:p>
+            <a:pPr algn="ctr"/>
+            <a:endParaRPr lang="en-US"/>
+          </a:p>
+        </p:txBody>
+      </p:sp>
+      <p:pic>
+        <p:nvPicPr>
+          <p:cNvPr id="16" name="Picture 15">
+            <a:extLst>
+              <a:ext uri="{FF2B5EF4-FFF2-40B4-BE49-F238E27FC236}">
+                <a16:creationId xmlns:a16="http://schemas.microsoft.com/office/drawing/2014/main" id="{5C1D25F4-836F-27B6-AA86-9D19FC4DBAD1}"/>
+              </a:ext>
+            </a:extLst>
+          </p:cNvPr>
+          <p:cNvPicPr>
+            <a:picLocks noChangeAspect="1"/>
+          </p:cNvPicPr>
+          <p:nvPr/>
+        </p:nvPicPr>
+        <p:blipFill>
+          <a:blip r:embed="rId4"/>
+          <a:stretch>
+            <a:fillRect/>
+          </a:stretch>
+        </p:blipFill>
+        <p:spPr>
+          <a:xfrm>
+            <a:off x="8245366" y="288294"/>
+            <a:ext cx="3329240" cy="969682"/>
+          </a:xfrm>
+          <a:prstGeom prst="rect">
+            <a:avLst/>
+          </a:prstGeom>
+          <a:ln>
+            <a:noFill/>
+          </a:ln>
+        </p:spPr>
+      </p:pic>
+    </p:spTree>
+    <p:extLst>
+      <p:ext uri="{BB962C8B-B14F-4D97-AF65-F5344CB8AC3E}">
+        <p14:creationId xmlns:p14="http://schemas.microsoft.com/office/powerpoint/2010/main" val="2336891204"/>
+      </p:ext>
+    </p:extLst>
+  </p:cSld>
+  <p:clrMapOvr>
+    <a:masterClrMapping/>
+  </p:clrMapOvr>
+</p:sld>
+</file>
+
+<file path=ppt/slides/slide2.xml><?xml version="1.0" encoding="utf-8"?>
+<p:sld xmlns:a="http://schemas.openxmlformats.org/drawingml/2006/main" xmlns:r="http://schemas.openxmlformats.org/officeDocument/2006/relationships" xmlns:p="http://schemas.openxmlformats.org/presentationml/2006/main">
+  <p:cSld name="Slide 4">
     <p:spTree>
       <p:nvGrpSpPr>
         <p:cNvPr id="1" name=""/>
@@ -9582,7 +9608,7 @@
                   <a:schemeClr val="tx2"/>
                 </a:solidFill>
               </a:rPr>
-              <a:t>FAQ 9–10</a:t>
+              <a:t>Synthies and ISECOM</a:t>
             </a:r>
             <a:endParaRPr lang="en-US" sz="3200" dirty="0"/>
           </a:p>
@@ -9618,7 +9644,7 @@
                   <a:schemeClr val="accent4"/>
                 </a:solidFill>
               </a:rPr>
-              <a:t>Questions we expect, and our honest answers</a:t>
+              <a:t>The kind of agent that uses our tool, and who we are working with</a:t>
             </a:r>
             <a:endParaRPr lang="en-US" sz="1800" dirty="0"/>
           </a:p>
@@ -9633,11 +9659,11 @@
         <p:spPr>
           <a:xfrm>
             <a:off x="548640" y="1783080"/>
-            <a:ext cx="5422392" cy="3840480"/>
+            <a:ext cx="5440680" cy="2926080"/>
           </a:xfrm>
           <a:prstGeom prst="roundRect">
             <a:avLst>
-              <a:gd name="adj" fmla="val 1905"/>
+              <a:gd name="adj" fmla="val 2500"/>
             </a:avLst>
           </a:prstGeom>
           <a:solidFill>
@@ -9655,14 +9681,14 @@
       </p:sp>
       <p:sp>
         <p:nvSpPr>
-          <p:cNvPr id="5" name="Text 3"/>
+          <p:cNvPr id="7" name="Text 5"/>
           <p:cNvSpPr txBox="1"/>
           <p:nvPr/>
         </p:nvSpPr>
         <p:spPr>
           <a:xfrm>
-            <a:off x="822960" y="1920240"/>
-            <a:ext cx="548640" cy="640080"/>
+            <a:off x="2788920" y="2011680"/>
+            <a:ext cx="3017520" cy="365760"/>
           </a:xfrm>
           <a:prstGeom prst="rect">
             <a:avLst/>
@@ -9678,30 +9704,27 @@
               <a:buNone/>
             </a:pPr>
             <a:r>
-              <a:rPr lang="en-US" sz="4000" b="1" dirty="0">
-                <a:solidFill>
-                  <a:schemeClr val="accent1"/>
-                </a:solidFill>
-                <a:latin typeface="Cambria" pitchFamily="34" charset="0"/>
-                <a:ea typeface="Cambria" pitchFamily="34" charset="-122"/>
-                <a:cs typeface="Cambria" pitchFamily="34" charset="-120"/>
-              </a:rPr>
-              <a:t>Q</a:t>
-            </a:r>
-            <a:endParaRPr lang="en-US" sz="4000" dirty="0"/>
-          </a:p>
-        </p:txBody>
-      </p:sp>
-      <p:sp>
-        <p:nvSpPr>
-          <p:cNvPr id="6" name="Text 4"/>
+              <a:rPr lang="en-US" sz="2200" b="1" dirty="0">
+                <a:solidFill>
+                  <a:schemeClr val="tx2"/>
+                </a:solidFill>
+              </a:rPr>
+              <a:t>ISECOM</a:t>
+            </a:r>
+            <a:endParaRPr lang="en-US" sz="2200" dirty="0"/>
+          </a:p>
+        </p:txBody>
+      </p:sp>
+      <p:sp>
+        <p:nvSpPr>
+          <p:cNvPr id="8" name="Text 6"/>
           <p:cNvSpPr txBox="1"/>
           <p:nvPr/>
         </p:nvSpPr>
         <p:spPr>
           <a:xfrm>
-            <a:off x="822960" y="2606040"/>
-            <a:ext cx="4846320" cy="822960"/>
+            <a:off x="2788920" y="2377440"/>
+            <a:ext cx="3017520" cy="274320"/>
           </a:xfrm>
           <a:prstGeom prst="rect">
             <a:avLst/>
@@ -9717,27 +9740,27 @@
               <a:buNone/>
             </a:pPr>
             <a:r>
-              <a:rPr lang="en-US" sz="2000" b="1" dirty="0">
-                <a:solidFill>
-                  <a:schemeClr val="tx2"/>
-                </a:solidFill>
-              </a:rPr>
-              <a:t>What went wrong, and how did you fix it?</a:t>
-            </a:r>
-            <a:endParaRPr lang="en-US" sz="2000" dirty="0"/>
-          </a:p>
-        </p:txBody>
-      </p:sp>
-      <p:sp>
-        <p:nvSpPr>
-          <p:cNvPr id="7" name="Text 5"/>
+              <a:rPr lang="en-US" sz="1300" dirty="0">
+                <a:solidFill>
+                  <a:schemeClr val="accent4"/>
+                </a:solidFill>
+              </a:rPr>
+              <a:t>isecom.org</a:t>
+            </a:r>
+            <a:endParaRPr lang="en-US" sz="1300" dirty="0"/>
+          </a:p>
+        </p:txBody>
+      </p:sp>
+      <p:sp>
+        <p:nvSpPr>
+          <p:cNvPr id="9" name="Text 7"/>
           <p:cNvSpPr txBox="1"/>
           <p:nvPr/>
         </p:nvSpPr>
         <p:spPr>
           <a:xfrm>
-            <a:off x="822960" y="3474720"/>
-            <a:ext cx="4846320" cy="2011680"/>
+            <a:off x="822960" y="2880360"/>
+            <a:ext cx="4937760" cy="1645920"/>
           </a:xfrm>
           <a:prstGeom prst="rect">
             <a:avLst/>
@@ -9749,35 +9772,68 @@
           <a:bodyPr wrap="square" lIns="0" tIns="0" rIns="0" bIns="0" rtlCol="0" anchor="t"/>
           <a:lstStyle/>
           <a:p>
-            <a:pPr marL="0" indent="0">
-              <a:buNone/>
-            </a:pPr>
-            <a:r>
-              <a:rPr lang="en-US" sz="1700" dirty="0">
-                <a:solidFill>
-                  <a:schemeClr val="tx1"/>
-                </a:solidFill>
-              </a:rPr>
-              <a:t>A state leak between test arms made a bare model look broken on a clean app. We proved it on a fresh page, fixed the harness and re-ran every model result.</a:t>
-            </a:r>
-            <a:endParaRPr lang="en-US" sz="1700" dirty="0"/>
-          </a:p>
-        </p:txBody>
-      </p:sp>
-      <p:sp>
-        <p:nvSpPr>
-          <p:cNvPr id="8" name="Shape 6"/>
+            <a:pPr marL="342900" indent="-342900">
+              <a:spcAft>
+                <a:spcPts val="600"/>
+              </a:spcAft>
+              <a:buSzPct val="100000"/>
+              <a:buChar char="•"/>
+            </a:pPr>
+            <a:r>
+              <a:rPr lang="en-US" sz="1500" dirty="0"/>
+              <a:t>Who they are: open security research community behind the OSSTMM (2001) and Hacker Highschool</a:t>
+            </a:r>
+          </a:p>
+          <a:p>
+            <a:pPr marL="342900" indent="-342900">
+              <a:spcAft>
+                <a:spcPts val="600"/>
+              </a:spcAft>
+              <a:buSzPct val="100000"/>
+              <a:buChar char="•"/>
+            </a:pPr>
+            <a:r>
+              <a:rPr lang="en-US" sz="1500" dirty="0"/>
+              <a:t>Our collaboration: a brief from a </a:t>
+            </a:r>
+            <a:r>
+              <a:rPr lang="en-US" sz="1500" dirty="0" err="1"/>
+              <a:t>synthie's</a:t>
+            </a:r>
+            <a:r>
+              <a:rPr lang="en-US" sz="1500" dirty="0"/>
+              <a:t> real automation, with Pete Herzog (ISECOM board)</a:t>
+            </a:r>
+          </a:p>
+          <a:p>
+            <a:pPr marL="342900" indent="-342900">
+              <a:spcAft>
+                <a:spcPts val="600"/>
+              </a:spcAft>
+              <a:buSzPct val="100000"/>
+              <a:buChar char="•"/>
+            </a:pPr>
+            <a:r>
+              <a:rPr lang="en-US" sz="1500" dirty="0"/>
+              <a:t>What it means: a live testbed with real failures, such as locator rot and a blocked posting pipeline</a:t>
+            </a:r>
+          </a:p>
+        </p:txBody>
+      </p:sp>
+      <p:sp>
+        <p:nvSpPr>
+          <p:cNvPr id="10" name="Shape 8"/>
           <p:cNvSpPr/>
           <p:nvPr/>
         </p:nvSpPr>
         <p:spPr>
           <a:xfrm>
             <a:off x="6217920" y="1783080"/>
-            <a:ext cx="5422392" cy="3840480"/>
+            <a:ext cx="5422392" cy="2926080"/>
           </a:xfrm>
           <a:prstGeom prst="roundRect">
             <a:avLst>
-              <a:gd name="adj" fmla="val 1905"/>
+              <a:gd name="adj" fmla="val 2500"/>
             </a:avLst>
           </a:prstGeom>
           <a:solidFill>
@@ -9795,14 +9851,65 @@
       </p:sp>
       <p:sp>
         <p:nvSpPr>
-          <p:cNvPr id="9" name="Text 7"/>
+          <p:cNvPr id="11" name="synthie icon disc"/>
+          <p:cNvSpPr/>
+          <p:nvPr/>
+        </p:nvSpPr>
+        <p:spPr>
+          <a:xfrm>
+            <a:off x="6492240" y="1965960"/>
+            <a:ext cx="685800" cy="685800"/>
+          </a:xfrm>
+          <a:prstGeom prst="ellipse">
+            <a:avLst/>
+          </a:prstGeom>
+          <a:solidFill>
+            <a:schemeClr val="accent1"/>
+          </a:solidFill>
+          <a:ln/>
+        </p:spPr>
+        <p:txBody>
+          <a:bodyPr/>
+          <a:lstStyle/>
+          <a:p>
+            <a:endParaRPr lang="en-US"/>
+          </a:p>
+        </p:txBody>
+      </p:sp>
+      <p:pic>
+        <p:nvPicPr>
+          <p:cNvPr id="12" name="synthie icon" descr="Robot icon"/>
+          <p:cNvPicPr>
+            <a:picLocks noChangeAspect="1"/>
+          </p:cNvPicPr>
+          <p:nvPr/>
+        </p:nvPicPr>
+        <p:blipFill>
+          <a:blip r:embed="rId3"/>
+          <a:stretch>
+            <a:fillRect/>
+          </a:stretch>
+        </p:blipFill>
+        <p:spPr>
+          <a:xfrm>
+            <a:off x="6656832" y="2130552"/>
+            <a:ext cx="356616" cy="356616"/>
+          </a:xfrm>
+          <a:prstGeom prst="rect">
+            <a:avLst/>
+          </a:prstGeom>
+        </p:spPr>
+      </p:pic>
+      <p:sp>
+        <p:nvSpPr>
+          <p:cNvPr id="13" name="Text 10"/>
           <p:cNvSpPr txBox="1"/>
           <p:nvPr/>
         </p:nvSpPr>
         <p:spPr>
           <a:xfrm>
-            <a:off x="6492240" y="1920240"/>
-            <a:ext cx="548640" cy="640080"/>
+            <a:off x="7360920" y="2011680"/>
+            <a:ext cx="4023360" cy="365760"/>
           </a:xfrm>
           <a:prstGeom prst="rect">
             <a:avLst/>
@@ -9818,30 +9925,27 @@
               <a:buNone/>
             </a:pPr>
             <a:r>
-              <a:rPr lang="en-US" sz="4000" b="1" dirty="0">
-                <a:solidFill>
-                  <a:schemeClr val="accent1"/>
-                </a:solidFill>
-                <a:latin typeface="Cambria" pitchFamily="34" charset="0"/>
-                <a:ea typeface="Cambria" pitchFamily="34" charset="-122"/>
-                <a:cs typeface="Cambria" pitchFamily="34" charset="-120"/>
-              </a:rPr>
-              <a:t>Q</a:t>
-            </a:r>
-            <a:endParaRPr lang="en-US" sz="4000" dirty="0"/>
-          </a:p>
-        </p:txBody>
-      </p:sp>
-      <p:sp>
-        <p:nvSpPr>
-          <p:cNvPr id="10" name="Text 8"/>
+              <a:rPr lang="en-US" sz="2200" b="1" dirty="0">
+                <a:solidFill>
+                  <a:schemeClr val="tx2"/>
+                </a:solidFill>
+              </a:rPr>
+              <a:t>Synthies</a:t>
+            </a:r>
+            <a:endParaRPr lang="en-US" sz="2200" dirty="0"/>
+          </a:p>
+        </p:txBody>
+      </p:sp>
+      <p:sp>
+        <p:nvSpPr>
+          <p:cNvPr id="14" name="Text 11"/>
           <p:cNvSpPr txBox="1"/>
           <p:nvPr/>
         </p:nvSpPr>
         <p:spPr>
           <a:xfrm>
-            <a:off x="6492240" y="2606040"/>
-            <a:ext cx="4846320" cy="822960"/>
+            <a:off x="7360920" y="2377440"/>
+            <a:ext cx="4023360" cy="274320"/>
           </a:xfrm>
           <a:prstGeom prst="rect">
             <a:avLst/>
@@ -9857,27 +9961,27 @@
               <a:buNone/>
             </a:pPr>
             <a:r>
-              <a:rPr lang="en-US" sz="2000" b="1" dirty="0">
-                <a:solidFill>
-                  <a:schemeClr val="tx2"/>
-                </a:solidFill>
-              </a:rPr>
-              <a:t>What is next?</a:t>
-            </a:r>
-            <a:endParaRPr lang="en-US" sz="2000" dirty="0"/>
-          </a:p>
-        </p:txBody>
-      </p:sp>
-      <p:sp>
-        <p:nvSpPr>
-          <p:cNvPr id="11" name="Text 9"/>
+              <a:rPr lang="en-US" sz="1300" dirty="0">
+                <a:solidFill>
+                  <a:schemeClr val="accent4"/>
+                </a:solidFill>
+              </a:rPr>
+              <a:t>long-running agents with an identity</a:t>
+            </a:r>
+            <a:endParaRPr lang="en-US" sz="1300" dirty="0"/>
+          </a:p>
+        </p:txBody>
+      </p:sp>
+      <p:sp>
+        <p:nvSpPr>
+          <p:cNvPr id="15" name="Text 12"/>
           <p:cNvSpPr txBox="1"/>
           <p:nvPr/>
         </p:nvSpPr>
         <p:spPr>
           <a:xfrm>
-            <a:off x="6492240" y="3474720"/>
-            <a:ext cx="4846320" cy="2011680"/>
+            <a:off x="6492240" y="2880360"/>
+            <a:ext cx="4937760" cy="1645920"/>
           </a:xfrm>
           <a:prstGeom prst="rect">
             <a:avLst/>
@@ -9889,18 +9993,349 @@
           <a:bodyPr wrap="square" lIns="0" tIns="0" rIns="0" bIns="0" rtlCol="0" anchor="t"/>
           <a:lstStyle/>
           <a:p>
-            <a:pPr marL="0" indent="0">
+            <a:pPr marL="342900" indent="-342900">
+              <a:spcAft>
+                <a:spcPts val="600"/>
+              </a:spcAft>
+              <a:buSzPct val="100000"/>
+              <a:buChar char="•"/>
+            </a:pPr>
+            <a:r>
+              <a:rPr lang="en-US" sz="1500" dirty="0">
+                <a:solidFill>
+                  <a:schemeClr val="tx1"/>
+                </a:solidFill>
+              </a:rPr>
+              <a:t>Run continuously on their own host</a:t>
+            </a:r>
+            <a:endParaRPr lang="en-US" sz="1500" dirty="0"/>
+          </a:p>
+          <a:p>
+            <a:pPr marL="342900" indent="-342900">
+              <a:spcAft>
+                <a:spcPts val="600"/>
+              </a:spcAft>
+              <a:buSzPct val="100000"/>
+              <a:buChar char="•"/>
+            </a:pPr>
+            <a:r>
+              <a:rPr lang="en-US" sz="1500" dirty="0">
+                <a:solidFill>
+                  <a:schemeClr val="tx1"/>
+                </a:solidFill>
+              </a:rPr>
+              <a:t>Have a chat identity and an owner</a:t>
+            </a:r>
+            <a:endParaRPr lang="en-US" sz="1500" dirty="0"/>
+          </a:p>
+          <a:p>
+            <a:pPr marL="342900" indent="-342900">
+              <a:spcAft>
+                <a:spcPts val="600"/>
+              </a:spcAft>
+              <a:buSzPct val="100000"/>
+              <a:buChar char="•"/>
+            </a:pPr>
+            <a:r>
+              <a:rPr lang="en-US" sz="1500" dirty="0">
+                <a:solidFill>
+                  <a:schemeClr val="tx1"/>
+                </a:solidFill>
+              </a:rPr>
+              <a:t>Act through a typed tool set, with logged actions</a:t>
+            </a:r>
+            <a:endParaRPr lang="en-US" sz="1500" dirty="0"/>
+          </a:p>
+        </p:txBody>
+      </p:sp>
+      <p:sp>
+        <p:nvSpPr>
+          <p:cNvPr id="16" name="flow Synthie"/>
+          <p:cNvSpPr/>
+          <p:nvPr/>
+        </p:nvSpPr>
+        <p:spPr>
+          <a:xfrm>
+            <a:off x="548640" y="5074920"/>
+            <a:ext cx="3108960" cy="868680"/>
+          </a:xfrm>
+          <a:prstGeom prst="roundRect">
+            <a:avLst>
+              <a:gd name="adj" fmla="val 10526"/>
+            </a:avLst>
+          </a:prstGeom>
+          <a:solidFill>
+            <a:schemeClr val="accent6"/>
+          </a:solidFill>
+          <a:ln/>
+        </p:spPr>
+        <p:txBody>
+          <a:bodyPr/>
+          <a:lstStyle/>
+          <a:p>
+            <a:endParaRPr lang="en-US"/>
+          </a:p>
+        </p:txBody>
+      </p:sp>
+      <p:sp>
+        <p:nvSpPr>
+          <p:cNvPr id="17" name="Text 14"/>
+          <p:cNvSpPr txBox="1"/>
+          <p:nvPr/>
+        </p:nvSpPr>
+        <p:spPr>
+          <a:xfrm>
+            <a:off x="548640" y="5074920"/>
+            <a:ext cx="3108960" cy="868680"/>
+          </a:xfrm>
+          <a:prstGeom prst="rect">
+            <a:avLst/>
+          </a:prstGeom>
+          <a:noFill/>
+          <a:ln/>
+        </p:spPr>
+        <p:txBody>
+          <a:bodyPr wrap="square" lIns="0" tIns="0" rIns="0" bIns="0" rtlCol="0" anchor="ctr"/>
+          <a:lstStyle/>
+          <a:p>
+            <a:pPr marL="0" indent="0" algn="ctr">
               <a:buNone/>
             </a:pPr>
             <a:r>
-              <a:rPr lang="en-US" sz="1700" dirty="0">
-                <a:solidFill>
-                  <a:schemeClr val="tx1"/>
-                </a:solidFill>
-              </a:rPr>
-              <a:t>Scrolling on Android, a second model, more apps and intents, a study with screen-reader users, and a synthie using the tool end to end.</a:t>
-            </a:r>
-            <a:endParaRPr lang="en-US" sz="1700" dirty="0"/>
+              <a:rPr lang="en-US" sz="1800" b="1" dirty="0">
+                <a:solidFill>
+                  <a:schemeClr val="bg1"/>
+                </a:solidFill>
+              </a:rPr>
+              <a:t>Synthie</a:t>
+            </a:r>
+            <a:endParaRPr lang="en-US" sz="1600" dirty="0"/>
+          </a:p>
+          <a:p>
+            <a:pPr marL="0" indent="0" algn="ctr">
+              <a:buNone/>
+            </a:pPr>
+            <a:r>
+              <a:rPr lang="en-US" sz="1300" dirty="0">
+                <a:solidFill>
+                  <a:schemeClr val="bg1"/>
+                </a:solidFill>
+              </a:rPr>
+              <a:t>goal, in words</a:t>
+            </a:r>
+            <a:endParaRPr lang="en-US" sz="1600" dirty="0"/>
+          </a:p>
+        </p:txBody>
+      </p:sp>
+      <p:sp>
+        <p:nvSpPr>
+          <p:cNvPr id="18" name="flow arrow 1"/>
+          <p:cNvSpPr/>
+          <p:nvPr/>
+        </p:nvSpPr>
+        <p:spPr>
+          <a:xfrm>
+            <a:off x="3749040" y="5321808"/>
+            <a:ext cx="685800" cy="365760"/>
+          </a:xfrm>
+          <a:prstGeom prst="rightArrow">
+            <a:avLst/>
+          </a:prstGeom>
+          <a:solidFill>
+            <a:schemeClr val="accent4"/>
+          </a:solidFill>
+          <a:ln/>
+        </p:spPr>
+        <p:txBody>
+          <a:bodyPr/>
+          <a:lstStyle/>
+          <a:p>
+            <a:endParaRPr lang="en-US"/>
+          </a:p>
+        </p:txBody>
+      </p:sp>
+      <p:sp>
+        <p:nvSpPr>
+          <p:cNvPr id="19" name="flow Kenna tool"/>
+          <p:cNvSpPr/>
+          <p:nvPr/>
+        </p:nvSpPr>
+        <p:spPr>
+          <a:xfrm>
+            <a:off x="4526280" y="5074920"/>
+            <a:ext cx="3108960" cy="868680"/>
+          </a:xfrm>
+          <a:prstGeom prst="roundRect">
+            <a:avLst>
+              <a:gd name="adj" fmla="val 10526"/>
+            </a:avLst>
+          </a:prstGeom>
+          <a:solidFill>
+            <a:schemeClr val="accent1"/>
+          </a:solidFill>
+          <a:ln/>
+        </p:spPr>
+        <p:txBody>
+          <a:bodyPr/>
+          <a:lstStyle/>
+          <a:p>
+            <a:endParaRPr lang="en-US"/>
+          </a:p>
+        </p:txBody>
+      </p:sp>
+      <p:sp>
+        <p:nvSpPr>
+          <p:cNvPr id="20" name="Text 17"/>
+          <p:cNvSpPr txBox="1"/>
+          <p:nvPr/>
+        </p:nvSpPr>
+        <p:spPr>
+          <a:xfrm>
+            <a:off x="4526280" y="5074920"/>
+            <a:ext cx="3108960" cy="868680"/>
+          </a:xfrm>
+          <a:prstGeom prst="rect">
+            <a:avLst/>
+          </a:prstGeom>
+          <a:noFill/>
+          <a:ln/>
+        </p:spPr>
+        <p:txBody>
+          <a:bodyPr wrap="square" lIns="0" tIns="0" rIns="0" bIns="0" rtlCol="0" anchor="ctr"/>
+          <a:lstStyle/>
+          <a:p>
+            <a:pPr marL="0" indent="0" algn="ctr">
+              <a:buNone/>
+            </a:pPr>
+            <a:r>
+              <a:rPr lang="en-US" sz="1800" b="1" dirty="0">
+                <a:solidFill>
+                  <a:schemeClr val="bg1"/>
+                </a:solidFill>
+              </a:rPr>
+              <a:t>Beyond MCP tool</a:t>
+            </a:r>
+            <a:endParaRPr lang="en-US" sz="1600" dirty="0"/>
+          </a:p>
+          <a:p>
+            <a:pPr marL="0" indent="0" algn="ctr">
+              <a:buNone/>
+            </a:pPr>
+            <a:r>
+              <a:rPr lang="en-US" sz="1300" dirty="0">
+                <a:solidFill>
+                  <a:schemeClr val="bg1"/>
+                </a:solidFill>
+              </a:rPr>
+              <a:t>ladder + checks</a:t>
+            </a:r>
+            <a:endParaRPr lang="en-US" sz="1600" dirty="0"/>
+          </a:p>
+        </p:txBody>
+      </p:sp>
+      <p:sp>
+        <p:nvSpPr>
+          <p:cNvPr id="21" name="flow arrow 2"/>
+          <p:cNvSpPr/>
+          <p:nvPr/>
+        </p:nvSpPr>
+        <p:spPr>
+          <a:xfrm>
+            <a:off x="7726680" y="5321808"/>
+            <a:ext cx="685800" cy="365760"/>
+          </a:xfrm>
+          <a:prstGeom prst="rightArrow">
+            <a:avLst/>
+          </a:prstGeom>
+          <a:solidFill>
+            <a:schemeClr val="accent4"/>
+          </a:solidFill>
+          <a:ln/>
+        </p:spPr>
+        <p:txBody>
+          <a:bodyPr/>
+          <a:lstStyle/>
+          <a:p>
+            <a:endParaRPr lang="en-US"/>
+          </a:p>
+        </p:txBody>
+      </p:sp>
+      <p:sp>
+        <p:nvSpPr>
+          <p:cNvPr id="22" name="flow The app"/>
+          <p:cNvSpPr/>
+          <p:nvPr/>
+        </p:nvSpPr>
+        <p:spPr>
+          <a:xfrm>
+            <a:off x="8503920" y="5074920"/>
+            <a:ext cx="3108960" cy="868680"/>
+          </a:xfrm>
+          <a:prstGeom prst="roundRect">
+            <a:avLst>
+              <a:gd name="adj" fmla="val 10526"/>
+            </a:avLst>
+          </a:prstGeom>
+          <a:solidFill>
+            <a:schemeClr val="accent4"/>
+          </a:solidFill>
+          <a:ln/>
+        </p:spPr>
+        <p:txBody>
+          <a:bodyPr/>
+          <a:lstStyle/>
+          <a:p>
+            <a:endParaRPr lang="en-US"/>
+          </a:p>
+        </p:txBody>
+      </p:sp>
+      <p:sp>
+        <p:nvSpPr>
+          <p:cNvPr id="23" name="Text 20"/>
+          <p:cNvSpPr txBox="1"/>
+          <p:nvPr/>
+        </p:nvSpPr>
+        <p:spPr>
+          <a:xfrm>
+            <a:off x="8503920" y="5074920"/>
+            <a:ext cx="3108960" cy="868680"/>
+          </a:xfrm>
+          <a:prstGeom prst="rect">
+            <a:avLst/>
+          </a:prstGeom>
+          <a:noFill/>
+          <a:ln/>
+        </p:spPr>
+        <p:txBody>
+          <a:bodyPr wrap="square" lIns="0" tIns="0" rIns="0" bIns="0" rtlCol="0" anchor="ctr"/>
+          <a:lstStyle/>
+          <a:p>
+            <a:pPr marL="0" indent="0" algn="ctr">
+              <a:buNone/>
+            </a:pPr>
+            <a:r>
+              <a:rPr lang="en-US" sz="1800" b="1" dirty="0">
+                <a:solidFill>
+                  <a:schemeClr val="bg1"/>
+                </a:solidFill>
+              </a:rPr>
+              <a:t>The app</a:t>
+            </a:r>
+            <a:endParaRPr lang="en-US" sz="1600" dirty="0"/>
+          </a:p>
+          <a:p>
+            <a:pPr marL="0" indent="0" algn="ctr">
+              <a:buNone/>
+            </a:pPr>
+            <a:r>
+              <a:rPr lang="en-US" sz="1300" dirty="0">
+                <a:solidFill>
+                  <a:schemeClr val="bg1"/>
+                </a:solidFill>
+              </a:rPr>
+              <a:t>web or Android</a:t>
+            </a:r>
+            <a:endParaRPr lang="en-US" sz="1600" dirty="0"/>
           </a:p>
         </p:txBody>
       </p:sp>
@@ -9924,7 +10359,7 @@
           </a:prstGeom>
           <a:extLst>
             <a:ext uri="{C572A759-6A51-4108-AA02-DFA0A04FC94B}">
-              <ma14:wrappingTextBoxFlag xmlns="" xmlns:ma14="http://schemas.microsoft.com/office/mac/drawingml/2011/main" val="0"/>
+              <ma14:wrappingTextBoxFlag xmlns:ma14="http://schemas.microsoft.com/office/mac/drawingml/2011/main" xmlns="" val="0"/>
             </a:ext>
           </a:extLst>
         </p:spPr>
@@ -9943,266 +10378,21 @@
             <a:pPr algn="r"/>
             <a:fld id="{F7021451-1387-4CA6-816F-3879F97B5CBC}" type="slidenum">
               <a:rPr lang="en-US" b="0"/>
-              <a:t>19</a:t>
+              <a:t>2</a:t>
             </a:fld>
             <a:endParaRPr lang="en-US"/>
           </a:p>
         </p:txBody>
       </p:sp>
-    </p:spTree>
-  </p:cSld>
-  <p:clrMapOvr>
-    <a:masterClrMapping/>
-  </p:clrMapOvr>
-</p:sld>
-</file>
-
-<file path=ppt/slides/slide2.xml><?xml version="1.0" encoding="utf-8"?>
-<p:sld xmlns:a="http://schemas.openxmlformats.org/drawingml/2006/main" xmlns:r="http://schemas.openxmlformats.org/officeDocument/2006/relationships" xmlns:p="http://schemas.openxmlformats.org/presentationml/2006/main">
-  <p:cSld name="Slide 2">
-    <p:spTree>
-      <p:nvGrpSpPr>
-        <p:cNvPr id="1" name=""/>
-        <p:cNvGrpSpPr/>
-        <p:nvPr/>
-      </p:nvGrpSpPr>
-      <p:grpSpPr>
-        <a:xfrm>
-          <a:off x="0" y="0"/>
-          <a:ext cx="0" cy="0"/>
-          <a:chOff x="0" y="0"/>
-          <a:chExt cx="0" cy="0"/>
-        </a:xfrm>
-      </p:grpSpPr>
-      <p:sp>
-        <p:nvSpPr>
-          <p:cNvPr id="2" name="Text 0"/>
-          <p:cNvSpPr>
-            <a:spLocks noGrp="1"/>
-          </p:cNvSpPr>
-          <p:nvPr>
-            <p:ph type="title" idx="100" hasCustomPrompt="1"/>
-          </p:nvPr>
-        </p:nvSpPr>
-        <p:spPr>
-          <a:xfrm>
-            <a:off x="548640" y="347472"/>
-            <a:ext cx="11094415" cy="640080"/>
-          </a:xfrm>
-          <a:prstGeom prst="rect">
-            <a:avLst/>
-          </a:prstGeom>
-          <a:noFill/>
-          <a:ln/>
-        </p:spPr>
-        <p:txBody>
-          <a:bodyPr wrap="square" lIns="0" tIns="0" rIns="0" bIns="0" rtlCol="0" anchor="t"/>
-          <a:lstStyle/>
-          <a:p>
-            <a:pPr marL="0" indent="0" algn="l">
-              <a:buNone/>
-            </a:pPr>
-            <a:r>
-              <a:rPr lang="en-US" sz="3200" b="1" dirty="0">
-                <a:solidFill>
-                  <a:schemeClr val="tx2"/>
-                </a:solidFill>
-              </a:rPr>
-              <a:t>Why this matters</a:t>
-            </a:r>
-            <a:endParaRPr lang="en-US" sz="3200" dirty="0"/>
-          </a:p>
-        </p:txBody>
-      </p:sp>
-      <p:sp>
-        <p:nvSpPr>
-          <p:cNvPr id="3" name="Text 1"/>
-          <p:cNvSpPr txBox="1"/>
-          <p:nvPr/>
-        </p:nvSpPr>
-        <p:spPr>
-          <a:xfrm>
-            <a:off x="548640" y="1024128"/>
-            <a:ext cx="11094415" cy="365760"/>
-          </a:xfrm>
-          <a:prstGeom prst="rect">
-            <a:avLst/>
-          </a:prstGeom>
-          <a:noFill/>
-          <a:ln/>
-        </p:spPr>
-        <p:txBody>
-          <a:bodyPr wrap="square" lIns="0" tIns="0" rIns="0" bIns="0" rtlCol="0" anchor="t"/>
-          <a:lstStyle/>
-          <a:p>
-            <a:pPr marL="0" indent="0">
-              <a:buNone/>
-            </a:pPr>
-            <a:r>
-              <a:rPr lang="en-US" sz="1800" dirty="0">
-                <a:solidFill>
-                  <a:schemeClr val="accent4"/>
-                </a:solidFill>
-              </a:rPr>
-              <a:t>Assistants operate apps never built for them, and users cannot always take over when a step fails</a:t>
-            </a:r>
-            <a:endParaRPr lang="en-US" sz="1800" dirty="0"/>
-          </a:p>
-        </p:txBody>
-      </p:sp>
-      <p:sp>
-        <p:nvSpPr>
-          <p:cNvPr id="4" name="why icon 1 disc"/>
-          <p:cNvSpPr/>
-          <p:nvPr/>
-        </p:nvSpPr>
-        <p:spPr>
-          <a:xfrm>
-            <a:off x="548640" y="1783080"/>
-            <a:ext cx="731520" cy="731520"/>
-          </a:xfrm>
-          <a:prstGeom prst="ellipse">
-            <a:avLst/>
-          </a:prstGeom>
-          <a:solidFill>
-            <a:schemeClr val="accent1"/>
-          </a:solidFill>
-          <a:ln/>
-        </p:spPr>
-        <p:txBody>
-          <a:bodyPr/>
-          <a:lstStyle/>
-          <a:p>
-            <a:endParaRPr lang="en-US"/>
-          </a:p>
-        </p:txBody>
-      </p:sp>
       <p:pic>
         <p:nvPicPr>
-          <p:cNvPr id="5" name="why icon 1" descr="Plug icon"/>
-          <p:cNvPicPr>
-            <a:picLocks noChangeAspect="1"/>
-          </p:cNvPicPr>
-          <p:nvPr/>
-        </p:nvPicPr>
-        <p:blipFill>
-          <a:blip r:embed="rId3"/>
-          <a:stretch>
-            <a:fillRect/>
-          </a:stretch>
-        </p:blipFill>
-        <p:spPr>
-          <a:xfrm>
-            <a:off x="724205" y="1958645"/>
-            <a:ext cx="380390" cy="380390"/>
-          </a:xfrm>
-          <a:prstGeom prst="rect">
-            <a:avLst/>
-          </a:prstGeom>
-        </p:spPr>
-      </p:pic>
-      <p:sp>
-        <p:nvSpPr>
-          <p:cNvPr id="6" name="Text 3"/>
-          <p:cNvSpPr txBox="1"/>
-          <p:nvPr/>
-        </p:nvSpPr>
-        <p:spPr>
-          <a:xfrm>
-            <a:off x="1554480" y="1783080"/>
-            <a:ext cx="5852160" cy="365760"/>
-          </a:xfrm>
-          <a:prstGeom prst="rect">
-            <a:avLst/>
-          </a:prstGeom>
-          <a:noFill/>
-          <a:ln/>
-        </p:spPr>
-        <p:txBody>
-          <a:bodyPr wrap="square" lIns="0" tIns="0" rIns="0" bIns="0" rtlCol="0" anchor="t"/>
-          <a:lstStyle/>
-          <a:p>
-            <a:pPr marL="0" indent="0">
-              <a:buNone/>
-            </a:pPr>
-            <a:r>
-              <a:rPr lang="en-US" sz="2000" b="1" dirty="0">
-                <a:solidFill>
-                  <a:schemeClr val="tx2"/>
-                </a:solidFill>
-              </a:rPr>
-              <a:t>No API to call</a:t>
-            </a:r>
-            <a:endParaRPr lang="en-US" sz="2000" dirty="0"/>
-          </a:p>
-        </p:txBody>
-      </p:sp>
-      <p:sp>
-        <p:nvSpPr>
-          <p:cNvPr id="7" name="Text 4"/>
-          <p:cNvSpPr txBox="1"/>
-          <p:nvPr/>
-        </p:nvSpPr>
-        <p:spPr>
-          <a:xfrm>
-            <a:off x="1554480" y="2194560"/>
-            <a:ext cx="5852160" cy="914400"/>
-          </a:xfrm>
-          <a:prstGeom prst="rect">
-            <a:avLst/>
-          </a:prstGeom>
-          <a:noFill/>
-          <a:ln/>
-        </p:spPr>
-        <p:txBody>
-          <a:bodyPr wrap="square" lIns="0" tIns="0" rIns="0" bIns="0" rtlCol="0" anchor="t"/>
-          <a:lstStyle/>
-          <a:p>
-            <a:pPr marL="0" indent="0">
-              <a:buNone/>
-            </a:pPr>
-            <a:r>
-              <a:rPr lang="en-US" sz="1500" dirty="0">
-                <a:solidFill>
-                  <a:schemeClr val="tx1"/>
-                </a:solidFill>
-              </a:rPr>
-              <a:t>Many everyday apps, stores and legacy tools expose only a screen. Where an API or MCP exists, use it; this is for the rest.</a:t>
-            </a:r>
-            <a:endParaRPr lang="en-US" sz="1500" dirty="0"/>
-          </a:p>
-        </p:txBody>
-      </p:sp>
-      <p:sp>
-        <p:nvSpPr>
-          <p:cNvPr id="8" name="why icon 2 disc"/>
-          <p:cNvSpPr/>
-          <p:nvPr/>
-        </p:nvSpPr>
-        <p:spPr>
-          <a:xfrm>
-            <a:off x="548640" y="3246120"/>
-            <a:ext cx="731520" cy="731520"/>
-          </a:xfrm>
-          <a:prstGeom prst="ellipse">
-            <a:avLst/>
-          </a:prstGeom>
-          <a:solidFill>
-            <a:schemeClr val="accent1"/>
-          </a:solidFill>
-          <a:ln/>
-        </p:spPr>
-        <p:txBody>
-          <a:bodyPr/>
-          <a:lstStyle/>
-          <a:p>
-            <a:endParaRPr lang="en-US"/>
-          </a:p>
-        </p:txBody>
-      </p:sp>
-      <p:pic>
-        <p:nvPicPr>
-          <p:cNvPr id="9" name="why icon 2" descr="Bug icon"/>
+          <p:cNvPr id="26" name="Picture 25">
+            <a:extLst>
+              <a:ext uri="{FF2B5EF4-FFF2-40B4-BE49-F238E27FC236}">
+                <a16:creationId xmlns:a16="http://schemas.microsoft.com/office/drawing/2014/main" id="{CD0AAE67-1E16-70BA-D6D2-2FC2FC25F47D}"/>
+              </a:ext>
+            </a:extLst>
+          </p:cNvPr>
           <p:cNvPicPr>
             <a:picLocks noChangeAspect="1"/>
           </p:cNvPicPr>
@@ -10216,469 +10406,14 @@
         </p:blipFill>
         <p:spPr>
           <a:xfrm>
-            <a:off x="724205" y="3421685"/>
-            <a:ext cx="380390" cy="380390"/>
+            <a:off x="759266" y="2011680"/>
+            <a:ext cx="1773622" cy="516589"/>
           </a:xfrm>
           <a:prstGeom prst="rect">
             <a:avLst/>
           </a:prstGeom>
         </p:spPr>
       </p:pic>
-      <p:sp>
-        <p:nvSpPr>
-          <p:cNvPr id="10" name="Text 6"/>
-          <p:cNvSpPr txBox="1"/>
-          <p:nvPr/>
-        </p:nvSpPr>
-        <p:spPr>
-          <a:xfrm>
-            <a:off x="1554480" y="3246120"/>
-            <a:ext cx="5852160" cy="365760"/>
-          </a:xfrm>
-          <a:prstGeom prst="rect">
-            <a:avLst/>
-          </a:prstGeom>
-          <a:noFill/>
-          <a:ln/>
-        </p:spPr>
-        <p:txBody>
-          <a:bodyPr wrap="square" lIns="0" tIns="0" rIns="0" bIns="0" rtlCol="0" anchor="t"/>
-          <a:lstStyle/>
-          <a:p>
-            <a:pPr marL="0" indent="0">
-              <a:buNone/>
-            </a:pPr>
-            <a:r>
-              <a:rPr lang="en-US" sz="2000" b="1" dirty="0">
-                <a:solidFill>
-                  <a:schemeClr val="tx2"/>
-                </a:solidFill>
-              </a:rPr>
-              <a:t>Recorded scripts break silently</a:t>
-            </a:r>
-            <a:endParaRPr lang="en-US" sz="2000" dirty="0"/>
-          </a:p>
-        </p:txBody>
-      </p:sp>
-      <p:sp>
-        <p:nvSpPr>
-          <p:cNvPr id="11" name="Text 7"/>
-          <p:cNvSpPr txBox="1"/>
-          <p:nvPr/>
-        </p:nvSpPr>
-        <p:spPr>
-          <a:xfrm>
-            <a:off x="1554480" y="3657600"/>
-            <a:ext cx="5852160" cy="914400"/>
-          </a:xfrm>
-          <a:prstGeom prst="rect">
-            <a:avLst/>
-          </a:prstGeom>
-          <a:noFill/>
-          <a:ln/>
-        </p:spPr>
-        <p:txBody>
-          <a:bodyPr wrap="square" lIns="0" tIns="0" rIns="0" bIns="0" rtlCol="0" anchor="t"/>
-          <a:lstStyle/>
-          <a:p>
-            <a:pPr marL="0" indent="0">
-              <a:buNone/>
-            </a:pPr>
-            <a:r>
-              <a:rPr lang="en-US" sz="1500" dirty="0">
-                <a:solidFill>
-                  <a:schemeClr val="tx1"/>
-                </a:solidFill>
-              </a:rPr>
-              <a:t>One renamed id and a recorded click goes nowhere. Worse, nothing checks that the goal was actually reached.</a:t>
-            </a:r>
-            <a:endParaRPr lang="en-US" sz="1500" dirty="0"/>
-          </a:p>
-        </p:txBody>
-      </p:sp>
-      <p:sp>
-        <p:nvSpPr>
-          <p:cNvPr id="12" name="why icon 3 disc"/>
-          <p:cNvSpPr/>
-          <p:nvPr/>
-        </p:nvSpPr>
-        <p:spPr>
-          <a:xfrm>
-            <a:off x="548640" y="4709160"/>
-            <a:ext cx="731520" cy="731520"/>
-          </a:xfrm>
-          <a:prstGeom prst="ellipse">
-            <a:avLst/>
-          </a:prstGeom>
-          <a:solidFill>
-            <a:schemeClr val="accent1"/>
-          </a:solidFill>
-          <a:ln/>
-        </p:spPr>
-        <p:txBody>
-          <a:bodyPr/>
-          <a:lstStyle/>
-          <a:p>
-            <a:endParaRPr lang="en-US"/>
-          </a:p>
-        </p:txBody>
-      </p:sp>
-      <p:pic>
-        <p:nvPicPr>
-          <p:cNvPr id="13" name="why icon 3" descr="UniversalAccess icon"/>
-          <p:cNvPicPr>
-            <a:picLocks noChangeAspect="1"/>
-          </p:cNvPicPr>
-          <p:nvPr/>
-        </p:nvPicPr>
-        <p:blipFill>
-          <a:blip r:embed="rId5"/>
-          <a:stretch>
-            <a:fillRect/>
-          </a:stretch>
-        </p:blipFill>
-        <p:spPr>
-          <a:xfrm>
-            <a:off x="724205" y="4884725"/>
-            <a:ext cx="380390" cy="380390"/>
-          </a:xfrm>
-          <a:prstGeom prst="rect">
-            <a:avLst/>
-          </a:prstGeom>
-        </p:spPr>
-      </p:pic>
-      <p:sp>
-        <p:nvSpPr>
-          <p:cNvPr id="14" name="Text 9"/>
-          <p:cNvSpPr txBox="1"/>
-          <p:nvPr/>
-        </p:nvSpPr>
-        <p:spPr>
-          <a:xfrm>
-            <a:off x="1554480" y="4709160"/>
-            <a:ext cx="5852160" cy="365760"/>
-          </a:xfrm>
-          <a:prstGeom prst="rect">
-            <a:avLst/>
-          </a:prstGeom>
-          <a:noFill/>
-          <a:ln/>
-        </p:spPr>
-        <p:txBody>
-          <a:bodyPr wrap="square" lIns="0" tIns="0" rIns="0" bIns="0" rtlCol="0" anchor="t"/>
-          <a:lstStyle/>
-          <a:p>
-            <a:pPr marL="0" indent="0">
-              <a:buNone/>
-            </a:pPr>
-            <a:r>
-              <a:rPr lang="en-US" sz="2000" b="1" dirty="0">
-                <a:solidFill>
-                  <a:schemeClr val="tx2"/>
-                </a:solidFill>
-              </a:rPr>
-              <a:t>The user may not be able to step in</a:t>
-            </a:r>
-            <a:endParaRPr lang="en-US" sz="2000" dirty="0"/>
-          </a:p>
-        </p:txBody>
-      </p:sp>
-      <p:sp>
-        <p:nvSpPr>
-          <p:cNvPr id="15" name="Text 10"/>
-          <p:cNvSpPr txBox="1"/>
-          <p:nvPr/>
-        </p:nvSpPr>
-        <p:spPr>
-          <a:xfrm>
-            <a:off x="1554480" y="5120640"/>
-            <a:ext cx="5852160" cy="914400"/>
-          </a:xfrm>
-          <a:prstGeom prst="rect">
-            <a:avLst/>
-          </a:prstGeom>
-          <a:noFill/>
-          <a:ln/>
-        </p:spPr>
-        <p:txBody>
-          <a:bodyPr wrap="square" lIns="0" tIns="0" rIns="0" bIns="0" rtlCol="0" anchor="t"/>
-          <a:lstStyle/>
-          <a:p>
-            <a:pPr marL="0" indent="0">
-              <a:buNone/>
-            </a:pPr>
-            <a:r>
-              <a:rPr lang="en-US" sz="1500" dirty="0">
-                <a:solidFill>
-                  <a:schemeClr val="tx1"/>
-                </a:solidFill>
-              </a:rPr>
-              <a:t>For a blind or motor-impaired user, "please do this step yourself" is not a fallback. The assistant has to be right, or say clearly that it is not.</a:t>
-            </a:r>
-            <a:endParaRPr lang="en-US" sz="1500" dirty="0"/>
-          </a:p>
-        </p:txBody>
-      </p:sp>
-      <p:sp>
-        <p:nvSpPr>
-          <p:cNvPr id="16" name="Shape 11"/>
-          <p:cNvSpPr/>
-          <p:nvPr/>
-        </p:nvSpPr>
-        <p:spPr>
-          <a:xfrm>
-            <a:off x="7589520" y="1783080"/>
-            <a:ext cx="4050792" cy="4297680"/>
-          </a:xfrm>
-          <a:prstGeom prst="roundRect">
-            <a:avLst>
-              <a:gd name="adj" fmla="val 1806"/>
-            </a:avLst>
-          </a:prstGeom>
-          <a:solidFill>
-            <a:schemeClr val="bg2"/>
-          </a:solidFill>
-          <a:ln/>
-        </p:spPr>
-        <p:txBody>
-          <a:bodyPr/>
-          <a:lstStyle/>
-          <a:p>
-            <a:endParaRPr lang="en-US"/>
-          </a:p>
-        </p:txBody>
-      </p:sp>
-      <p:sp>
-        <p:nvSpPr>
-          <p:cNvPr id="17" name="Text 12"/>
-          <p:cNvSpPr txBox="1"/>
-          <p:nvPr/>
-        </p:nvSpPr>
-        <p:spPr>
-          <a:xfrm>
-            <a:off x="7863840" y="1965960"/>
-            <a:ext cx="3566160" cy="274320"/>
-          </a:xfrm>
-          <a:prstGeom prst="rect">
-            <a:avLst/>
-          </a:prstGeom>
-          <a:noFill/>
-          <a:ln/>
-        </p:spPr>
-        <p:txBody>
-          <a:bodyPr wrap="square" lIns="0" tIns="0" rIns="0" bIns="0" rtlCol="0" anchor="t"/>
-          <a:lstStyle/>
-          <a:p>
-            <a:pPr marL="0" indent="0">
-              <a:buNone/>
-            </a:pPr>
-            <a:r>
-              <a:rPr lang="en-US" sz="1100" b="1" kern="0" spc="200" dirty="0">
-                <a:solidFill>
-                  <a:schemeClr val="accent4"/>
-                </a:solidFill>
-              </a:rPr>
-              <a:t>MEASURED ON ANDROID SETTINGS</a:t>
-            </a:r>
-            <a:endParaRPr lang="en-US" sz="1100" dirty="0"/>
-          </a:p>
-        </p:txBody>
-      </p:sp>
-      <p:sp>
-        <p:nvSpPr>
-          <p:cNvPr id="18" name="Text 13"/>
-          <p:cNvSpPr txBox="1"/>
-          <p:nvPr/>
-        </p:nvSpPr>
-        <p:spPr>
-          <a:xfrm>
-            <a:off x="7863840" y="2331720"/>
-            <a:ext cx="3566160" cy="914400"/>
-          </a:xfrm>
-          <a:prstGeom prst="rect">
-            <a:avLst/>
-          </a:prstGeom>
-          <a:noFill/>
-          <a:ln/>
-        </p:spPr>
-        <p:txBody>
-          <a:bodyPr wrap="square" lIns="0" tIns="0" rIns="0" bIns="0" rtlCol="0" anchor="t"/>
-          <a:lstStyle/>
-          <a:p>
-            <a:pPr marL="0" indent="0">
-              <a:buNone/>
-            </a:pPr>
-            <a:r>
-              <a:rPr lang="en-US" sz="6000" b="1" dirty="0">
-                <a:solidFill>
-                  <a:schemeClr val="accent3"/>
-                </a:solidFill>
-                <a:latin typeface="Cambria" pitchFamily="34" charset="0"/>
-                <a:ea typeface="Cambria" pitchFamily="34" charset="-122"/>
-                <a:cs typeface="Cambria" pitchFamily="34" charset="-120"/>
-              </a:rPr>
-              <a:t>78%</a:t>
-            </a:r>
-            <a:endParaRPr lang="en-US" sz="6000" dirty="0"/>
-          </a:p>
-        </p:txBody>
-      </p:sp>
-      <p:sp>
-        <p:nvSpPr>
-          <p:cNvPr id="19" name="Text 14"/>
-          <p:cNvSpPr txBox="1"/>
-          <p:nvPr/>
-        </p:nvSpPr>
-        <p:spPr>
-          <a:xfrm>
-            <a:off x="7863840" y="3246120"/>
-            <a:ext cx="3566160" cy="640080"/>
-          </a:xfrm>
-          <a:prstGeom prst="rect">
-            <a:avLst/>
-          </a:prstGeom>
-          <a:noFill/>
-          <a:ln/>
-        </p:spPr>
-        <p:txBody>
-          <a:bodyPr wrap="square" lIns="0" tIns="0" rIns="0" bIns="0" rtlCol="0" anchor="t"/>
-          <a:lstStyle/>
-          <a:p>
-            <a:pPr marL="0" indent="0">
-              <a:buNone/>
-            </a:pPr>
-            <a:r>
-              <a:rPr lang="en-US" sz="1400" dirty="0">
-                <a:solidFill>
-                  <a:schemeClr val="tx1"/>
-                </a:solidFill>
-              </a:rPr>
-              <a:t>of controls look nameless judged by their own attributes</a:t>
-            </a:r>
-            <a:endParaRPr lang="en-US" sz="1400" dirty="0"/>
-          </a:p>
-        </p:txBody>
-      </p:sp>
-      <p:sp>
-        <p:nvSpPr>
-          <p:cNvPr id="20" name="Text 15"/>
-          <p:cNvSpPr txBox="1"/>
-          <p:nvPr/>
-        </p:nvSpPr>
-        <p:spPr>
-          <a:xfrm>
-            <a:off x="7863840" y="4023360"/>
-            <a:ext cx="3566160" cy="914400"/>
-          </a:xfrm>
-          <a:prstGeom prst="rect">
-            <a:avLst/>
-          </a:prstGeom>
-          <a:noFill/>
-          <a:ln/>
-        </p:spPr>
-        <p:txBody>
-          <a:bodyPr wrap="square" lIns="0" tIns="0" rIns="0" bIns="0" rtlCol="0" anchor="t"/>
-          <a:lstStyle/>
-          <a:p>
-            <a:pPr marL="0" indent="0">
-              <a:buNone/>
-            </a:pPr>
-            <a:r>
-              <a:rPr lang="en-US" sz="6000" b="1" dirty="0">
-                <a:solidFill>
-                  <a:schemeClr val="accent1"/>
-                </a:solidFill>
-                <a:latin typeface="Cambria" pitchFamily="34" charset="0"/>
-                <a:ea typeface="Cambria" pitchFamily="34" charset="-122"/>
-                <a:cs typeface="Cambria" pitchFamily="34" charset="-120"/>
-              </a:rPr>
-              <a:t>2%</a:t>
-            </a:r>
-            <a:endParaRPr lang="en-US" sz="6000" dirty="0"/>
-          </a:p>
-        </p:txBody>
-      </p:sp>
-      <p:sp>
-        <p:nvSpPr>
-          <p:cNvPr id="21" name="Text 16"/>
-          <p:cNvSpPr txBox="1"/>
-          <p:nvPr/>
-        </p:nvSpPr>
-        <p:spPr>
-          <a:xfrm>
-            <a:off x="7863840" y="4937760"/>
-            <a:ext cx="3566160" cy="822960"/>
-          </a:xfrm>
-          <a:prstGeom prst="rect">
-            <a:avLst/>
-          </a:prstGeom>
-          <a:noFill/>
-          <a:ln/>
-        </p:spPr>
-        <p:txBody>
-          <a:bodyPr wrap="square" lIns="0" tIns="0" rIns="0" bIns="0" rtlCol="0" anchor="t"/>
-          <a:lstStyle/>
-          <a:p>
-            <a:pPr marL="0" indent="0">
-              <a:buNone/>
-            </a:pPr>
-            <a:r>
-              <a:rPr lang="en-US" sz="1400" dirty="0">
-                <a:solidFill>
-                  <a:schemeClr val="tx1"/>
-                </a:solidFill>
-              </a:rPr>
-              <a:t>once the labels inside a clickable row count, the way a screen reader names it</a:t>
-            </a:r>
-            <a:endParaRPr lang="en-US" sz="1400" dirty="0"/>
-          </a:p>
-        </p:txBody>
-      </p:sp>
-      <p:sp>
-        <p:nvSpPr>
-          <p:cNvPr id="25" name="Slide Number Placeholder 0"/>
-          <p:cNvSpPr>
-            <a:spLocks noGrp="1"/>
-          </p:cNvSpPr>
-          <p:nvPr>
-            <p:ph type="sldNum" sz="quarter" idx="4294967295"/>
-          </p:nvPr>
-        </p:nvSpPr>
-        <p:spPr>
-          <a:xfrm>
-            <a:off x="11094415" y="6419088"/>
-            <a:ext cx="548640" cy="274320"/>
-          </a:xfrm>
-          <a:prstGeom prst="rect">
-            <a:avLst/>
-          </a:prstGeom>
-          <a:extLst>
-            <a:ext uri="{C572A759-6A51-4108-AA02-DFA0A04FC94B}">
-              <ma14:wrappingTextBoxFlag xmlns="" xmlns:ma14="http://schemas.microsoft.com/office/mac/drawingml/2011/main" val="0"/>
-            </a:ext>
-          </a:extLst>
-        </p:spPr>
-        <p:txBody>
-          <a:bodyPr/>
-          <a:lstStyle>
-            <a:lvl1pPr>
-              <a:defRPr sz="1000">
-                <a:solidFill>
-                  <a:schemeClr val="accent4"/>
-                </a:solidFill>
-              </a:defRPr>
-            </a:lvl1pPr>
-          </a:lstStyle>
-          <a:p>
-            <a:pPr algn="r"/>
-            <a:fld id="{F7021451-1387-4CA6-816F-3879F97B5CBC}" type="slidenum">
-              <a:rPr lang="en-US" b="0"/>
-              <a:t>2</a:t>
-            </a:fld>
-            <a:endParaRPr lang="en-US"/>
-          </a:p>
-        </p:txBody>
-      </p:sp>
     </p:spTree>
   </p:cSld>
   <p:clrMapOvr>
@@ -11490,7 +11225,7 @@
           </a:prstGeom>
           <a:extLst>
             <a:ext uri="{C572A759-6A51-4108-AA02-DFA0A04FC94B}">
-              <ma14:wrappingTextBoxFlag xmlns="" xmlns:ma14="http://schemas.microsoft.com/office/mac/drawingml/2011/main" val="0"/>
+              <ma14:wrappingTextBoxFlag xmlns:ma14="http://schemas.microsoft.com/office/mac/drawingml/2011/main" xmlns="" val="0"/>
             </a:ext>
           </a:extLst>
         </p:spPr>
@@ -11525,7 +11260,7 @@
 
 <file path=ppt/slides/slide4.xml><?xml version="1.0" encoding="utf-8"?>
 <p:sld xmlns:a="http://schemas.openxmlformats.org/drawingml/2006/main" xmlns:r="http://schemas.openxmlformats.org/officeDocument/2006/relationships" xmlns:p="http://schemas.openxmlformats.org/presentationml/2006/main">
-  <p:cSld name="Slide 4">
+  <p:cSld name="Slide 2">
     <p:spTree>
       <p:nvGrpSpPr>
         <p:cNvPr id="1" name=""/>
@@ -11551,10 +11286,6 @@
           </p:nvPr>
         </p:nvSpPr>
         <p:spPr>
-          <a:xfrm>
-            <a:off x="548640" y="347472"/>
-            <a:ext cx="11094415" cy="640080"/>
-          </a:xfrm>
           <a:prstGeom prst="rect">
             <a:avLst/>
           </a:prstGeom>
@@ -11574,9 +11305,54 @@
                   <a:schemeClr val="tx2"/>
                 </a:solidFill>
               </a:rPr>
-              <a:t>Synthies and ISECOM</a:t>
+              <a:t>Why this matters</a:t>
             </a:r>
             <a:endParaRPr lang="en-US" sz="3200" dirty="0"/>
+          </a:p>
+        </p:txBody>
+      </p:sp>
+      <p:sp>
+        <p:nvSpPr>
+          <p:cNvPr id="25" name="Slide Number Placeholder 0"/>
+          <p:cNvSpPr>
+            <a:spLocks noGrp="1"/>
+          </p:cNvSpPr>
+          <p:nvPr>
+            <p:ph type="sldNum" sz="quarter" idx="4294967295"/>
+          </p:nvPr>
+        </p:nvSpPr>
+        <p:spPr>
+          <a:xfrm>
+            <a:off x="11094415" y="6419088"/>
+            <a:ext cx="548640" cy="274320"/>
+          </a:xfrm>
+          <a:prstGeom prst="rect">
+            <a:avLst/>
+          </a:prstGeom>
+          <a:extLst>
+            <a:ext uri="{C572A759-6A51-4108-AA02-DFA0A04FC94B}">
+              <ma14:wrappingTextBoxFlag xmlns:ma14="http://schemas.microsoft.com/office/mac/drawingml/2011/main" xmlns="" val="0"/>
+            </a:ext>
+          </a:extLst>
+        </p:spPr>
+        <p:txBody>
+          <a:bodyPr/>
+          <a:lstStyle>
+            <a:lvl1pPr>
+              <a:defRPr sz="1000">
+                <a:solidFill>
+                  <a:schemeClr val="accent4"/>
+                </a:solidFill>
+              </a:defRPr>
+            </a:lvl1pPr>
+          </a:lstStyle>
+          <a:p>
+            <a:pPr algn="r"/>
+            <a:fld id="{F7021451-1387-4CA6-816F-3879F97B5CBC}" type="slidenum">
+              <a:rPr lang="en-US" b="0"/>
+              <a:t>4</a:t>
+            </a:fld>
+            <a:endParaRPr lang="en-US"/>
           </a:p>
         </p:txBody>
       </p:sp>
@@ -11610,7 +11386,7 @@
                   <a:schemeClr val="accent4"/>
                 </a:solidFill>
               </a:rPr>
-              <a:t>The kind of agent that uses our tool, and who we are working with</a:t>
+              <a:t>Assistants operate apps never built for them, and users cannot always take over when a step fails</a:t>
             </a:r>
             <a:endParaRPr lang="en-US" sz="1800" dirty="0"/>
           </a:p>
@@ -11618,220 +11394,14 @@
       </p:sp>
       <p:sp>
         <p:nvSpPr>
-          <p:cNvPr id="4" name="Shape 2"/>
+          <p:cNvPr id="4" name="why icon 1 disc"/>
           <p:cNvSpPr/>
           <p:nvPr/>
         </p:nvSpPr>
         <p:spPr>
           <a:xfrm>
             <a:off x="548640" y="1783080"/>
-            <a:ext cx="5440680" cy="2926080"/>
-          </a:xfrm>
-          <a:prstGeom prst="roundRect">
-            <a:avLst>
-              <a:gd name="adj" fmla="val 2500"/>
-            </a:avLst>
-          </a:prstGeom>
-          <a:solidFill>
-            <a:schemeClr val="bg2"/>
-          </a:solidFill>
-          <a:ln/>
-        </p:spPr>
-        <p:txBody>
-          <a:bodyPr/>
-          <a:lstStyle/>
-          <a:p>
-            <a:endParaRPr lang="en-US"/>
-          </a:p>
-        </p:txBody>
-      </p:sp>
-      <p:sp>
-        <p:nvSpPr>
-          <p:cNvPr id="7" name="Text 5"/>
-          <p:cNvSpPr txBox="1"/>
-          <p:nvPr/>
-        </p:nvSpPr>
-        <p:spPr>
-          <a:xfrm>
-            <a:off x="2788920" y="2011680"/>
-            <a:ext cx="3017520" cy="365760"/>
-          </a:xfrm>
-          <a:prstGeom prst="rect">
-            <a:avLst/>
-          </a:prstGeom>
-          <a:noFill/>
-          <a:ln/>
-        </p:spPr>
-        <p:txBody>
-          <a:bodyPr wrap="square" lIns="0" tIns="0" rIns="0" bIns="0" rtlCol="0" anchor="t"/>
-          <a:lstStyle/>
-          <a:p>
-            <a:pPr marL="0" indent="0">
-              <a:buNone/>
-            </a:pPr>
-            <a:r>
-              <a:rPr lang="en-US" sz="2200" b="1" dirty="0">
-                <a:solidFill>
-                  <a:schemeClr val="tx2"/>
-                </a:solidFill>
-              </a:rPr>
-              <a:t>ISECOM</a:t>
-            </a:r>
-            <a:endParaRPr lang="en-US" sz="2200" dirty="0"/>
-          </a:p>
-        </p:txBody>
-      </p:sp>
-      <p:sp>
-        <p:nvSpPr>
-          <p:cNvPr id="8" name="Text 6"/>
-          <p:cNvSpPr txBox="1"/>
-          <p:nvPr/>
-        </p:nvSpPr>
-        <p:spPr>
-          <a:xfrm>
-            <a:off x="2788920" y="2377440"/>
-            <a:ext cx="3017520" cy="274320"/>
-          </a:xfrm>
-          <a:prstGeom prst="rect">
-            <a:avLst/>
-          </a:prstGeom>
-          <a:noFill/>
-          <a:ln/>
-        </p:spPr>
-        <p:txBody>
-          <a:bodyPr wrap="square" lIns="0" tIns="0" rIns="0" bIns="0" rtlCol="0" anchor="t"/>
-          <a:lstStyle/>
-          <a:p>
-            <a:pPr marL="0" indent="0">
-              <a:buNone/>
-            </a:pPr>
-            <a:r>
-              <a:rPr lang="en-US" sz="1300" dirty="0">
-                <a:solidFill>
-                  <a:schemeClr val="accent4"/>
-                </a:solidFill>
-              </a:rPr>
-              <a:t>isecom.org</a:t>
-            </a:r>
-            <a:endParaRPr lang="en-US" sz="1300" dirty="0"/>
-          </a:p>
-        </p:txBody>
-      </p:sp>
-      <p:sp>
-        <p:nvSpPr>
-          <p:cNvPr id="9" name="Text 7"/>
-          <p:cNvSpPr txBox="1"/>
-          <p:nvPr/>
-        </p:nvSpPr>
-        <p:spPr>
-          <a:xfrm>
-            <a:off x="822960" y="2880360"/>
-            <a:ext cx="4937760" cy="1645920"/>
-          </a:xfrm>
-          <a:prstGeom prst="rect">
-            <a:avLst/>
-          </a:prstGeom>
-          <a:noFill/>
-          <a:ln/>
-        </p:spPr>
-        <p:txBody>
-          <a:bodyPr wrap="square" lIns="0" tIns="0" rIns="0" bIns="0" rtlCol="0" anchor="t"/>
-          <a:lstStyle/>
-          <a:p>
-            <a:pPr marL="342900" indent="-342900">
-              <a:spcAft>
-                <a:spcPts val="600"/>
-              </a:spcAft>
-              <a:buSzPct val="100000"/>
-              <a:buChar char="•"/>
-            </a:pPr>
-            <a:r>
-              <a:rPr lang="en-US" sz="1500" dirty="0">
-                <a:solidFill>
-                  <a:schemeClr val="tx1"/>
-                </a:solidFill>
-              </a:rPr>
-              <a:t>Who they are: [one line, confirm wording with the team]</a:t>
-            </a:r>
-            <a:endParaRPr lang="en-US" sz="1500" dirty="0"/>
-          </a:p>
-          <a:p>
-            <a:pPr marL="342900" indent="-342900">
-              <a:spcAft>
-                <a:spcPts val="600"/>
-              </a:spcAft>
-              <a:buSzPct val="100000"/>
-              <a:buChar char="•"/>
-            </a:pPr>
-            <a:r>
-              <a:rPr lang="en-US" sz="1500" dirty="0">
-                <a:solidFill>
-                  <a:schemeClr val="tx1"/>
-                </a:solidFill>
-              </a:rPr>
-              <a:t>Our collaboration: [what ISECOM provides or uses]</a:t>
-            </a:r>
-            <a:endParaRPr lang="en-US" sz="1500" dirty="0"/>
-          </a:p>
-          <a:p>
-            <a:pPr marL="342900" indent="-342900">
-              <a:spcAft>
-                <a:spcPts val="600"/>
-              </a:spcAft>
-              <a:buSzPct val="100000"/>
-              <a:buChar char="•"/>
-            </a:pPr>
-            <a:r>
-              <a:rPr lang="en-US" sz="1500" dirty="0">
-                <a:solidFill>
-                  <a:schemeClr val="tx1"/>
-                </a:solidFill>
-              </a:rPr>
-              <a:t>What it means for this work: [e.g. a real agent consumer]</a:t>
-            </a:r>
-            <a:endParaRPr lang="en-US" sz="1500" dirty="0"/>
-          </a:p>
-        </p:txBody>
-      </p:sp>
-      <p:sp>
-        <p:nvSpPr>
-          <p:cNvPr id="10" name="Shape 8"/>
-          <p:cNvSpPr/>
-          <p:nvPr/>
-        </p:nvSpPr>
-        <p:spPr>
-          <a:xfrm>
-            <a:off x="6217920" y="1783080"/>
-            <a:ext cx="5422392" cy="2926080"/>
-          </a:xfrm>
-          <a:prstGeom prst="roundRect">
-            <a:avLst>
-              <a:gd name="adj" fmla="val 2500"/>
-            </a:avLst>
-          </a:prstGeom>
-          <a:solidFill>
-            <a:schemeClr val="bg2"/>
-          </a:solidFill>
-          <a:ln/>
-        </p:spPr>
-        <p:txBody>
-          <a:bodyPr/>
-          <a:lstStyle/>
-          <a:p>
-            <a:endParaRPr lang="en-US"/>
-          </a:p>
-        </p:txBody>
-      </p:sp>
-      <p:sp>
-        <p:nvSpPr>
-          <p:cNvPr id="11" name="synthie icon disc"/>
-          <p:cNvSpPr/>
-          <p:nvPr/>
-        </p:nvSpPr>
-        <p:spPr>
-          <a:xfrm>
-            <a:off x="6492240" y="1965960"/>
-            <a:ext cx="685800" cy="685800"/>
+            <a:ext cx="731520" cy="731520"/>
           </a:xfrm>
           <a:prstGeom prst="ellipse">
             <a:avLst/>
@@ -11851,7 +11421,7 @@
       </p:sp>
       <p:pic>
         <p:nvPicPr>
-          <p:cNvPr id="12" name="synthie icon" descr="Robot icon"/>
+          <p:cNvPr id="5" name="why icon 1" descr="Plug icon"/>
           <p:cNvPicPr>
             <a:picLocks noChangeAspect="1"/>
           </p:cNvPicPr>
@@ -11865,8 +11435,8 @@
         </p:blipFill>
         <p:spPr>
           <a:xfrm>
-            <a:off x="6656832" y="2130552"/>
-            <a:ext cx="356616" cy="356616"/>
+            <a:off x="724205" y="1958645"/>
+            <a:ext cx="380390" cy="380390"/>
           </a:xfrm>
           <a:prstGeom prst="rect">
             <a:avLst/>
@@ -11875,14 +11445,14 @@
       </p:pic>
       <p:sp>
         <p:nvSpPr>
-          <p:cNvPr id="13" name="Text 10"/>
+          <p:cNvPr id="6" name="Text 3"/>
           <p:cNvSpPr txBox="1"/>
           <p:nvPr/>
         </p:nvSpPr>
         <p:spPr>
           <a:xfrm>
-            <a:off x="7360920" y="2011680"/>
-            <a:ext cx="4023360" cy="365760"/>
+            <a:off x="1554480" y="1783080"/>
+            <a:ext cx="5852160" cy="365760"/>
           </a:xfrm>
           <a:prstGeom prst="rect">
             <a:avLst/>
@@ -11898,27 +11468,27 @@
               <a:buNone/>
             </a:pPr>
             <a:r>
-              <a:rPr lang="en-US" sz="2200" b="1" dirty="0">
+              <a:rPr lang="en-US" sz="2000" b="1" dirty="0">
                 <a:solidFill>
                   <a:schemeClr val="tx2"/>
                 </a:solidFill>
               </a:rPr>
-              <a:t>Synthies</a:t>
-            </a:r>
-            <a:endParaRPr lang="en-US" sz="2200" dirty="0"/>
-          </a:p>
-        </p:txBody>
-      </p:sp>
-      <p:sp>
-        <p:nvSpPr>
-          <p:cNvPr id="14" name="Text 11"/>
+              <a:t>No API to call</a:t>
+            </a:r>
+            <a:endParaRPr lang="en-US" sz="2000" dirty="0"/>
+          </a:p>
+        </p:txBody>
+      </p:sp>
+      <p:sp>
+        <p:nvSpPr>
+          <p:cNvPr id="7" name="Text 4"/>
           <p:cNvSpPr txBox="1"/>
           <p:nvPr/>
         </p:nvSpPr>
         <p:spPr>
           <a:xfrm>
-            <a:off x="7360920" y="2377440"/>
-            <a:ext cx="4023360" cy="274320"/>
+            <a:off x="1554480" y="2194560"/>
+            <a:ext cx="5852160" cy="914400"/>
           </a:xfrm>
           <a:prstGeom prst="rect">
             <a:avLst/>
@@ -11934,214 +11504,30 @@
               <a:buNone/>
             </a:pPr>
             <a:r>
-              <a:rPr lang="en-US" sz="1300" dirty="0">
-                <a:solidFill>
-                  <a:schemeClr val="accent4"/>
-                </a:solidFill>
-              </a:rPr>
-              <a:t>long-running agents with an identity</a:t>
-            </a:r>
-            <a:endParaRPr lang="en-US" sz="1300" dirty="0"/>
-          </a:p>
-        </p:txBody>
-      </p:sp>
-      <p:sp>
-        <p:nvSpPr>
-          <p:cNvPr id="15" name="Text 12"/>
-          <p:cNvSpPr txBox="1"/>
-          <p:nvPr/>
-        </p:nvSpPr>
-        <p:spPr>
-          <a:xfrm>
-            <a:off x="6492240" y="2880360"/>
-            <a:ext cx="4937760" cy="1645920"/>
-          </a:xfrm>
-          <a:prstGeom prst="rect">
-            <a:avLst/>
-          </a:prstGeom>
-          <a:noFill/>
-          <a:ln/>
-        </p:spPr>
-        <p:txBody>
-          <a:bodyPr wrap="square" lIns="0" tIns="0" rIns="0" bIns="0" rtlCol="0" anchor="t"/>
-          <a:lstStyle/>
-          <a:p>
-            <a:pPr marL="342900" indent="-342900">
-              <a:spcAft>
-                <a:spcPts val="600"/>
-              </a:spcAft>
-              <a:buSzPct val="100000"/>
-              <a:buChar char="•"/>
-            </a:pPr>
-            <a:r>
               <a:rPr lang="en-US" sz="1500" dirty="0">
                 <a:solidFill>
                   <a:schemeClr val="tx1"/>
                 </a:solidFill>
               </a:rPr>
-              <a:t>Run continuously on their own host</a:t>
+              <a:t>Many everyday apps, stores and legacy tools expose only a screen. Where an API or MCP exists, use it; this is for the rest.</a:t>
             </a:r>
             <a:endParaRPr lang="en-US" sz="1500" dirty="0"/>
           </a:p>
-          <a:p>
-            <a:pPr marL="342900" indent="-342900">
-              <a:spcAft>
-                <a:spcPts val="600"/>
-              </a:spcAft>
-              <a:buSzPct val="100000"/>
-              <a:buChar char="•"/>
-            </a:pPr>
-            <a:r>
-              <a:rPr lang="en-US" sz="1500" dirty="0">
-                <a:solidFill>
-                  <a:schemeClr val="tx1"/>
-                </a:solidFill>
-              </a:rPr>
-              <a:t>Have a chat identity and an owner</a:t>
-            </a:r>
-            <a:endParaRPr lang="en-US" sz="1500" dirty="0"/>
-          </a:p>
-          <a:p>
-            <a:pPr marL="342900" indent="-342900">
-              <a:spcAft>
-                <a:spcPts val="600"/>
-              </a:spcAft>
-              <a:buSzPct val="100000"/>
-              <a:buChar char="•"/>
-            </a:pPr>
-            <a:r>
-              <a:rPr lang="en-US" sz="1500" dirty="0">
-                <a:solidFill>
-                  <a:schemeClr val="tx1"/>
-                </a:solidFill>
-              </a:rPr>
-              <a:t>Act through a typed tool set, with logged actions</a:t>
-            </a:r>
-            <a:endParaRPr lang="en-US" sz="1500" dirty="0"/>
-          </a:p>
-        </p:txBody>
-      </p:sp>
-      <p:sp>
-        <p:nvSpPr>
-          <p:cNvPr id="16" name="flow Synthie"/>
+        </p:txBody>
+      </p:sp>
+      <p:sp>
+        <p:nvSpPr>
+          <p:cNvPr id="8" name="why icon 2 disc"/>
           <p:cNvSpPr/>
           <p:nvPr/>
         </p:nvSpPr>
         <p:spPr>
           <a:xfrm>
-            <a:off x="548640" y="5074920"/>
-            <a:ext cx="3108960" cy="868680"/>
-          </a:xfrm>
-          <a:prstGeom prst="roundRect">
-            <a:avLst>
-              <a:gd name="adj" fmla="val 10526"/>
-            </a:avLst>
-          </a:prstGeom>
-          <a:solidFill>
-            <a:schemeClr val="accent6"/>
-          </a:solidFill>
-          <a:ln/>
-        </p:spPr>
-        <p:txBody>
-          <a:bodyPr/>
-          <a:lstStyle/>
-          <a:p>
-            <a:endParaRPr lang="en-US"/>
-          </a:p>
-        </p:txBody>
-      </p:sp>
-      <p:sp>
-        <p:nvSpPr>
-          <p:cNvPr id="17" name="Text 14"/>
-          <p:cNvSpPr txBox="1"/>
-          <p:nvPr/>
-        </p:nvSpPr>
-        <p:spPr>
-          <a:xfrm>
-            <a:off x="548640" y="5074920"/>
-            <a:ext cx="3108960" cy="868680"/>
-          </a:xfrm>
-          <a:prstGeom prst="rect">
-            <a:avLst/>
-          </a:prstGeom>
-          <a:noFill/>
-          <a:ln/>
-        </p:spPr>
-        <p:txBody>
-          <a:bodyPr wrap="square" lIns="0" tIns="0" rIns="0" bIns="0" rtlCol="0" anchor="ctr"/>
-          <a:lstStyle/>
-          <a:p>
-            <a:pPr marL="0" indent="0" algn="ctr">
-              <a:buNone/>
-            </a:pPr>
-            <a:r>
-              <a:rPr lang="en-US" sz="1800" b="1" dirty="0">
-                <a:solidFill>
-                  <a:schemeClr val="bg1"/>
-                </a:solidFill>
-              </a:rPr>
-              <a:t>Synthie</a:t>
-            </a:r>
-            <a:endParaRPr lang="en-US" sz="1600" dirty="0"/>
-          </a:p>
-          <a:p>
-            <a:pPr marL="0" indent="0" algn="ctr">
-              <a:buNone/>
-            </a:pPr>
-            <a:r>
-              <a:rPr lang="en-US" sz="1300" dirty="0">
-                <a:solidFill>
-                  <a:schemeClr val="bg1"/>
-                </a:solidFill>
-              </a:rPr>
-              <a:t>goal, in words</a:t>
-            </a:r>
-            <a:endParaRPr lang="en-US" sz="1600" dirty="0"/>
-          </a:p>
-        </p:txBody>
-      </p:sp>
-      <p:sp>
-        <p:nvSpPr>
-          <p:cNvPr id="18" name="flow arrow 1"/>
-          <p:cNvSpPr/>
-          <p:nvPr/>
-        </p:nvSpPr>
-        <p:spPr>
-          <a:xfrm>
-            <a:off x="3749040" y="5321808"/>
-            <a:ext cx="685800" cy="365760"/>
-          </a:xfrm>
-          <a:prstGeom prst="rightArrow">
-            <a:avLst/>
-          </a:prstGeom>
-          <a:solidFill>
-            <a:schemeClr val="accent4"/>
-          </a:solidFill>
-          <a:ln/>
-        </p:spPr>
-        <p:txBody>
-          <a:bodyPr/>
-          <a:lstStyle/>
-          <a:p>
-            <a:endParaRPr lang="en-US"/>
-          </a:p>
-        </p:txBody>
-      </p:sp>
-      <p:sp>
-        <p:nvSpPr>
-          <p:cNvPr id="19" name="flow Kenna tool"/>
-          <p:cNvSpPr/>
-          <p:nvPr/>
-        </p:nvSpPr>
-        <p:spPr>
-          <a:xfrm>
-            <a:off x="4526280" y="5074920"/>
-            <a:ext cx="3108960" cy="868680"/>
-          </a:xfrm>
-          <a:prstGeom prst="roundRect">
-            <a:avLst>
-              <a:gd name="adj" fmla="val 10526"/>
-            </a:avLst>
+            <a:off x="548640" y="3246120"/>
+            <a:ext cx="731520" cy="731520"/>
+          </a:xfrm>
+          <a:prstGeom prst="ellipse">
+            <a:avLst/>
           </a:prstGeom>
           <a:solidFill>
             <a:schemeClr val="accent1"/>
@@ -12156,216 +11542,9 @@
           </a:p>
         </p:txBody>
       </p:sp>
-      <p:sp>
-        <p:nvSpPr>
-          <p:cNvPr id="20" name="Text 17"/>
-          <p:cNvSpPr txBox="1"/>
-          <p:nvPr/>
-        </p:nvSpPr>
-        <p:spPr>
-          <a:xfrm>
-            <a:off x="4526280" y="5074920"/>
-            <a:ext cx="3108960" cy="868680"/>
-          </a:xfrm>
-          <a:prstGeom prst="rect">
-            <a:avLst/>
-          </a:prstGeom>
-          <a:noFill/>
-          <a:ln/>
-        </p:spPr>
-        <p:txBody>
-          <a:bodyPr wrap="square" lIns="0" tIns="0" rIns="0" bIns="0" rtlCol="0" anchor="ctr"/>
-          <a:lstStyle/>
-          <a:p>
-            <a:pPr marL="0" indent="0" algn="ctr">
-              <a:buNone/>
-            </a:pPr>
-            <a:r>
-              <a:rPr lang="en-US" sz="1800" b="1" dirty="0">
-                <a:solidFill>
-                  <a:schemeClr val="bg1"/>
-                </a:solidFill>
-              </a:rPr>
-              <a:t>Kenna tool</a:t>
-            </a:r>
-            <a:endParaRPr lang="en-US" sz="1600" dirty="0"/>
-          </a:p>
-          <a:p>
-            <a:pPr marL="0" indent="0" algn="ctr">
-              <a:buNone/>
-            </a:pPr>
-            <a:r>
-              <a:rPr lang="en-US" sz="1300" dirty="0">
-                <a:solidFill>
-                  <a:schemeClr val="bg1"/>
-                </a:solidFill>
-              </a:rPr>
-              <a:t>ladder + checks</a:t>
-            </a:r>
-            <a:endParaRPr lang="en-US" sz="1600" dirty="0"/>
-          </a:p>
-        </p:txBody>
-      </p:sp>
-      <p:sp>
-        <p:nvSpPr>
-          <p:cNvPr id="21" name="flow arrow 2"/>
-          <p:cNvSpPr/>
-          <p:nvPr/>
-        </p:nvSpPr>
-        <p:spPr>
-          <a:xfrm>
-            <a:off x="7726680" y="5321808"/>
-            <a:ext cx="685800" cy="365760"/>
-          </a:xfrm>
-          <a:prstGeom prst="rightArrow">
-            <a:avLst/>
-          </a:prstGeom>
-          <a:solidFill>
-            <a:schemeClr val="accent4"/>
-          </a:solidFill>
-          <a:ln/>
-        </p:spPr>
-        <p:txBody>
-          <a:bodyPr/>
-          <a:lstStyle/>
-          <a:p>
-            <a:endParaRPr lang="en-US"/>
-          </a:p>
-        </p:txBody>
-      </p:sp>
-      <p:sp>
-        <p:nvSpPr>
-          <p:cNvPr id="22" name="flow The app"/>
-          <p:cNvSpPr/>
-          <p:nvPr/>
-        </p:nvSpPr>
-        <p:spPr>
-          <a:xfrm>
-            <a:off x="8503920" y="5074920"/>
-            <a:ext cx="3108960" cy="868680"/>
-          </a:xfrm>
-          <a:prstGeom prst="roundRect">
-            <a:avLst>
-              <a:gd name="adj" fmla="val 10526"/>
-            </a:avLst>
-          </a:prstGeom>
-          <a:solidFill>
-            <a:schemeClr val="accent4"/>
-          </a:solidFill>
-          <a:ln/>
-        </p:spPr>
-        <p:txBody>
-          <a:bodyPr/>
-          <a:lstStyle/>
-          <a:p>
-            <a:endParaRPr lang="en-US"/>
-          </a:p>
-        </p:txBody>
-      </p:sp>
-      <p:sp>
-        <p:nvSpPr>
-          <p:cNvPr id="23" name="Text 20"/>
-          <p:cNvSpPr txBox="1"/>
-          <p:nvPr/>
-        </p:nvSpPr>
-        <p:spPr>
-          <a:xfrm>
-            <a:off x="8503920" y="5074920"/>
-            <a:ext cx="3108960" cy="868680"/>
-          </a:xfrm>
-          <a:prstGeom prst="rect">
-            <a:avLst/>
-          </a:prstGeom>
-          <a:noFill/>
-          <a:ln/>
-        </p:spPr>
-        <p:txBody>
-          <a:bodyPr wrap="square" lIns="0" tIns="0" rIns="0" bIns="0" rtlCol="0" anchor="ctr"/>
-          <a:lstStyle/>
-          <a:p>
-            <a:pPr marL="0" indent="0" algn="ctr">
-              <a:buNone/>
-            </a:pPr>
-            <a:r>
-              <a:rPr lang="en-US" sz="1800" b="1" dirty="0">
-                <a:solidFill>
-                  <a:schemeClr val="bg1"/>
-                </a:solidFill>
-              </a:rPr>
-              <a:t>The app</a:t>
-            </a:r>
-            <a:endParaRPr lang="en-US" sz="1600" dirty="0"/>
-          </a:p>
-          <a:p>
-            <a:pPr marL="0" indent="0" algn="ctr">
-              <a:buNone/>
-            </a:pPr>
-            <a:r>
-              <a:rPr lang="en-US" sz="1300" dirty="0">
-                <a:solidFill>
-                  <a:schemeClr val="bg1"/>
-                </a:solidFill>
-              </a:rPr>
-              <a:t>web or Android</a:t>
-            </a:r>
-            <a:endParaRPr lang="en-US" sz="1600" dirty="0"/>
-          </a:p>
-        </p:txBody>
-      </p:sp>
-      <p:sp>
-        <p:nvSpPr>
-          <p:cNvPr id="25" name="Slide Number Placeholder 0"/>
-          <p:cNvSpPr>
-            <a:spLocks noGrp="1"/>
-          </p:cNvSpPr>
-          <p:nvPr>
-            <p:ph type="sldNum" sz="quarter" idx="4294967295"/>
-          </p:nvPr>
-        </p:nvSpPr>
-        <p:spPr>
-          <a:xfrm>
-            <a:off x="11094415" y="6419088"/>
-            <a:ext cx="548640" cy="274320"/>
-          </a:xfrm>
-          <a:prstGeom prst="rect">
-            <a:avLst/>
-          </a:prstGeom>
-          <a:extLst>
-            <a:ext uri="{C572A759-6A51-4108-AA02-DFA0A04FC94B}">
-              <ma14:wrappingTextBoxFlag xmlns="" xmlns:ma14="http://schemas.microsoft.com/office/mac/drawingml/2011/main" val="0"/>
-            </a:ext>
-          </a:extLst>
-        </p:spPr>
-        <p:txBody>
-          <a:bodyPr/>
-          <a:lstStyle>
-            <a:lvl1pPr>
-              <a:defRPr sz="1000">
-                <a:solidFill>
-                  <a:schemeClr val="accent4"/>
-                </a:solidFill>
-              </a:defRPr>
-            </a:lvl1pPr>
-          </a:lstStyle>
-          <a:p>
-            <a:pPr algn="r"/>
-            <a:fld id="{F7021451-1387-4CA6-816F-3879F97B5CBC}" type="slidenum">
-              <a:rPr lang="en-US" b="0"/>
-              <a:t>4</a:t>
-            </a:fld>
-            <a:endParaRPr lang="en-US"/>
-          </a:p>
-        </p:txBody>
-      </p:sp>
       <p:pic>
         <p:nvPicPr>
-          <p:cNvPr id="26" name="Picture 25">
-            <a:extLst>
-              <a:ext uri="{FF2B5EF4-FFF2-40B4-BE49-F238E27FC236}">
-                <a16:creationId xmlns:a16="http://schemas.microsoft.com/office/drawing/2014/main" id="{7C46508A-7C20-87C5-E252-AA4FBE1E5F49}"/>
-              </a:ext>
-            </a:extLst>
-          </p:cNvPr>
+          <p:cNvPr id="9" name="why icon 2" descr="Bug icon"/>
           <p:cNvPicPr>
             <a:picLocks noChangeAspect="1"/>
           </p:cNvPicPr>
@@ -12379,14 +11558,424 @@
         </p:blipFill>
         <p:spPr>
           <a:xfrm>
-            <a:off x="759266" y="2003797"/>
-            <a:ext cx="1773622" cy="516589"/>
+            <a:off x="724205" y="3421685"/>
+            <a:ext cx="380390" cy="380390"/>
           </a:xfrm>
           <a:prstGeom prst="rect">
             <a:avLst/>
           </a:prstGeom>
         </p:spPr>
       </p:pic>
+      <p:sp>
+        <p:nvSpPr>
+          <p:cNvPr id="10" name="Text 6"/>
+          <p:cNvSpPr txBox="1"/>
+          <p:nvPr/>
+        </p:nvSpPr>
+        <p:spPr>
+          <a:xfrm>
+            <a:off x="1554480" y="3246120"/>
+            <a:ext cx="5852160" cy="365760"/>
+          </a:xfrm>
+          <a:prstGeom prst="rect">
+            <a:avLst/>
+          </a:prstGeom>
+          <a:noFill/>
+          <a:ln/>
+        </p:spPr>
+        <p:txBody>
+          <a:bodyPr wrap="square" lIns="0" tIns="0" rIns="0" bIns="0" rtlCol="0" anchor="t"/>
+          <a:lstStyle/>
+          <a:p>
+            <a:pPr marL="0" indent="0">
+              <a:buNone/>
+            </a:pPr>
+            <a:r>
+              <a:rPr lang="en-US" sz="2000" b="1" dirty="0">
+                <a:solidFill>
+                  <a:schemeClr val="tx2"/>
+                </a:solidFill>
+              </a:rPr>
+              <a:t>Recorded scripts break silently</a:t>
+            </a:r>
+            <a:endParaRPr lang="en-US" sz="2000" dirty="0"/>
+          </a:p>
+        </p:txBody>
+      </p:sp>
+      <p:sp>
+        <p:nvSpPr>
+          <p:cNvPr id="11" name="Text 7"/>
+          <p:cNvSpPr txBox="1"/>
+          <p:nvPr/>
+        </p:nvSpPr>
+        <p:spPr>
+          <a:xfrm>
+            <a:off x="1554480" y="3657600"/>
+            <a:ext cx="5852160" cy="914400"/>
+          </a:xfrm>
+          <a:prstGeom prst="rect">
+            <a:avLst/>
+          </a:prstGeom>
+          <a:noFill/>
+          <a:ln/>
+        </p:spPr>
+        <p:txBody>
+          <a:bodyPr wrap="square" lIns="0" tIns="0" rIns="0" bIns="0" rtlCol="0" anchor="t"/>
+          <a:lstStyle/>
+          <a:p>
+            <a:pPr marL="0" indent="0">
+              <a:buNone/>
+            </a:pPr>
+            <a:r>
+              <a:rPr lang="en-US" sz="1500" dirty="0">
+                <a:solidFill>
+                  <a:schemeClr val="tx1"/>
+                </a:solidFill>
+              </a:rPr>
+              <a:t>One renamed id and a recorded click goes nowhere. Worse, nothing checks that the goal was actually reached.</a:t>
+            </a:r>
+            <a:endParaRPr lang="en-US" sz="1500" dirty="0"/>
+          </a:p>
+        </p:txBody>
+      </p:sp>
+      <p:sp>
+        <p:nvSpPr>
+          <p:cNvPr id="12" name="why icon 3 disc"/>
+          <p:cNvSpPr/>
+          <p:nvPr/>
+        </p:nvSpPr>
+        <p:spPr>
+          <a:xfrm>
+            <a:off x="548640" y="4709160"/>
+            <a:ext cx="731520" cy="731520"/>
+          </a:xfrm>
+          <a:prstGeom prst="ellipse">
+            <a:avLst/>
+          </a:prstGeom>
+          <a:solidFill>
+            <a:schemeClr val="accent1"/>
+          </a:solidFill>
+          <a:ln/>
+        </p:spPr>
+        <p:txBody>
+          <a:bodyPr/>
+          <a:lstStyle/>
+          <a:p>
+            <a:endParaRPr lang="en-US"/>
+          </a:p>
+        </p:txBody>
+      </p:sp>
+      <p:pic>
+        <p:nvPicPr>
+          <p:cNvPr id="13" name="why icon 3" descr="UniversalAccess icon"/>
+          <p:cNvPicPr>
+            <a:picLocks noChangeAspect="1"/>
+          </p:cNvPicPr>
+          <p:nvPr/>
+        </p:nvPicPr>
+        <p:blipFill>
+          <a:blip r:embed="rId5"/>
+          <a:stretch>
+            <a:fillRect/>
+          </a:stretch>
+        </p:blipFill>
+        <p:spPr>
+          <a:xfrm>
+            <a:off x="724205" y="4884725"/>
+            <a:ext cx="380390" cy="380390"/>
+          </a:xfrm>
+          <a:prstGeom prst="rect">
+            <a:avLst/>
+          </a:prstGeom>
+        </p:spPr>
+      </p:pic>
+      <p:sp>
+        <p:nvSpPr>
+          <p:cNvPr id="14" name="Text 9"/>
+          <p:cNvSpPr txBox="1"/>
+          <p:nvPr/>
+        </p:nvSpPr>
+        <p:spPr>
+          <a:xfrm>
+            <a:off x="1554480" y="4709160"/>
+            <a:ext cx="5852160" cy="365760"/>
+          </a:xfrm>
+          <a:prstGeom prst="rect">
+            <a:avLst/>
+          </a:prstGeom>
+          <a:noFill/>
+          <a:ln/>
+        </p:spPr>
+        <p:txBody>
+          <a:bodyPr wrap="square" lIns="0" tIns="0" rIns="0" bIns="0" rtlCol="0" anchor="t"/>
+          <a:lstStyle/>
+          <a:p>
+            <a:pPr marL="0" indent="0">
+              <a:buNone/>
+            </a:pPr>
+            <a:r>
+              <a:rPr lang="en-US" sz="2000" b="1" dirty="0">
+                <a:solidFill>
+                  <a:schemeClr val="tx2"/>
+                </a:solidFill>
+              </a:rPr>
+              <a:t>The user may not be able to step in</a:t>
+            </a:r>
+            <a:endParaRPr lang="en-US" sz="2000" dirty="0"/>
+          </a:p>
+        </p:txBody>
+      </p:sp>
+      <p:sp>
+        <p:nvSpPr>
+          <p:cNvPr id="15" name="Text 10"/>
+          <p:cNvSpPr txBox="1"/>
+          <p:nvPr/>
+        </p:nvSpPr>
+        <p:spPr>
+          <a:xfrm>
+            <a:off x="1554480" y="5120640"/>
+            <a:ext cx="5852160" cy="914400"/>
+          </a:xfrm>
+          <a:prstGeom prst="rect">
+            <a:avLst/>
+          </a:prstGeom>
+          <a:noFill/>
+          <a:ln/>
+        </p:spPr>
+        <p:txBody>
+          <a:bodyPr wrap="square" lIns="0" tIns="0" rIns="0" bIns="0" rtlCol="0" anchor="t"/>
+          <a:lstStyle/>
+          <a:p>
+            <a:pPr marL="0" indent="0">
+              <a:buNone/>
+            </a:pPr>
+            <a:r>
+              <a:rPr lang="en-US" sz="1500" dirty="0">
+                <a:solidFill>
+                  <a:schemeClr val="tx1"/>
+                </a:solidFill>
+              </a:rPr>
+              <a:t>For a blind or motor-impaired user, "please do this step yourself" is not a fallback. The assistant has to be right, or say clearly that it is not.</a:t>
+            </a:r>
+            <a:endParaRPr lang="en-US" sz="1500" dirty="0"/>
+          </a:p>
+        </p:txBody>
+      </p:sp>
+      <p:sp>
+        <p:nvSpPr>
+          <p:cNvPr id="16" name="Shape 11"/>
+          <p:cNvSpPr/>
+          <p:nvPr/>
+        </p:nvSpPr>
+        <p:spPr>
+          <a:xfrm>
+            <a:off x="7589520" y="1783080"/>
+            <a:ext cx="4050792" cy="4297680"/>
+          </a:xfrm>
+          <a:prstGeom prst="roundRect">
+            <a:avLst>
+              <a:gd name="adj" fmla="val 1806"/>
+            </a:avLst>
+          </a:prstGeom>
+          <a:solidFill>
+            <a:schemeClr val="bg2"/>
+          </a:solidFill>
+          <a:ln/>
+        </p:spPr>
+        <p:txBody>
+          <a:bodyPr/>
+          <a:lstStyle/>
+          <a:p>
+            <a:endParaRPr lang="en-US"/>
+          </a:p>
+        </p:txBody>
+      </p:sp>
+      <p:sp>
+        <p:nvSpPr>
+          <p:cNvPr id="17" name="Text 12"/>
+          <p:cNvSpPr txBox="1"/>
+          <p:nvPr/>
+        </p:nvSpPr>
+        <p:spPr>
+          <a:xfrm>
+            <a:off x="7863840" y="1965960"/>
+            <a:ext cx="3566160" cy="274320"/>
+          </a:xfrm>
+          <a:prstGeom prst="rect">
+            <a:avLst/>
+          </a:prstGeom>
+          <a:noFill/>
+          <a:ln/>
+        </p:spPr>
+        <p:txBody>
+          <a:bodyPr wrap="square" lIns="0" tIns="0" rIns="0" bIns="0" rtlCol="0" anchor="t"/>
+          <a:lstStyle/>
+          <a:p>
+            <a:pPr marL="0" indent="0">
+              <a:buNone/>
+            </a:pPr>
+            <a:r>
+              <a:rPr lang="en-US" sz="1100" b="1" kern="0" spc="200" dirty="0">
+                <a:solidFill>
+                  <a:schemeClr val="accent4"/>
+                </a:solidFill>
+              </a:rPr>
+              <a:t>MEASURED ON ANDROID SETTINGS</a:t>
+            </a:r>
+            <a:endParaRPr lang="en-US" sz="1100" dirty="0"/>
+          </a:p>
+        </p:txBody>
+      </p:sp>
+      <p:sp>
+        <p:nvSpPr>
+          <p:cNvPr id="18" name="Text 13"/>
+          <p:cNvSpPr txBox="1"/>
+          <p:nvPr/>
+        </p:nvSpPr>
+        <p:spPr>
+          <a:xfrm>
+            <a:off x="7863840" y="2331720"/>
+            <a:ext cx="3566160" cy="914400"/>
+          </a:xfrm>
+          <a:prstGeom prst="rect">
+            <a:avLst/>
+          </a:prstGeom>
+          <a:noFill/>
+          <a:ln/>
+        </p:spPr>
+        <p:txBody>
+          <a:bodyPr wrap="square" lIns="0" tIns="0" rIns="0" bIns="0" rtlCol="0" anchor="t"/>
+          <a:lstStyle/>
+          <a:p>
+            <a:pPr marL="0" indent="0">
+              <a:buNone/>
+            </a:pPr>
+            <a:r>
+              <a:rPr lang="en-US" sz="6000" b="1" dirty="0">
+                <a:solidFill>
+                  <a:schemeClr val="accent3"/>
+                </a:solidFill>
+                <a:latin typeface="Cambria" pitchFamily="34" charset="0"/>
+                <a:ea typeface="Cambria" pitchFamily="34" charset="-122"/>
+                <a:cs typeface="Cambria" pitchFamily="34" charset="-120"/>
+              </a:rPr>
+              <a:t>78%</a:t>
+            </a:r>
+            <a:endParaRPr lang="en-US" sz="6000" dirty="0"/>
+          </a:p>
+        </p:txBody>
+      </p:sp>
+      <p:sp>
+        <p:nvSpPr>
+          <p:cNvPr id="19" name="Text 14"/>
+          <p:cNvSpPr txBox="1"/>
+          <p:nvPr/>
+        </p:nvSpPr>
+        <p:spPr>
+          <a:xfrm>
+            <a:off x="7863840" y="3246120"/>
+            <a:ext cx="3566160" cy="640080"/>
+          </a:xfrm>
+          <a:prstGeom prst="rect">
+            <a:avLst/>
+          </a:prstGeom>
+          <a:noFill/>
+          <a:ln/>
+        </p:spPr>
+        <p:txBody>
+          <a:bodyPr wrap="square" lIns="0" tIns="0" rIns="0" bIns="0" rtlCol="0" anchor="t"/>
+          <a:lstStyle/>
+          <a:p>
+            <a:pPr marL="0" indent="0">
+              <a:buNone/>
+            </a:pPr>
+            <a:r>
+              <a:rPr lang="en-US" sz="1400" dirty="0">
+                <a:solidFill>
+                  <a:schemeClr val="tx1"/>
+                </a:solidFill>
+              </a:rPr>
+              <a:t>of controls look nameless judged by their own attributes</a:t>
+            </a:r>
+            <a:endParaRPr lang="en-US" sz="1400" dirty="0"/>
+          </a:p>
+        </p:txBody>
+      </p:sp>
+      <p:sp>
+        <p:nvSpPr>
+          <p:cNvPr id="20" name="Text 15"/>
+          <p:cNvSpPr txBox="1"/>
+          <p:nvPr/>
+        </p:nvSpPr>
+        <p:spPr>
+          <a:xfrm>
+            <a:off x="7863840" y="4023360"/>
+            <a:ext cx="3566160" cy="914400"/>
+          </a:xfrm>
+          <a:prstGeom prst="rect">
+            <a:avLst/>
+          </a:prstGeom>
+          <a:noFill/>
+          <a:ln/>
+        </p:spPr>
+        <p:txBody>
+          <a:bodyPr wrap="square" lIns="0" tIns="0" rIns="0" bIns="0" rtlCol="0" anchor="t"/>
+          <a:lstStyle/>
+          <a:p>
+            <a:pPr marL="0" indent="0">
+              <a:buNone/>
+            </a:pPr>
+            <a:r>
+              <a:rPr lang="en-US" sz="6000" b="1" dirty="0">
+                <a:solidFill>
+                  <a:schemeClr val="accent1"/>
+                </a:solidFill>
+                <a:latin typeface="Cambria" pitchFamily="34" charset="0"/>
+                <a:ea typeface="Cambria" pitchFamily="34" charset="-122"/>
+                <a:cs typeface="Cambria" pitchFamily="34" charset="-120"/>
+              </a:rPr>
+              <a:t>2%</a:t>
+            </a:r>
+            <a:endParaRPr lang="en-US" sz="6000" dirty="0"/>
+          </a:p>
+        </p:txBody>
+      </p:sp>
+      <p:sp>
+        <p:nvSpPr>
+          <p:cNvPr id="21" name="Text 16"/>
+          <p:cNvSpPr txBox="1"/>
+          <p:nvPr/>
+        </p:nvSpPr>
+        <p:spPr>
+          <a:xfrm>
+            <a:off x="7863840" y="4937760"/>
+            <a:ext cx="3566160" cy="822960"/>
+          </a:xfrm>
+          <a:prstGeom prst="rect">
+            <a:avLst/>
+          </a:prstGeom>
+          <a:noFill/>
+          <a:ln/>
+        </p:spPr>
+        <p:txBody>
+          <a:bodyPr wrap="square" lIns="0" tIns="0" rIns="0" bIns="0" rtlCol="0" anchor="t"/>
+          <a:lstStyle/>
+          <a:p>
+            <a:pPr marL="0" indent="0">
+              <a:buNone/>
+            </a:pPr>
+            <a:r>
+              <a:rPr lang="en-US" sz="1400" dirty="0">
+                <a:solidFill>
+                  <a:schemeClr val="tx1"/>
+                </a:solidFill>
+              </a:rPr>
+              <a:t>once the labels inside a clickable row count, the way a screen reader names it</a:t>
+            </a:r>
+            <a:endParaRPr lang="en-US" sz="1400" dirty="0"/>
+          </a:p>
+        </p:txBody>
+      </p:sp>
     </p:spTree>
   </p:cSld>
   <p:clrMapOvr>
@@ -13068,7 +12657,7 @@
           </a:prstGeom>
           <a:extLst>
             <a:ext uri="{C572A759-6A51-4108-AA02-DFA0A04FC94B}">
-              <ma14:wrappingTextBoxFlag xmlns="" xmlns:ma14="http://schemas.microsoft.com/office/mac/drawingml/2011/main" val="0"/>
+              <ma14:wrappingTextBoxFlag xmlns:ma14="http://schemas.microsoft.com/office/mac/drawingml/2011/main" xmlns="" val="0"/>
             </a:ext>
           </a:extLst>
         </p:spPr>
@@ -14474,7 +14063,7 @@
           </a:prstGeom>
           <a:extLst>
             <a:ext uri="{C572A759-6A51-4108-AA02-DFA0A04FC94B}">
-              <ma14:wrappingTextBoxFlag xmlns="" xmlns:ma14="http://schemas.microsoft.com/office/mac/drawingml/2011/main" val="0"/>
+              <ma14:wrappingTextBoxFlag xmlns:ma14="http://schemas.microsoft.com/office/mac/drawingml/2011/main" xmlns="" val="0"/>
             </a:ext>
           </a:extLst>
         </p:spPr>
@@ -15839,42 +15428,6 @@
       </p:sp>
       <p:sp>
         <p:nvSpPr>
-          <p:cNvPr id="36" name="Text 34"/>
-          <p:cNvSpPr txBox="1"/>
-          <p:nvPr/>
-        </p:nvSpPr>
-        <p:spPr>
-          <a:xfrm>
-            <a:off x="548640" y="6144768"/>
-            <a:ext cx="11094415" cy="256032"/>
-          </a:xfrm>
-          <a:prstGeom prst="rect">
-            <a:avLst/>
-          </a:prstGeom>
-          <a:noFill/>
-          <a:ln/>
-        </p:spPr>
-        <p:txBody>
-          <a:bodyPr wrap="square" lIns="0" tIns="0" rIns="0" bIns="0" rtlCol="0" anchor="t"/>
-          <a:lstStyle/>
-          <a:p>
-            <a:pPr marL="0" indent="0">
-              <a:buNone/>
-            </a:pPr>
-            <a:r>
-              <a:rPr lang="en-US" sz="1100" dirty="0">
-                <a:solidFill>
-                  <a:schemeClr val="accent4"/>
-                </a:solidFill>
-              </a:rPr>
-              <a:t>N = 10 runs per cell · 95% Wilson intervals · model qwen3.7-flash, temperature 0, cached answers (variation in the app and harness, not model sampling)</a:t>
-            </a:r>
-            <a:endParaRPr lang="en-US" sz="1100" dirty="0"/>
-          </a:p>
-        </p:txBody>
-      </p:sp>
-      <p:sp>
-        <p:nvSpPr>
           <p:cNvPr id="37" name="Slide Number Placeholder 0"/>
           <p:cNvSpPr>
             <a:spLocks noGrp="1"/>
@@ -15893,7 +15446,7 @@
           </a:prstGeom>
           <a:extLst>
             <a:ext uri="{C572A759-6A51-4108-AA02-DFA0A04FC94B}">
-              <ma14:wrappingTextBoxFlag xmlns="" xmlns:ma14="http://schemas.microsoft.com/office/mac/drawingml/2011/main" val="0"/>
+              <ma14:wrappingTextBoxFlag xmlns:ma14="http://schemas.microsoft.com/office/mac/drawingml/2011/main" xmlns="" val="0"/>
             </a:ext>
           </a:extLst>
         </p:spPr>
@@ -16035,7 +15588,7 @@
         </p:nvGraphicFramePr>
         <p:xfrm>
           <a:off x="548640" y="1600200"/>
-          <a:ext cx="7040880" cy="914400"/>
+          <a:ext cx="7040880" cy="4576572"/>
         </p:xfrm>
         <a:graphic>
           <a:graphicData uri="http://schemas.openxmlformats.org/drawingml/2006/table">
@@ -19962,7 +19515,7 @@
           </a:prstGeom>
           <a:extLst>
             <a:ext uri="{C572A759-6A51-4108-AA02-DFA0A04FC94B}">
-              <ma14:wrappingTextBoxFlag xmlns="" xmlns:ma14="http://schemas.microsoft.com/office/mac/drawingml/2011/main" val="0"/>
+              <ma14:wrappingTextBoxFlag xmlns:ma14="http://schemas.microsoft.com/office/mac/drawingml/2011/main" xmlns="" val="0"/>
             </a:ext>
           </a:extLst>
         </p:spPr>
@@ -20088,9 +19641,235 @@
           </a:p>
         </p:txBody>
       </p:sp>
+      <p:sp>
+        <p:nvSpPr>
+          <p:cNvPr id="5" name="Text 2"/>
+          <p:cNvSpPr txBox="1"/>
+          <p:nvPr/>
+        </p:nvSpPr>
+        <p:spPr>
+          <a:xfrm>
+            <a:off x="548640" y="1645920"/>
+            <a:ext cx="7132320" cy="274320"/>
+          </a:xfrm>
+          <a:prstGeom prst="rect">
+            <a:avLst/>
+          </a:prstGeom>
+          <a:noFill/>
+          <a:ln/>
+        </p:spPr>
+        <p:txBody>
+          <a:bodyPr wrap="square" lIns="0" tIns="0" rIns="0" bIns="0" rtlCol="0" anchor="t"/>
+          <a:lstStyle/>
+          <a:p>
+            <a:pPr marL="0" indent="0">
+              <a:buNone/>
+            </a:pPr>
+            <a:r>
+              <a:rPr lang="en-US" sz="1400" b="1" dirty="0">
+                <a:solidFill>
+                  <a:schemeClr val="tx2"/>
+                </a:solidFill>
+              </a:rPr>
+              <a:t>Flows completed (N = 10)</a:t>
+            </a:r>
+            <a:endParaRPr lang="en-US" sz="1400" dirty="0"/>
+          </a:p>
+        </p:txBody>
+      </p:sp>
+      <p:sp>
+        <p:nvSpPr>
+          <p:cNvPr id="6" name="Shape 3"/>
+          <p:cNvSpPr/>
+          <p:nvPr/>
+        </p:nvSpPr>
+        <p:spPr>
+          <a:xfrm>
+            <a:off x="7955280" y="1691640"/>
+            <a:ext cx="3685032" cy="4206240"/>
+          </a:xfrm>
+          <a:prstGeom prst="roundRect">
+            <a:avLst>
+              <a:gd name="adj" fmla="val 1985"/>
+            </a:avLst>
+          </a:prstGeom>
+          <a:solidFill>
+            <a:schemeClr val="bg2"/>
+          </a:solidFill>
+          <a:ln/>
+        </p:spPr>
+        <p:txBody>
+          <a:bodyPr/>
+          <a:lstStyle/>
+          <a:p>
+            <a:endParaRPr lang="en-US"/>
+          </a:p>
+        </p:txBody>
+      </p:sp>
+      <p:sp>
+        <p:nvSpPr>
+          <p:cNvPr id="7" name="Text 4"/>
+          <p:cNvSpPr txBox="1"/>
+          <p:nvPr/>
+        </p:nvSpPr>
+        <p:spPr>
+          <a:xfrm>
+            <a:off x="8229600" y="1828800"/>
+            <a:ext cx="3200400" cy="274320"/>
+          </a:xfrm>
+          <a:prstGeom prst="rect">
+            <a:avLst/>
+          </a:prstGeom>
+          <a:noFill/>
+          <a:ln/>
+        </p:spPr>
+        <p:txBody>
+          <a:bodyPr wrap="square" lIns="0" tIns="0" rIns="0" bIns="0" rtlCol="0" anchor="t"/>
+          <a:lstStyle/>
+          <a:p>
+            <a:pPr marL="0" indent="0">
+              <a:buNone/>
+            </a:pPr>
+            <a:r>
+              <a:rPr lang="en-US" sz="1100" b="1" kern="0" spc="200" dirty="0">
+                <a:solidFill>
+                  <a:schemeClr val="accent4"/>
+                </a:solidFill>
+              </a:rPr>
+              <a:t>WHAT TO READ FROM IT</a:t>
+            </a:r>
+            <a:endParaRPr lang="en-US" sz="1100" dirty="0"/>
+          </a:p>
+        </p:txBody>
+      </p:sp>
+      <p:sp>
+        <p:nvSpPr>
+          <p:cNvPr id="8" name="Text 5"/>
+          <p:cNvSpPr txBox="1"/>
+          <p:nvPr/>
+        </p:nvSpPr>
+        <p:spPr>
+          <a:xfrm>
+            <a:off x="8229600" y="2194560"/>
+            <a:ext cx="3200400" cy="3566160"/>
+          </a:xfrm>
+          <a:prstGeom prst="rect">
+            <a:avLst/>
+          </a:prstGeom>
+          <a:noFill/>
+          <a:ln/>
+        </p:spPr>
+        <p:txBody>
+          <a:bodyPr wrap="square" lIns="0" tIns="0" rIns="0" bIns="0" rtlCol="0" anchor="t"/>
+          <a:lstStyle/>
+          <a:p>
+            <a:pPr marL="342900" indent="-342900">
+              <a:spcAft>
+                <a:spcPts val="800"/>
+              </a:spcAft>
+              <a:buSzPct val="100000"/>
+              <a:buChar char="•"/>
+            </a:pPr>
+            <a:r>
+              <a:rPr lang="en-US" sz="1400" dirty="0"/>
+              <a:t>A bare model is fooled: with reworded text it fails 3 runs of 10, each a silent tap on a planted label.</a:t>
+            </a:r>
+          </a:p>
+          <a:p>
+            <a:pPr marL="342900" indent="-342900">
+              <a:spcAft>
+                <a:spcPts val="800"/>
+              </a:spcAft>
+              <a:buSzPct val="100000"/>
+              <a:buChar char="•"/>
+            </a:pPr>
+            <a:r>
+              <a:rPr lang="en-US" sz="1400" dirty="0"/>
+              <a:t>With the next-screen check, the model never fails there.</a:t>
+            </a:r>
+          </a:p>
+          <a:p>
+            <a:pPr marL="342900" indent="-342900">
+              <a:spcAft>
+                <a:spcPts val="800"/>
+              </a:spcAft>
+              <a:buSzPct val="100000"/>
+              <a:buChar char="•"/>
+            </a:pPr>
+            <a:r>
+              <a:rPr lang="en-US" sz="1400" dirty="0"/>
+              <a:t>In the hardest mix only the full system completes (10/10), tapping a planted label twice per run and recovering through the check.</a:t>
+            </a:r>
+          </a:p>
+          <a:p>
+            <a:pPr marL="342900" indent="-342900">
+              <a:spcAft>
+                <a:spcPts val="800"/>
+              </a:spcAft>
+              <a:buSzPct val="100000"/>
+              <a:buChar char="•"/>
+            </a:pPr>
+            <a:r>
+              <a:rPr lang="en-US" sz="1400" dirty="0"/>
+              <a:t>We measure how hostile UIs treat an agent. We do not build evasion.</a:t>
+            </a:r>
+          </a:p>
+        </p:txBody>
+      </p:sp>
+      <p:sp>
+        <p:nvSpPr>
+          <p:cNvPr id="25" name="Slide Number Placeholder 0"/>
+          <p:cNvSpPr>
+            <a:spLocks noGrp="1"/>
+          </p:cNvSpPr>
+          <p:nvPr>
+            <p:ph type="sldNum" sz="quarter" idx="4294967295"/>
+          </p:nvPr>
+        </p:nvSpPr>
+        <p:spPr>
+          <a:xfrm>
+            <a:off x="11094415" y="6419088"/>
+            <a:ext cx="548640" cy="274320"/>
+          </a:xfrm>
+          <a:prstGeom prst="rect">
+            <a:avLst/>
+          </a:prstGeom>
+          <a:extLst>
+            <a:ext uri="{C572A759-6A51-4108-AA02-DFA0A04FC94B}">
+              <ma14:wrappingTextBoxFlag xmlns:ma14="http://schemas.microsoft.com/office/mac/drawingml/2011/main" xmlns="" val="0"/>
+            </a:ext>
+          </a:extLst>
+        </p:spPr>
+        <p:txBody>
+          <a:bodyPr/>
+          <a:lstStyle>
+            <a:lvl1pPr>
+              <a:defRPr sz="1000">
+                <a:solidFill>
+                  <a:schemeClr val="accent4"/>
+                </a:solidFill>
+              </a:defRPr>
+            </a:lvl1pPr>
+          </a:lstStyle>
+          <a:p>
+            <a:pPr algn="r"/>
+            <a:fld id="{F7021451-1387-4CA6-816F-3879F97B5CBC}" type="slidenum">
+              <a:rPr lang="en-US" b="0"/>
+              <a:t>9</a:t>
+            </a:fld>
+            <a:endParaRPr lang="en-US"/>
+          </a:p>
+        </p:txBody>
+      </p:sp>
       <p:graphicFrame>
         <p:nvGraphicFramePr>
-          <p:cNvPr id="4" name="Chart 0"/>
+          <p:cNvPr id="12" name="Chart 0">
+            <a:extLst>
+              <a:ext uri="{FF2B5EF4-FFF2-40B4-BE49-F238E27FC236}">
+                <a16:creationId xmlns:a16="http://schemas.microsoft.com/office/drawing/2014/main" id="{DC4F2FBC-E37C-89B6-3D2D-719AC2DAE771}"/>
+              </a:ext>
+            </a:extLst>
+          </p:cNvPr>
           <p:cNvGraphicFramePr/>
           <p:nvPr/>
         </p:nvGraphicFramePr>
@@ -20104,311 +19883,6 @@
           </a:graphicData>
         </a:graphic>
       </p:graphicFrame>
-      <p:sp>
-        <p:nvSpPr>
-          <p:cNvPr id="5" name="Text 2"/>
-          <p:cNvSpPr txBox="1"/>
-          <p:nvPr/>
-        </p:nvSpPr>
-        <p:spPr>
-          <a:xfrm>
-            <a:off x="548640" y="1645920"/>
-            <a:ext cx="7132320" cy="274320"/>
-          </a:xfrm>
-          <a:prstGeom prst="rect">
-            <a:avLst/>
-          </a:prstGeom>
-          <a:noFill/>
-          <a:ln/>
-        </p:spPr>
-        <p:txBody>
-          <a:bodyPr wrap="square" lIns="0" tIns="0" rIns="0" bIns="0" rtlCol="0" anchor="t"/>
-          <a:lstStyle/>
-          <a:p>
-            <a:pPr marL="0" indent="0">
-              <a:buNone/>
-            </a:pPr>
-            <a:r>
-              <a:rPr lang="en-US" sz="1400" b="1" dirty="0">
-                <a:solidFill>
-                  <a:schemeClr val="tx2"/>
-                </a:solidFill>
-              </a:rPr>
-              <a:t>Flows completed (N = 10)</a:t>
-            </a:r>
-            <a:endParaRPr lang="en-US" sz="1400" dirty="0"/>
-          </a:p>
-        </p:txBody>
-      </p:sp>
-      <p:sp>
-        <p:nvSpPr>
-          <p:cNvPr id="6" name="Shape 3"/>
-          <p:cNvSpPr/>
-          <p:nvPr/>
-        </p:nvSpPr>
-        <p:spPr>
-          <a:xfrm>
-            <a:off x="7955280" y="1691640"/>
-            <a:ext cx="3685032" cy="4206240"/>
-          </a:xfrm>
-          <a:prstGeom prst="roundRect">
-            <a:avLst>
-              <a:gd name="adj" fmla="val 1985"/>
-            </a:avLst>
-          </a:prstGeom>
-          <a:solidFill>
-            <a:schemeClr val="bg2"/>
-          </a:solidFill>
-          <a:ln/>
-        </p:spPr>
-        <p:txBody>
-          <a:bodyPr/>
-          <a:lstStyle/>
-          <a:p>
-            <a:endParaRPr lang="en-US"/>
-          </a:p>
-        </p:txBody>
-      </p:sp>
-      <p:sp>
-        <p:nvSpPr>
-          <p:cNvPr id="7" name="Text 4"/>
-          <p:cNvSpPr txBox="1"/>
-          <p:nvPr/>
-        </p:nvSpPr>
-        <p:spPr>
-          <a:xfrm>
-            <a:off x="8229600" y="1828800"/>
-            <a:ext cx="3200400" cy="274320"/>
-          </a:xfrm>
-          <a:prstGeom prst="rect">
-            <a:avLst/>
-          </a:prstGeom>
-          <a:noFill/>
-          <a:ln/>
-        </p:spPr>
-        <p:txBody>
-          <a:bodyPr wrap="square" lIns="0" tIns="0" rIns="0" bIns="0" rtlCol="0" anchor="t"/>
-          <a:lstStyle/>
-          <a:p>
-            <a:pPr marL="0" indent="0">
-              <a:buNone/>
-            </a:pPr>
-            <a:r>
-              <a:rPr lang="en-US" sz="1100" b="1" kern="0" spc="200" dirty="0">
-                <a:solidFill>
-                  <a:schemeClr val="accent4"/>
-                </a:solidFill>
-              </a:rPr>
-              <a:t>WHAT TO READ FROM IT</a:t>
-            </a:r>
-            <a:endParaRPr lang="en-US" sz="1100" dirty="0"/>
-          </a:p>
-        </p:txBody>
-      </p:sp>
-      <p:sp>
-        <p:nvSpPr>
-          <p:cNvPr id="8" name="Text 5"/>
-          <p:cNvSpPr txBox="1"/>
-          <p:nvPr/>
-        </p:nvSpPr>
-        <p:spPr>
-          <a:xfrm>
-            <a:off x="8229600" y="2194560"/>
-            <a:ext cx="3200400" cy="3566160"/>
-          </a:xfrm>
-          <a:prstGeom prst="rect">
-            <a:avLst/>
-          </a:prstGeom>
-          <a:noFill/>
-          <a:ln/>
-        </p:spPr>
-        <p:txBody>
-          <a:bodyPr wrap="square" lIns="0" tIns="0" rIns="0" bIns="0" rtlCol="0" anchor="t"/>
-          <a:lstStyle/>
-          <a:p>
-            <a:pPr marL="342900" indent="-342900">
-              <a:spcAft>
-                <a:spcPts val="800"/>
-              </a:spcAft>
-              <a:buSzPct val="100000"/>
-              <a:buChar char="•"/>
-            </a:pPr>
-            <a:r>
-              <a:rPr lang="en-US" sz="1400" dirty="0">
-                <a:solidFill>
-                  <a:schemeClr val="tx1"/>
-                </a:solidFill>
-              </a:rPr>
-              <a:t>The model is not trusted: it can be fooled, and the next-screen check is what catches it.</a:t>
-            </a:r>
-            <a:endParaRPr lang="en-US" sz="1400" dirty="0"/>
-          </a:p>
-          <a:p>
-            <a:pPr marL="342900" indent="-342900">
-              <a:spcAft>
-                <a:spcPts val="800"/>
-              </a:spcAft>
-              <a:buSzPct val="100000"/>
-              <a:buChar char="•"/>
-            </a:pPr>
-            <a:r>
-              <a:rPr lang="en-US" sz="1400" dirty="0">
-                <a:solidFill>
-                  <a:schemeClr val="tx1"/>
-                </a:solidFill>
-              </a:rPr>
-              <a:t>In the hardest mix the ladder alone fails; adding the model rescues it.</a:t>
-            </a:r>
-            <a:endParaRPr lang="en-US" sz="1400" dirty="0"/>
-          </a:p>
-          <a:p>
-            <a:pPr marL="342900" indent="-342900">
-              <a:spcAft>
-                <a:spcPts val="800"/>
-              </a:spcAft>
-              <a:buSzPct val="100000"/>
-              <a:buChar char="•"/>
-            </a:pPr>
-            <a:r>
-              <a:rPr lang="en-US" sz="1400" dirty="0">
-                <a:solidFill>
-                  <a:schemeClr val="tx1"/>
-                </a:solidFill>
-              </a:rPr>
-              <a:t>Planted-label taps are counted separately, and the check catches them.</a:t>
-            </a:r>
-            <a:endParaRPr lang="en-US" sz="1400" dirty="0"/>
-          </a:p>
-          <a:p>
-            <a:pPr marL="342900" indent="-342900">
-              <a:spcAft>
-                <a:spcPts val="800"/>
-              </a:spcAft>
-              <a:buSzPct val="100000"/>
-              <a:buChar char="•"/>
-            </a:pPr>
-            <a:r>
-              <a:rPr lang="en-US" sz="1400" dirty="0">
-                <a:solidFill>
-                  <a:schemeClr val="tx1"/>
-                </a:solidFill>
-              </a:rPr>
-              <a:t>We measure how hostile UIs treat an agent. We do not build evasion.</a:t>
-            </a:r>
-            <a:endParaRPr lang="en-US" sz="1400" dirty="0"/>
-          </a:p>
-        </p:txBody>
-      </p:sp>
-      <p:sp>
-        <p:nvSpPr>
-          <p:cNvPr id="9" name="Shape 6"/>
-          <p:cNvSpPr/>
-          <p:nvPr/>
-        </p:nvSpPr>
-        <p:spPr>
-          <a:xfrm>
-            <a:off x="548640" y="5989320"/>
-            <a:ext cx="3931920" cy="274320"/>
-          </a:xfrm>
-          <a:prstGeom prst="roundRect">
-            <a:avLst>
-              <a:gd name="adj" fmla="val 50000"/>
-            </a:avLst>
-          </a:prstGeom>
-          <a:solidFill>
-            <a:srgbClr val="FBEFD5"/>
-          </a:solidFill>
-          <a:ln/>
-        </p:spPr>
-        <p:txBody>
-          <a:bodyPr/>
-          <a:lstStyle/>
-          <a:p>
-            <a:endParaRPr lang="en-US"/>
-          </a:p>
-        </p:txBody>
-      </p:sp>
-      <p:sp>
-        <p:nvSpPr>
-          <p:cNvPr id="10" name="Text 7"/>
-          <p:cNvSpPr txBox="1"/>
-          <p:nvPr/>
-        </p:nvSpPr>
-        <p:spPr>
-          <a:xfrm>
-            <a:off x="548640" y="5989320"/>
-            <a:ext cx="3931920" cy="274320"/>
-          </a:xfrm>
-          <a:prstGeom prst="rect">
-            <a:avLst/>
-          </a:prstGeom>
-          <a:noFill/>
-          <a:ln/>
-        </p:spPr>
-        <p:txBody>
-          <a:bodyPr wrap="square" lIns="0" tIns="0" rIns="0" bIns="0" rtlCol="0" anchor="ctr"/>
-          <a:lstStyle/>
-          <a:p>
-            <a:pPr marL="0" indent="0" algn="ctr">
-              <a:buNone/>
-            </a:pPr>
-            <a:r>
-              <a:rPr lang="en-US" sz="1100" b="1" dirty="0">
-                <a:solidFill>
-                  <a:srgbClr val="8A5A00"/>
-                </a:solidFill>
-              </a:rPr>
-              <a:t>ILLUSTRATIVE – MODEL ARMS BEING RE-RUN</a:t>
-            </a:r>
-            <a:endParaRPr lang="en-US" sz="1100" dirty="0"/>
-          </a:p>
-        </p:txBody>
-      </p:sp>
-      <p:sp>
-        <p:nvSpPr>
-          <p:cNvPr id="25" name="Slide Number Placeholder 0"/>
-          <p:cNvSpPr>
-            <a:spLocks noGrp="1"/>
-          </p:cNvSpPr>
-          <p:nvPr>
-            <p:ph type="sldNum" sz="quarter" idx="4294967295"/>
-          </p:nvPr>
-        </p:nvSpPr>
-        <p:spPr>
-          <a:xfrm>
-            <a:off x="11094415" y="6419088"/>
-            <a:ext cx="548640" cy="274320"/>
-          </a:xfrm>
-          <a:prstGeom prst="rect">
-            <a:avLst/>
-          </a:prstGeom>
-          <a:extLst>
-            <a:ext uri="{C572A759-6A51-4108-AA02-DFA0A04FC94B}">
-              <ma14:wrappingTextBoxFlag xmlns="" xmlns:ma14="http://schemas.microsoft.com/office/mac/drawingml/2011/main" val="0"/>
-            </a:ext>
-          </a:extLst>
-        </p:spPr>
-        <p:txBody>
-          <a:bodyPr/>
-          <a:lstStyle>
-            <a:lvl1pPr>
-              <a:defRPr sz="1000">
-                <a:solidFill>
-                  <a:schemeClr val="accent4"/>
-                </a:solidFill>
-              </a:defRPr>
-            </a:lvl1pPr>
-          </a:lstStyle>
-          <a:p>
-            <a:pPr algn="r"/>
-            <a:fld id="{F7021451-1387-4CA6-816F-3879F97B5CBC}" type="slidenum">
-              <a:rPr lang="en-US" b="0"/>
-              <a:t>9</a:t>
-            </a:fld>
-            <a:endParaRPr lang="en-US"/>
-          </a:p>
-        </p:txBody>
-      </p:sp>
     </p:spTree>
   </p:cSld>
   <p:clrMapOvr>
